--- a/guides-pptx/spryker-academy-professional.pptx
+++ b/guides-pptx/spryker-academy-professional.pptx
@@ -206,6 +206,52 @@
     <p:sldId id="454" r:id="rId205"/>
     <p:sldId id="455" r:id="rId206"/>
     <p:sldId id="456" r:id="rId207"/>
+    <p:sldId id="457" r:id="rId208"/>
+    <p:sldId id="458" r:id="rId209"/>
+    <p:sldId id="459" r:id="rId210"/>
+    <p:sldId id="460" r:id="rId211"/>
+    <p:sldId id="461" r:id="rId212"/>
+    <p:sldId id="462" r:id="rId213"/>
+    <p:sldId id="463" r:id="rId214"/>
+    <p:sldId id="464" r:id="rId215"/>
+    <p:sldId id="465" r:id="rId216"/>
+    <p:sldId id="466" r:id="rId217"/>
+    <p:sldId id="467" r:id="rId218"/>
+    <p:sldId id="468" r:id="rId219"/>
+    <p:sldId id="469" r:id="rId220"/>
+    <p:sldId id="470" r:id="rId221"/>
+    <p:sldId id="471" r:id="rId222"/>
+    <p:sldId id="472" r:id="rId223"/>
+    <p:sldId id="473" r:id="rId224"/>
+    <p:sldId id="474" r:id="rId225"/>
+    <p:sldId id="475" r:id="rId226"/>
+    <p:sldId id="476" r:id="rId227"/>
+    <p:sldId id="477" r:id="rId228"/>
+    <p:sldId id="478" r:id="rId229"/>
+    <p:sldId id="479" r:id="rId230"/>
+    <p:sldId id="480" r:id="rId231"/>
+    <p:sldId id="481" r:id="rId232"/>
+    <p:sldId id="482" r:id="rId233"/>
+    <p:sldId id="483" r:id="rId234"/>
+    <p:sldId id="484" r:id="rId235"/>
+    <p:sldId id="485" r:id="rId236"/>
+    <p:sldId id="486" r:id="rId237"/>
+    <p:sldId id="487" r:id="rId238"/>
+    <p:sldId id="488" r:id="rId239"/>
+    <p:sldId id="489" r:id="rId240"/>
+    <p:sldId id="490" r:id="rId241"/>
+    <p:sldId id="491" r:id="rId242"/>
+    <p:sldId id="492" r:id="rId243"/>
+    <p:sldId id="493" r:id="rId244"/>
+    <p:sldId id="494" r:id="rId245"/>
+    <p:sldId id="495" r:id="rId246"/>
+    <p:sldId id="496" r:id="rId247"/>
+    <p:sldId id="497" r:id="rId248"/>
+    <p:sldId id="498" r:id="rId249"/>
+    <p:sldId id="499" r:id="rId250"/>
+    <p:sldId id="500" r:id="rId251"/>
+    <p:sldId id="501" r:id="rId252"/>
+    <p:sldId id="502" r:id="rId253"/>
   </p:sldIdLst>
   <p:sldSz cx="12191695" cy="6858000" type="screen4x3"/>
   <p:notesSz cx="6858000" cy="9144000"/>
@@ -15845,7 +15891,7 @@
               </a:defRPr>
             </a:pPr>
             <a:r>
-              <a:t>Exercise 13: Storage Client - Redis Supplier Lookup</a:t>
+              <a:t>Exercise 14: Storage Client - Redis Supplier Lookup</a:t>
             </a:r>
           </a:p>
         </p:txBody>
@@ -30899,6 +30945,29 @@
               <a:t>Integrate Elasticsearch for product and content search</a:t>
             </a:r>
           </a:p>
+          <a:p>
+            <a:pPr>
+              <a:spcAft>
+                <a:spcPts val="1000"/>
+              </a:spcAft>
+            </a:pPr>
+            <a:r>
+              <a:rPr sz="1600" b="1">
+                <a:solidFill>
+                  <a:srgbClr val="00A89B"/>
+                </a:solidFill>
+              </a:rPr>
+              <a:t>✓  </a:t>
+            </a:r>
+            <a:r>
+              <a:rPr sz="1500">
+                <a:solidFill>
+                  <a:srgbClr val="1A1A1A"/>
+                </a:solidFill>
+              </a:rPr>
+              <a:t>Design RESTful Glue Storefront APIs with resource routing</a:t>
+            </a:r>
+          </a:p>
         </p:txBody>
       </p:sp>
       <p:sp>
@@ -30942,7 +31011,7 @@
                   <a:srgbClr val="1A1A1A"/>
                 </a:solidFill>
               </a:rPr>
-              <a:t>Design RESTful Glue Storefront APIs with resource routing</a:t>
+              <a:t>Model order workflows using the Order Management System (OMS)</a:t>
             </a:r>
           </a:p>
           <a:p>
@@ -30965,7 +31034,7 @@
                   <a:srgbClr val="1A1A1A"/>
                 </a:solidFill>
               </a:rPr>
-              <a:t>Model order workflows using the Order Management System (OMS)</a:t>
+              <a:t>Read from Storage (Redis) using the Client layer</a:t>
             </a:r>
           </a:p>
           <a:p>
@@ -30988,7 +31057,7 @@
                   <a:srgbClr val="1A1A1A"/>
                 </a:solidFill>
               </a:rPr>
-              <a:t>Read from Storage (Redis) using the Client layer</a:t>
+              <a:t>Build Yves Storefront pages with Twig, routing, and controllers</a:t>
             </a:r>
           </a:p>
           <a:p>
@@ -31011,7 +31080,7 @@
                   <a:srgbClr val="1A1A1A"/>
                 </a:solidFill>
               </a:rPr>
-              <a:t>Build Yves Storefront pages with Twig, routing, and controllers</a:t>
+              <a:t>Extend the Merchant Portal with tables, forms, and nested tables</a:t>
             </a:r>
           </a:p>
         </p:txBody>
@@ -31865,6 +31934,1612 @@
 </p:sld>
 </file>
 
+<file path=ppt/slides/slide202.xml><?xml version="1.0" encoding="utf-8"?>
+<p:sld xmlns:a="http://schemas.openxmlformats.org/drawingml/2006/main" xmlns:p="http://schemas.openxmlformats.org/presentationml/2006/main" xmlns:r="http://schemas.openxmlformats.org/officeDocument/2006/relationships">
+  <p:cSld>
+    <p:spTree>
+      <p:nvGrpSpPr>
+        <p:cNvPr id="1" name=""/>
+        <p:cNvGrpSpPr/>
+        <p:nvPr/>
+      </p:nvGrpSpPr>
+      <p:grpSpPr/>
+      <p:sp>
+        <p:nvSpPr>
+          <p:cNvPr id="2" name="TextBox 1"/>
+          <p:cNvSpPr txBox="1"/>
+          <p:nvPr/>
+        </p:nvSpPr>
+        <p:spPr>
+          <a:xfrm>
+            <a:off x="914400" y="2560320"/>
+            <a:ext cx="10362895" cy="1371600"/>
+          </a:xfrm>
+          <a:prstGeom prst="rect">
+            <a:avLst/>
+          </a:prstGeom>
+          <a:noFill/>
+        </p:spPr>
+        <p:txBody>
+          <a:bodyPr wrap="square">
+            <a:spAutoFit/>
+          </a:bodyPr>
+          <a:lstStyle/>
+          <a:p>
+            <a:pPr algn="ctr">
+              <a:defRPr sz="3600" b="1">
+                <a:solidFill>
+                  <a:srgbClr val="00A89B"/>
+                </a:solidFill>
+              </a:defRPr>
+            </a:pPr>
+            <a:r>
+              <a:t>09-merchant-portal-table</a:t>
+            </a:r>
+          </a:p>
+        </p:txBody>
+      </p:sp>
+      <p:sp>
+        <p:nvSpPr>
+          <p:cNvPr id="3" name="Rectangle 2"/>
+          <p:cNvSpPr/>
+          <p:nvPr/>
+        </p:nvSpPr>
+        <p:spPr>
+          <a:xfrm>
+            <a:off x="3657600" y="2286000"/>
+            <a:ext cx="4876495" cy="38100"/>
+          </a:xfrm>
+          <a:prstGeom prst="rect">
+            <a:avLst/>
+          </a:prstGeom>
+          <a:solidFill>
+            <a:srgbClr val="00A89B"/>
+          </a:solidFill>
+          <a:ln>
+            <a:noFill/>
+          </a:ln>
+        </p:spPr>
+        <p:style>
+          <a:lnRef idx="1">
+            <a:schemeClr val="accent1"/>
+          </a:lnRef>
+          <a:fillRef idx="3">
+            <a:schemeClr val="accent1"/>
+          </a:fillRef>
+          <a:effectRef idx="2">
+            <a:schemeClr val="accent1"/>
+          </a:effectRef>
+          <a:fontRef idx="minor">
+            <a:schemeClr val="lt1"/>
+          </a:fontRef>
+        </p:style>
+        <p:txBody>
+          <a:bodyPr rtlCol="0" anchor="ctr"/>
+          <a:lstStyle/>
+          <a:p>
+            <a:pPr algn="ctr"/>
+          </a:p>
+        </p:txBody>
+      </p:sp>
+    </p:spTree>
+  </p:cSld>
+  <p:clrMapOvr>
+    <a:masterClrMapping/>
+  </p:clrMapOvr>
+</p:sld>
+</file>
+
+<file path=ppt/slides/slide203.xml><?xml version="1.0" encoding="utf-8"?>
+<p:sld xmlns:a="http://schemas.openxmlformats.org/drawingml/2006/main" xmlns:p="http://schemas.openxmlformats.org/presentationml/2006/main" xmlns:r="http://schemas.openxmlformats.org/officeDocument/2006/relationships">
+  <p:cSld>
+    <p:spTree>
+      <p:nvGrpSpPr>
+        <p:cNvPr id="1" name=""/>
+        <p:cNvGrpSpPr/>
+        <p:nvPr/>
+      </p:nvGrpSpPr>
+      <p:grpSpPr/>
+      <p:sp>
+        <p:nvSpPr>
+          <p:cNvPr id="2" name="TextBox 1"/>
+          <p:cNvSpPr txBox="1"/>
+          <p:nvPr/>
+        </p:nvSpPr>
+        <p:spPr>
+          <a:xfrm>
+            <a:off x="640080" y="365760"/>
+            <a:ext cx="10881360" cy="731520"/>
+          </a:xfrm>
+          <a:prstGeom prst="rect">
+            <a:avLst/>
+          </a:prstGeom>
+          <a:noFill/>
+        </p:spPr>
+        <p:txBody>
+          <a:bodyPr wrap="square">
+            <a:spAutoFit/>
+          </a:bodyPr>
+          <a:lstStyle/>
+          <a:p>
+            <a:pPr>
+              <a:defRPr sz="2800" b="1">
+                <a:solidFill>
+                  <a:srgbClr val="00A89B"/>
+                </a:solidFill>
+              </a:defRPr>
+            </a:pPr>
+            <a:r>
+              <a:t>Exercise 15: Merchant Portal — Supplier Table</a:t>
+            </a:r>
+          </a:p>
+        </p:txBody>
+      </p:sp>
+      <p:sp>
+        <p:nvSpPr>
+          <p:cNvPr id="3" name="Rectangle 2"/>
+          <p:cNvSpPr/>
+          <p:nvPr/>
+        </p:nvSpPr>
+        <p:spPr>
+          <a:xfrm>
+            <a:off x="640080" y="1051560"/>
+            <a:ext cx="1828800" cy="25400"/>
+          </a:xfrm>
+          <a:prstGeom prst="rect">
+            <a:avLst/>
+          </a:prstGeom>
+          <a:solidFill>
+            <a:srgbClr val="00A89B"/>
+          </a:solidFill>
+          <a:ln>
+            <a:noFill/>
+          </a:ln>
+        </p:spPr>
+        <p:style>
+          <a:lnRef idx="1">
+            <a:schemeClr val="accent1"/>
+          </a:lnRef>
+          <a:fillRef idx="3">
+            <a:schemeClr val="accent1"/>
+          </a:fillRef>
+          <a:effectRef idx="2">
+            <a:schemeClr val="accent1"/>
+          </a:effectRef>
+          <a:fontRef idx="minor">
+            <a:schemeClr val="lt1"/>
+          </a:fontRef>
+        </p:style>
+        <p:txBody>
+          <a:bodyPr rtlCol="0" anchor="ctr"/>
+          <a:lstStyle/>
+          <a:p>
+            <a:pPr algn="ctr"/>
+          </a:p>
+        </p:txBody>
+      </p:sp>
+      <p:sp>
+        <p:nvSpPr>
+          <p:cNvPr id="4" name="TextBox 3"/>
+          <p:cNvSpPr txBox="1"/>
+          <p:nvPr/>
+        </p:nvSpPr>
+        <p:spPr>
+          <a:xfrm>
+            <a:off x="640080" y="1371600"/>
+            <a:ext cx="10881360" cy="5029200"/>
+          </a:xfrm>
+          <a:prstGeom prst="rect">
+            <a:avLst/>
+          </a:prstGeom>
+          <a:noFill/>
+        </p:spPr>
+        <p:txBody>
+          <a:bodyPr wrap="square">
+            <a:spAutoFit/>
+          </a:bodyPr>
+          <a:lstStyle/>
+          <a:p>
+            <a:pPr>
+              <a:spcAft>
+                <a:spcPts val="800"/>
+              </a:spcAft>
+              <a:defRPr sz="1600">
+                <a:solidFill>
+                  <a:srgbClr val="1A1A1A"/>
+                </a:solidFill>
+              </a:defRPr>
+            </a:pPr>
+            <a:r>
+              <a:t>In this exercise, you will build a supplier list page in the Merchant Portal using Spryker’s GuiTable framework. The table displays only suppliers belonging to the current merchant and supports pagination, sorting, searching, and filtering.</a:t>
+            </a:r>
+          </a:p>
+          <a:p>
+            <a:pPr>
+              <a:spcAft>
+                <a:spcPts val="800"/>
+              </a:spcAft>
+              <a:defRPr sz="1600">
+                <a:solidFill>
+                  <a:srgbClr val="1A1A1A"/>
+                </a:solidFill>
+              </a:defRPr>
+            </a:pPr>
+            <a:r>
+              <a:t>You will learn how to: - Create a Merchant Portal GUI module ( SupplierMerchantPortalGui ) - Build a GuiTable configuration (columns, filters, row actions) - Implement a data provider that fetches merchant-scoped data - Write a repository query that joins suppliers with merchant assignments - Register an Angular web component in the module - Configure ACL rules and Merchant Portal navigation</a:t>
+            </a:r>
+          </a:p>
+        </p:txBody>
+      </p:sp>
+    </p:spTree>
+  </p:cSld>
+  <p:clrMapOvr>
+    <a:masterClrMapping/>
+  </p:clrMapOvr>
+</p:sld>
+</file>
+
+<file path=ppt/slides/slide204.xml><?xml version="1.0" encoding="utf-8"?>
+<p:sld xmlns:a="http://schemas.openxmlformats.org/drawingml/2006/main" xmlns:p="http://schemas.openxmlformats.org/presentationml/2006/main" xmlns:r="http://schemas.openxmlformats.org/officeDocument/2006/relationships">
+  <p:cSld>
+    <p:spTree>
+      <p:nvGrpSpPr>
+        <p:cNvPr id="1" name=""/>
+        <p:cNvGrpSpPr/>
+        <p:nvPr/>
+      </p:nvGrpSpPr>
+      <p:grpSpPr/>
+      <p:sp>
+        <p:nvSpPr>
+          <p:cNvPr id="2" name="TextBox 1"/>
+          <p:cNvSpPr txBox="1"/>
+          <p:nvPr/>
+        </p:nvSpPr>
+        <p:spPr>
+          <a:xfrm>
+            <a:off x="640080" y="365760"/>
+            <a:ext cx="10881360" cy="731520"/>
+          </a:xfrm>
+          <a:prstGeom prst="rect">
+            <a:avLst/>
+          </a:prstGeom>
+          <a:noFill/>
+        </p:spPr>
+        <p:txBody>
+          <a:bodyPr wrap="square">
+            <a:spAutoFit/>
+          </a:bodyPr>
+          <a:lstStyle/>
+          <a:p>
+            <a:pPr>
+              <a:defRPr sz="2800" b="1">
+                <a:solidFill>
+                  <a:srgbClr val="00A89B"/>
+                </a:solidFill>
+              </a:defRPr>
+            </a:pPr>
+            <a:r>
+              <a:t>Prerequisites</a:t>
+            </a:r>
+          </a:p>
+        </p:txBody>
+      </p:sp>
+      <p:sp>
+        <p:nvSpPr>
+          <p:cNvPr id="3" name="Rectangle 2"/>
+          <p:cNvSpPr/>
+          <p:nvPr/>
+        </p:nvSpPr>
+        <p:spPr>
+          <a:xfrm>
+            <a:off x="640080" y="1051560"/>
+            <a:ext cx="1828800" cy="25400"/>
+          </a:xfrm>
+          <a:prstGeom prst="rect">
+            <a:avLst/>
+          </a:prstGeom>
+          <a:solidFill>
+            <a:srgbClr val="00A89B"/>
+          </a:solidFill>
+          <a:ln>
+            <a:noFill/>
+          </a:ln>
+        </p:spPr>
+        <p:style>
+          <a:lnRef idx="1">
+            <a:schemeClr val="accent1"/>
+          </a:lnRef>
+          <a:fillRef idx="3">
+            <a:schemeClr val="accent1"/>
+          </a:fillRef>
+          <a:effectRef idx="2">
+            <a:schemeClr val="accent1"/>
+          </a:effectRef>
+          <a:fontRef idx="minor">
+            <a:schemeClr val="lt1"/>
+          </a:fontRef>
+        </p:style>
+        <p:txBody>
+          <a:bodyPr rtlCol="0" anchor="ctr"/>
+          <a:lstStyle/>
+          <a:p>
+            <a:pPr algn="ctr"/>
+          </a:p>
+        </p:txBody>
+      </p:sp>
+      <p:sp>
+        <p:nvSpPr>
+          <p:cNvPr id="4" name="TextBox 3"/>
+          <p:cNvSpPr txBox="1"/>
+          <p:nvPr/>
+        </p:nvSpPr>
+        <p:spPr>
+          <a:xfrm>
+            <a:off x="640080" y="1371600"/>
+            <a:ext cx="10881360" cy="5029200"/>
+          </a:xfrm>
+          <a:prstGeom prst="rect">
+            <a:avLst/>
+          </a:prstGeom>
+          <a:noFill/>
+        </p:spPr>
+        <p:txBody>
+          <a:bodyPr wrap="square">
+            <a:spAutoFit/>
+          </a:bodyPr>
+          <a:lstStyle/>
+          <a:p>
+            <a:pPr>
+              <a:spcAft>
+                <a:spcPts val="400"/>
+              </a:spcAft>
+              <a:defRPr sz="1500">
+                <a:solidFill>
+                  <a:srgbClr val="1A1A1A"/>
+                </a:solidFill>
+              </a:defRPr>
+            </a:pPr>
+            <a:r>
+              <a:t>• Completed Exercise 9 (Back Office) — supplier facade, repository, and entity manager must exist</a:t>
+            </a:r>
+          </a:p>
+          <a:p>
+            <a:pPr>
+              <a:spcAft>
+                <a:spcPts val="400"/>
+              </a:spcAft>
+              <a:defRPr sz="1500">
+                <a:solidFill>
+                  <a:srgbClr val="1A1A1A"/>
+                </a:solidFill>
+              </a:defRPr>
+            </a:pPr>
+            <a:r>
+              <a:t>• Suppliers assigned to a merchant via pyz_merchant_to_supplier</a:t>
+            </a:r>
+          </a:p>
+          <a:p>
+            <a:pPr>
+              <a:spcAft>
+                <a:spcPts val="400"/>
+              </a:spcAft>
+              <a:defRPr sz="1500">
+                <a:solidFill>
+                  <a:srgbClr val="1A1A1A"/>
+                </a:solidFill>
+              </a:defRPr>
+            </a:pPr>
+            <a:r>
+              <a:t>• Logged in as a demo merchant user</a:t>
+            </a:r>
+          </a:p>
+        </p:txBody>
+      </p:sp>
+    </p:spTree>
+  </p:cSld>
+  <p:clrMapOvr>
+    <a:masterClrMapping/>
+  </p:clrMapOvr>
+</p:sld>
+</file>
+
+<file path=ppt/slides/slide205.xml><?xml version="1.0" encoding="utf-8"?>
+<p:sld xmlns:a="http://schemas.openxmlformats.org/drawingml/2006/main" xmlns:p="http://schemas.openxmlformats.org/presentationml/2006/main" xmlns:r="http://schemas.openxmlformats.org/officeDocument/2006/relationships">
+  <p:cSld>
+    <p:spTree>
+      <p:nvGrpSpPr>
+        <p:cNvPr id="1" name=""/>
+        <p:cNvGrpSpPr/>
+        <p:nvPr/>
+      </p:nvGrpSpPr>
+      <p:grpSpPr/>
+      <p:sp>
+        <p:nvSpPr>
+          <p:cNvPr id="2" name="TextBox 1"/>
+          <p:cNvSpPr txBox="1"/>
+          <p:nvPr/>
+        </p:nvSpPr>
+        <p:spPr>
+          <a:xfrm>
+            <a:off x="640080" y="365760"/>
+            <a:ext cx="10881360" cy="731520"/>
+          </a:xfrm>
+          <a:prstGeom prst="rect">
+            <a:avLst/>
+          </a:prstGeom>
+          <a:noFill/>
+        </p:spPr>
+        <p:txBody>
+          <a:bodyPr wrap="square">
+            <a:spAutoFit/>
+          </a:bodyPr>
+          <a:lstStyle/>
+          <a:p>
+            <a:pPr>
+              <a:defRPr sz="2800" b="1">
+                <a:solidFill>
+                  <a:srgbClr val="00A89B"/>
+                </a:solidFill>
+              </a:defRPr>
+            </a:pPr>
+            <a:r>
+              <a:t>Loading the Exercise</a:t>
+            </a:r>
+          </a:p>
+        </p:txBody>
+      </p:sp>
+      <p:sp>
+        <p:nvSpPr>
+          <p:cNvPr id="3" name="Rectangle 2"/>
+          <p:cNvSpPr/>
+          <p:nvPr/>
+        </p:nvSpPr>
+        <p:spPr>
+          <a:xfrm>
+            <a:off x="640080" y="1051560"/>
+            <a:ext cx="1828800" cy="25400"/>
+          </a:xfrm>
+          <a:prstGeom prst="rect">
+            <a:avLst/>
+          </a:prstGeom>
+          <a:solidFill>
+            <a:srgbClr val="00A89B"/>
+          </a:solidFill>
+          <a:ln>
+            <a:noFill/>
+          </a:ln>
+        </p:spPr>
+        <p:style>
+          <a:lnRef idx="1">
+            <a:schemeClr val="accent1"/>
+          </a:lnRef>
+          <a:fillRef idx="3">
+            <a:schemeClr val="accent1"/>
+          </a:fillRef>
+          <a:effectRef idx="2">
+            <a:schemeClr val="accent1"/>
+          </a:effectRef>
+          <a:fontRef idx="minor">
+            <a:schemeClr val="lt1"/>
+          </a:fontRef>
+        </p:style>
+        <p:txBody>
+          <a:bodyPr rtlCol="0" anchor="ctr"/>
+          <a:lstStyle/>
+          <a:p>
+            <a:pPr algn="ctr"/>
+          </a:p>
+        </p:txBody>
+      </p:sp>
+      <p:sp>
+        <p:nvSpPr>
+          <p:cNvPr id="4" name="TextBox 3"/>
+          <p:cNvSpPr txBox="1"/>
+          <p:nvPr/>
+        </p:nvSpPr>
+        <p:spPr>
+          <a:xfrm>
+            <a:off x="640080" y="1371600"/>
+            <a:ext cx="10881360" cy="5029200"/>
+          </a:xfrm>
+          <a:prstGeom prst="rect">
+            <a:avLst/>
+          </a:prstGeom>
+          <a:noFill/>
+        </p:spPr>
+        <p:txBody>
+          <a:bodyPr wrap="square">
+            <a:spAutoFit/>
+          </a:bodyPr>
+          <a:lstStyle/>
+          <a:p>
+            <a:pPr>
+              <a:spcBef>
+                <a:spcPts val="0"/>
+              </a:spcBef>
+              <a:spcAft>
+                <a:spcPts val="0"/>
+              </a:spcAft>
+            </a:pPr>
+            <a:r>
+              <a:rPr sz="900">
+                <a:solidFill>
+                  <a:srgbClr val="2D2D2D"/>
+                </a:solidFill>
+                <a:latin typeface="Consolas"/>
+              </a:rPr>
+              <a:t>./exercises/load.sh</a:t>
+            </a:r>
+            <a:r>
+              <a:rPr sz="900">
+                <a:solidFill>
+                  <a:srgbClr val="2D2D2D"/>
+                </a:solidFill>
+                <a:latin typeface="Consolas"/>
+              </a:rPr>
+              <a:t> supplier intermediate/merchant-portal-table/skeleton</a:t>
+            </a:r>
+          </a:p>
+          <a:p>
+            <a:pPr>
+              <a:spcBef>
+                <a:spcPts val="0"/>
+              </a:spcBef>
+              <a:spcAft>
+                <a:spcPts val="0"/>
+              </a:spcAft>
+            </a:pPr>
+            <a:r>
+              <a:rPr sz="900">
+                <a:solidFill>
+                  <a:srgbClr val="2D2D2D"/>
+                </a:solidFill>
+                <a:latin typeface="Consolas"/>
+              </a:rPr>
+              <a:t>docker/sdk</a:t>
+            </a:r>
+            <a:r>
+              <a:rPr sz="900">
+                <a:solidFill>
+                  <a:srgbClr val="2D2D2D"/>
+                </a:solidFill>
+                <a:latin typeface="Consolas"/>
+              </a:rPr>
+              <a:t> cli composer dump-autoload</a:t>
+            </a:r>
+          </a:p>
+          <a:p>
+            <a:pPr>
+              <a:spcBef>
+                <a:spcPts val="0"/>
+              </a:spcBef>
+              <a:spcAft>
+                <a:spcPts val="0"/>
+              </a:spcAft>
+            </a:pPr>
+            <a:r>
+              <a:rPr sz="900">
+                <a:solidFill>
+                  <a:srgbClr val="2D2D2D"/>
+                </a:solidFill>
+                <a:latin typeface="Consolas"/>
+              </a:rPr>
+              <a:t>docker/sdk</a:t>
+            </a:r>
+            <a:r>
+              <a:rPr sz="900">
+                <a:solidFill>
+                  <a:srgbClr val="2D2D2D"/>
+                </a:solidFill>
+                <a:latin typeface="Consolas"/>
+              </a:rPr>
+              <a:t> console transfer:generate</a:t>
+            </a:r>
+          </a:p>
+          <a:p>
+            <a:pPr>
+              <a:spcBef>
+                <a:spcPts val="0"/>
+              </a:spcBef>
+              <a:spcAft>
+                <a:spcPts val="0"/>
+              </a:spcAft>
+            </a:pPr>
+            <a:r>
+              <a:rPr sz="900">
+                <a:solidFill>
+                  <a:srgbClr val="2D2D2D"/>
+                </a:solidFill>
+                <a:latin typeface="Consolas"/>
+              </a:rPr>
+              <a:t>docker/sdk</a:t>
+            </a:r>
+            <a:r>
+              <a:rPr sz="900">
+                <a:solidFill>
+                  <a:srgbClr val="2D2D2D"/>
+                </a:solidFill>
+                <a:latin typeface="Consolas"/>
+              </a:rPr>
+              <a:t> console cache:empty-all</a:t>
+            </a:r>
+          </a:p>
+        </p:txBody>
+      </p:sp>
+    </p:spTree>
+  </p:cSld>
+  <p:clrMapOvr>
+    <a:masterClrMapping/>
+  </p:clrMapOvr>
+</p:sld>
+</file>
+
+<file path=ppt/slides/slide206.xml><?xml version="1.0" encoding="utf-8"?>
+<p:sld xmlns:a="http://schemas.openxmlformats.org/drawingml/2006/main" xmlns:p="http://schemas.openxmlformats.org/presentationml/2006/main" xmlns:r="http://schemas.openxmlformats.org/officeDocument/2006/relationships">
+  <p:cSld>
+    <p:spTree>
+      <p:nvGrpSpPr>
+        <p:cNvPr id="1" name=""/>
+        <p:cNvGrpSpPr/>
+        <p:nvPr/>
+      </p:nvGrpSpPr>
+      <p:grpSpPr/>
+      <p:sp>
+        <p:nvSpPr>
+          <p:cNvPr id="2" name="TextBox 1"/>
+          <p:cNvSpPr txBox="1"/>
+          <p:nvPr/>
+        </p:nvSpPr>
+        <p:spPr>
+          <a:xfrm>
+            <a:off x="640080" y="365760"/>
+            <a:ext cx="10881360" cy="731520"/>
+          </a:xfrm>
+          <a:prstGeom prst="rect">
+            <a:avLst/>
+          </a:prstGeom>
+          <a:noFill/>
+        </p:spPr>
+        <p:txBody>
+          <a:bodyPr wrap="square">
+            <a:spAutoFit/>
+          </a:bodyPr>
+          <a:lstStyle/>
+          <a:p>
+            <a:pPr>
+              <a:defRPr sz="2800" b="1">
+                <a:solidFill>
+                  <a:srgbClr val="00A89B"/>
+                </a:solidFill>
+              </a:defRPr>
+            </a:pPr>
+            <a:r>
+              <a:t>Background: Merchant Portal Architecture</a:t>
+            </a:r>
+          </a:p>
+        </p:txBody>
+      </p:sp>
+      <p:sp>
+        <p:nvSpPr>
+          <p:cNvPr id="3" name="Rectangle 2"/>
+          <p:cNvSpPr/>
+          <p:nvPr/>
+        </p:nvSpPr>
+        <p:spPr>
+          <a:xfrm>
+            <a:off x="640080" y="1051560"/>
+            <a:ext cx="1828800" cy="25400"/>
+          </a:xfrm>
+          <a:prstGeom prst="rect">
+            <a:avLst/>
+          </a:prstGeom>
+          <a:solidFill>
+            <a:srgbClr val="00A89B"/>
+          </a:solidFill>
+          <a:ln>
+            <a:noFill/>
+          </a:ln>
+        </p:spPr>
+        <p:style>
+          <a:lnRef idx="1">
+            <a:schemeClr val="accent1"/>
+          </a:lnRef>
+          <a:fillRef idx="3">
+            <a:schemeClr val="accent1"/>
+          </a:fillRef>
+          <a:effectRef idx="2">
+            <a:schemeClr val="accent1"/>
+          </a:effectRef>
+          <a:fontRef idx="minor">
+            <a:schemeClr val="lt1"/>
+          </a:fontRef>
+        </p:style>
+        <p:txBody>
+          <a:bodyPr rtlCol="0" anchor="ctr"/>
+          <a:lstStyle/>
+          <a:p>
+            <a:pPr algn="ctr"/>
+          </a:p>
+        </p:txBody>
+      </p:sp>
+      <p:sp>
+        <p:nvSpPr>
+          <p:cNvPr id="4" name="TextBox 3"/>
+          <p:cNvSpPr txBox="1"/>
+          <p:nvPr/>
+        </p:nvSpPr>
+        <p:spPr>
+          <a:xfrm>
+            <a:off x="640080" y="1371600"/>
+            <a:ext cx="10881360" cy="5029200"/>
+          </a:xfrm>
+          <a:prstGeom prst="rect">
+            <a:avLst/>
+          </a:prstGeom>
+          <a:noFill/>
+        </p:spPr>
+        <p:txBody>
+          <a:bodyPr wrap="square">
+            <a:spAutoFit/>
+          </a:bodyPr>
+          <a:lstStyle/>
+          <a:p>
+            <a:pPr>
+              <a:spcAft>
+                <a:spcPts val="800"/>
+              </a:spcAft>
+              <a:defRPr sz="1600">
+                <a:solidFill>
+                  <a:srgbClr val="1A1A1A"/>
+                </a:solidFill>
+              </a:defRPr>
+            </a:pPr>
+            <a:r>
+              <a:t>The Merchant Portal uses a different architecture from the Back Office:</a:t>
+            </a:r>
+          </a:p>
+          <a:p>
+            <a:pPr>
+              <a:spcAft>
+                <a:spcPts val="100"/>
+              </a:spcAft>
+              <a:defRPr sz="1000">
+                <a:solidFill>
+                  <a:srgbClr val="1A1A1A"/>
+                </a:solidFill>
+                <a:latin typeface="Consolas"/>
+              </a:defRPr>
+            </a:pPr>
+            <a:r>
+              <a:t>Aspect          Back Office                           Merchant Portal                            </a:t>
+            </a:r>
+          </a:p>
+          <a:p>
+            <a:pPr>
+              <a:spcAft>
+                <a:spcPts val="100"/>
+              </a:spcAft>
+              <a:defRPr sz="1000">
+                <a:solidFill>
+                  <a:srgbClr val="1A1A1A"/>
+                </a:solidFill>
+                <a:latin typeface="Consolas"/>
+              </a:defRPr>
+            </a:pPr>
+            <a:r>
+              <a:t>--------------  ------------------------------------  -------------------------------------------</a:t>
+            </a:r>
+          </a:p>
+          <a:p>
+            <a:pPr>
+              <a:spcAft>
+                <a:spcPts val="100"/>
+              </a:spcAft>
+              <a:defRPr sz="1000">
+                <a:solidFill>
+                  <a:srgbClr val="1A1A1A"/>
+                </a:solidFill>
+                <a:latin typeface="Consolas"/>
+              </a:defRPr>
+            </a:pPr>
+            <a:r>
+              <a:t>Frontend        Twig + jQuery                         Angular Web Components                     </a:t>
+            </a:r>
+          </a:p>
+          <a:p>
+            <a:pPr>
+              <a:spcAft>
+                <a:spcPts val="100"/>
+              </a:spcAft>
+              <a:defRPr sz="1000">
+                <a:solidFill>
+                  <a:srgbClr val="1A1A1A"/>
+                </a:solidFill>
+                <a:latin typeface="Consolas"/>
+              </a:defRPr>
+            </a:pPr>
+            <a:r>
+              <a:t>Tables          AbstractTable (server-rendered HTML)  GuiTable (JSON config + Angular)           </a:t>
+            </a:r>
+          </a:p>
+          <a:p>
+            <a:pPr>
+              <a:spcAft>
+                <a:spcPts val="100"/>
+              </a:spcAft>
+              <a:defRPr sz="1000">
+                <a:solidFill>
+                  <a:srgbClr val="1A1A1A"/>
+                </a:solidFill>
+                <a:latin typeface="Consolas"/>
+              </a:defRPr>
+            </a:pPr>
+            <a:r>
+              <a:t>Data flow       Controller renders full page          Controller returns JSON, Angular renders UI</a:t>
+            </a:r>
+          </a:p>
+          <a:p>
+            <a:pPr>
+              <a:spcAft>
+                <a:spcPts val="100"/>
+              </a:spcAft>
+              <a:defRPr sz="1000">
+                <a:solidFill>
+                  <a:srgbClr val="1A1A1A"/>
+                </a:solidFill>
+                <a:latin typeface="Consolas"/>
+              </a:defRPr>
+            </a:pPr>
+            <a:r>
+              <a:t>Layout          @Gui/Layout/layout.twig               @ZedUi/Layout/merchant-layout-main.twig    </a:t>
+            </a:r>
+          </a:p>
+          <a:p>
+            <a:pPr>
+              <a:spcAft>
+                <a:spcPts val="100"/>
+              </a:spcAft>
+              <a:defRPr sz="1000">
+                <a:solidFill>
+                  <a:srgbClr val="1A1A1A"/>
+                </a:solidFill>
+                <a:latin typeface="Consolas"/>
+              </a:defRPr>
+            </a:pPr>
+            <a:r>
+              <a:t>Navigation      navigation.xml                        navigation-main-merchant-portal.xml        </a:t>
+            </a:r>
+          </a:p>
+          <a:p>
+            <a:pPr>
+              <a:spcAft>
+                <a:spcPts val="100"/>
+              </a:spcAft>
+              <a:defRPr sz="1000">
+                <a:solidFill>
+                  <a:srgbClr val="1A1A1A"/>
+                </a:solidFill>
+                <a:latin typeface="Consolas"/>
+              </a:defRPr>
+            </a:pPr>
+            <a:r>
+              <a:t>Access control  Back Office ACL                       Merchant Portal ACL plugins</a:t>
+            </a:r>
+          </a:p>
+          <a:p>
+            <a:pPr>
+              <a:spcAft>
+                <a:spcPts val="800"/>
+              </a:spcAft>
+              <a:defRPr sz="1600">
+                <a:solidFill>
+                  <a:srgbClr val="1A1A1A"/>
+                </a:solidFill>
+              </a:defRPr>
+            </a:pPr>
+            <a:r>
+              <a:t>GuiTable flow:</a:t>
+            </a:r>
+          </a:p>
+        </p:txBody>
+      </p:sp>
+    </p:spTree>
+  </p:cSld>
+  <p:clrMapOvr>
+    <a:masterClrMapping/>
+  </p:clrMapOvr>
+</p:sld>
+</file>
+
+<file path=ppt/slides/slide207.xml><?xml version="1.0" encoding="utf-8"?>
+<p:sld xmlns:a="http://schemas.openxmlformats.org/drawingml/2006/main" xmlns:p="http://schemas.openxmlformats.org/presentationml/2006/main" xmlns:r="http://schemas.openxmlformats.org/officeDocument/2006/relationships">
+  <p:cSld>
+    <p:spTree>
+      <p:nvGrpSpPr>
+        <p:cNvPr id="1" name=""/>
+        <p:cNvGrpSpPr/>
+        <p:nvPr/>
+      </p:nvGrpSpPr>
+      <p:grpSpPr/>
+      <p:sp>
+        <p:nvSpPr>
+          <p:cNvPr id="2" name="TextBox 1"/>
+          <p:cNvSpPr txBox="1"/>
+          <p:nvPr/>
+        </p:nvSpPr>
+        <p:spPr>
+          <a:xfrm>
+            <a:off x="640080" y="365760"/>
+            <a:ext cx="10881360" cy="731520"/>
+          </a:xfrm>
+          <a:prstGeom prst="rect">
+            <a:avLst/>
+          </a:prstGeom>
+          <a:noFill/>
+        </p:spPr>
+        <p:txBody>
+          <a:bodyPr wrap="square">
+            <a:spAutoFit/>
+          </a:bodyPr>
+          <a:lstStyle/>
+          <a:p>
+            <a:pPr>
+              <a:defRPr sz="2800" b="1">
+                <a:solidFill>
+                  <a:srgbClr val="00A89B"/>
+                </a:solidFill>
+              </a:defRPr>
+            </a:pPr>
+            <a:r>
+              <a:t>Background: Merchant Portal Architecture (cont.)</a:t>
+            </a:r>
+          </a:p>
+        </p:txBody>
+      </p:sp>
+      <p:sp>
+        <p:nvSpPr>
+          <p:cNvPr id="3" name="Rectangle 2"/>
+          <p:cNvSpPr/>
+          <p:nvPr/>
+        </p:nvSpPr>
+        <p:spPr>
+          <a:xfrm>
+            <a:off x="640080" y="1051560"/>
+            <a:ext cx="1828800" cy="25400"/>
+          </a:xfrm>
+          <a:prstGeom prst="rect">
+            <a:avLst/>
+          </a:prstGeom>
+          <a:solidFill>
+            <a:srgbClr val="00A89B"/>
+          </a:solidFill>
+          <a:ln>
+            <a:noFill/>
+          </a:ln>
+        </p:spPr>
+        <p:style>
+          <a:lnRef idx="1">
+            <a:schemeClr val="accent1"/>
+          </a:lnRef>
+          <a:fillRef idx="3">
+            <a:schemeClr val="accent1"/>
+          </a:fillRef>
+          <a:effectRef idx="2">
+            <a:schemeClr val="accent1"/>
+          </a:effectRef>
+          <a:fontRef idx="minor">
+            <a:schemeClr val="lt1"/>
+          </a:fontRef>
+        </p:style>
+        <p:txBody>
+          <a:bodyPr rtlCol="0" anchor="ctr"/>
+          <a:lstStyle/>
+          <a:p>
+            <a:pPr algn="ctr"/>
+          </a:p>
+        </p:txBody>
+      </p:sp>
+      <p:sp>
+        <p:nvSpPr>
+          <p:cNvPr id="4" name="TextBox 3"/>
+          <p:cNvSpPr txBox="1"/>
+          <p:nvPr/>
+        </p:nvSpPr>
+        <p:spPr>
+          <a:xfrm>
+            <a:off x="640080" y="1371600"/>
+            <a:ext cx="10881360" cy="5029200"/>
+          </a:xfrm>
+          <a:prstGeom prst="rect">
+            <a:avLst/>
+          </a:prstGeom>
+          <a:noFill/>
+        </p:spPr>
+        <p:txBody>
+          <a:bodyPr wrap="square">
+            <a:spAutoFit/>
+          </a:bodyPr>
+          <a:lstStyle/>
+          <a:p>
+            <a:pPr>
+              <a:spcBef>
+                <a:spcPts val="0"/>
+              </a:spcBef>
+              <a:spcAft>
+                <a:spcPts val="0"/>
+              </a:spcAft>
+            </a:pPr>
+            <a:r>
+              <a:rPr sz="900">
+                <a:solidFill>
+                  <a:srgbClr val="2D2D2D"/>
+                </a:solidFill>
+                <a:latin typeface="Consolas"/>
+              </a:rPr>
+              <a:t>GET /supplier-merchant-portal-gui/supplier (page load)</a:t>
+            </a:r>
+          </a:p>
+          <a:p>
+            <a:pPr>
+              <a:spcBef>
+                <a:spcPts val="0"/>
+              </a:spcBef>
+              <a:spcAft>
+                <a:spcPts val="0"/>
+              </a:spcAft>
+            </a:pPr>
+            <a:r>
+              <a:rPr sz="900">
+                <a:solidFill>
+                  <a:srgbClr val="2D2D2D"/>
+                </a:solidFill>
+                <a:latin typeface="Consolas"/>
+              </a:rPr>
+              <a:t>├── SupplierController::indexAction()</a:t>
+            </a:r>
+          </a:p>
+          <a:p>
+            <a:pPr>
+              <a:spcBef>
+                <a:spcPts val="0"/>
+              </a:spcBef>
+              <a:spcAft>
+                <a:spcPts val="0"/>
+              </a:spcAft>
+            </a:pPr>
+            <a:r>
+              <a:rPr sz="900">
+                <a:solidFill>
+                  <a:srgbClr val="2D2D2D"/>
+                </a:solidFill>
+                <a:latin typeface="Consolas"/>
+              </a:rPr>
+              <a:t>├── Returns GuiTable configuration as JSON in Twig</a:t>
+            </a:r>
+          </a:p>
+          <a:p>
+            <a:pPr>
+              <a:spcBef>
+                <a:spcPts val="0"/>
+              </a:spcBef>
+              <a:spcAft>
+                <a:spcPts val="0"/>
+              </a:spcAft>
+            </a:pPr>
+            <a:r>
+              <a:rPr sz="900">
+                <a:solidFill>
+                  <a:srgbClr val="2D2D2D"/>
+                </a:solidFill>
+                <a:latin typeface="Consolas"/>
+              </a:rPr>
+              <a:t>└── Angular &lt;web-mp-supplier-list&gt; renders the table shell</a:t>
+            </a:r>
+          </a:p>
+          <a:p>
+            <a:pPr>
+              <a:spcBef>
+                <a:spcPts val="0"/>
+              </a:spcBef>
+              <a:spcAft>
+                <a:spcPts val="0"/>
+              </a:spcAft>
+            </a:pPr>
+            <a:r>
+              <a:rPr sz="900">
+                <a:latin typeface="Consolas"/>
+              </a:rPr>
+              <a:t> </a:t>
+            </a:r>
+          </a:p>
+          <a:p>
+            <a:pPr>
+              <a:spcBef>
+                <a:spcPts val="0"/>
+              </a:spcBef>
+              <a:spcAft>
+                <a:spcPts val="0"/>
+              </a:spcAft>
+            </a:pPr>
+            <a:r>
+              <a:rPr sz="900">
+                <a:solidFill>
+                  <a:srgbClr val="2D2D2D"/>
+                </a:solidFill>
+                <a:latin typeface="Consolas"/>
+              </a:rPr>
+              <a:t>GET /supplier-merchant-portal-gui/supplier/table-data (AJAX)</a:t>
+            </a:r>
+          </a:p>
+          <a:p>
+            <a:pPr>
+              <a:spcBef>
+                <a:spcPts val="0"/>
+              </a:spcBef>
+              <a:spcAft>
+                <a:spcPts val="0"/>
+              </a:spcAft>
+            </a:pPr>
+            <a:r>
+              <a:rPr sz="900">
+                <a:solidFill>
+                  <a:srgbClr val="2D2D2D"/>
+                </a:solidFill>
+                <a:latin typeface="Consolas"/>
+              </a:rPr>
+              <a:t>├── SupplierController::tableDataAction()</a:t>
+            </a:r>
+          </a:p>
+          <a:p>
+            <a:pPr>
+              <a:spcBef>
+                <a:spcPts val="0"/>
+              </a:spcBef>
+              <a:spcAft>
+                <a:spcPts val="0"/>
+              </a:spcAft>
+            </a:pPr>
+            <a:r>
+              <a:rPr sz="900">
+                <a:solidFill>
+                  <a:srgbClr val="2D2D2D"/>
+                </a:solidFill>
+                <a:latin typeface="Consolas"/>
+              </a:rPr>
+              <a:t>├── GuiTableHttpDataRequestExecutor executes the request</a:t>
+            </a:r>
+          </a:p>
+          <a:p>
+            <a:pPr>
+              <a:spcBef>
+                <a:spcPts val="0"/>
+              </a:spcBef>
+              <a:spcAft>
+                <a:spcPts val="0"/>
+              </a:spcAft>
+            </a:pPr>
+            <a:r>
+              <a:rPr sz="900">
+                <a:solidFill>
+                  <a:srgbClr val="2D2D2D"/>
+                </a:solidFill>
+                <a:latin typeface="Consolas"/>
+              </a:rPr>
+              <a:t>├── SupplierGuiTableDataProvider creates merchant-scoped criteria</a:t>
+            </a:r>
+          </a:p>
+          <a:p>
+            <a:pPr>
+              <a:spcBef>
+                <a:spcPts val="0"/>
+              </a:spcBef>
+              <a:spcAft>
+                <a:spcPts val="0"/>
+              </a:spcAft>
+            </a:pPr>
+            <a:r>
+              <a:rPr sz="900">
+                <a:solidFill>
+                  <a:srgbClr val="2D2D2D"/>
+                </a:solidFill>
+                <a:latin typeface="Consolas"/>
+              </a:rPr>
+              <a:t>├── Repository fetches paginated data</a:t>
+            </a:r>
+          </a:p>
+          <a:p>
+            <a:pPr>
+              <a:spcBef>
+                <a:spcPts val="0"/>
+              </a:spcBef>
+              <a:spcAft>
+                <a:spcPts val="0"/>
+              </a:spcAft>
+            </a:pPr>
+            <a:r>
+              <a:rPr sz="900">
+                <a:solidFill>
+                  <a:srgbClr val="2D2D2D"/>
+                </a:solidFill>
+                <a:latin typeface="Consolas"/>
+              </a:rPr>
+              <a:t>└── Returns JSON rows to Angular table</a:t>
+            </a:r>
+          </a:p>
+        </p:txBody>
+      </p:sp>
+    </p:spTree>
+  </p:cSld>
+  <p:clrMapOvr>
+    <a:masterClrMapping/>
+  </p:clrMapOvr>
+</p:sld>
+</file>
+
+<file path=ppt/slides/slide208.xml><?xml version="1.0" encoding="utf-8"?>
+<p:sld xmlns:a="http://schemas.openxmlformats.org/drawingml/2006/main" xmlns:p="http://schemas.openxmlformats.org/presentationml/2006/main" xmlns:r="http://schemas.openxmlformats.org/officeDocument/2006/relationships">
+  <p:cSld>
+    <p:spTree>
+      <p:nvGrpSpPr>
+        <p:cNvPr id="1" name=""/>
+        <p:cNvGrpSpPr/>
+        <p:nvPr/>
+      </p:nvGrpSpPr>
+      <p:grpSpPr/>
+      <p:sp>
+        <p:nvSpPr>
+          <p:cNvPr id="2" name="TextBox 1"/>
+          <p:cNvSpPr txBox="1"/>
+          <p:nvPr/>
+        </p:nvSpPr>
+        <p:spPr>
+          <a:xfrm>
+            <a:off x="640080" y="365760"/>
+            <a:ext cx="10881360" cy="731520"/>
+          </a:xfrm>
+          <a:prstGeom prst="rect">
+            <a:avLst/>
+          </a:prstGeom>
+          <a:noFill/>
+        </p:spPr>
+        <p:txBody>
+          <a:bodyPr wrap="square">
+            <a:spAutoFit/>
+          </a:bodyPr>
+          <a:lstStyle/>
+          <a:p>
+            <a:pPr>
+              <a:defRPr sz="2800" b="1">
+                <a:solidFill>
+                  <a:srgbClr val="00A89B"/>
+                </a:solidFill>
+              </a:defRPr>
+            </a:pPr>
+            <a:r>
+              <a:t>Setup: Navigation and ACL</a:t>
+            </a:r>
+          </a:p>
+        </p:txBody>
+      </p:sp>
+      <p:sp>
+        <p:nvSpPr>
+          <p:cNvPr id="3" name="Rectangle 2"/>
+          <p:cNvSpPr/>
+          <p:nvPr/>
+        </p:nvSpPr>
+        <p:spPr>
+          <a:xfrm>
+            <a:off x="640080" y="1051560"/>
+            <a:ext cx="1828800" cy="25400"/>
+          </a:xfrm>
+          <a:prstGeom prst="rect">
+            <a:avLst/>
+          </a:prstGeom>
+          <a:solidFill>
+            <a:srgbClr val="00A89B"/>
+          </a:solidFill>
+          <a:ln>
+            <a:noFill/>
+          </a:ln>
+        </p:spPr>
+        <p:style>
+          <a:lnRef idx="1">
+            <a:schemeClr val="accent1"/>
+          </a:lnRef>
+          <a:fillRef idx="3">
+            <a:schemeClr val="accent1"/>
+          </a:fillRef>
+          <a:effectRef idx="2">
+            <a:schemeClr val="accent1"/>
+          </a:effectRef>
+          <a:fontRef idx="minor">
+            <a:schemeClr val="lt1"/>
+          </a:fontRef>
+        </p:style>
+        <p:txBody>
+          <a:bodyPr rtlCol="0" anchor="ctr"/>
+          <a:lstStyle/>
+          <a:p>
+            <a:pPr algn="ctr"/>
+          </a:p>
+        </p:txBody>
+      </p:sp>
+      <p:sp>
+        <p:nvSpPr>
+          <p:cNvPr id="4" name="TextBox 3"/>
+          <p:cNvSpPr txBox="1"/>
+          <p:nvPr/>
+        </p:nvSpPr>
+        <p:spPr>
+          <a:xfrm>
+            <a:off x="640080" y="1371600"/>
+            <a:ext cx="10881360" cy="5029200"/>
+          </a:xfrm>
+          <a:prstGeom prst="rect">
+            <a:avLst/>
+          </a:prstGeom>
+          <a:noFill/>
+        </p:spPr>
+        <p:txBody>
+          <a:bodyPr wrap="square">
+            <a:spAutoFit/>
+          </a:bodyPr>
+          <a:lstStyle/>
+          <a:p>
+            <a:pPr>
+              <a:spcAft>
+                <a:spcPts val="800"/>
+              </a:spcAft>
+              <a:defRPr sz="1600">
+                <a:solidFill>
+                  <a:srgbClr val="1A1A1A"/>
+                </a:solidFill>
+              </a:defRPr>
+            </a:pPr>
+            <a:r>
+              <a:t>The exercise skeleton provides these pre-built:</a:t>
+            </a:r>
+          </a:p>
+          <a:p>
+            <a:pPr>
+              <a:spcBef>
+                <a:spcPts val="1200"/>
+              </a:spcBef>
+              <a:spcAft>
+                <a:spcPts val="600"/>
+              </a:spcAft>
+              <a:defRPr sz="2000" b="1">
+                <a:solidFill>
+                  <a:srgbClr val="1A1A1A"/>
+                </a:solidFill>
+              </a:defRPr>
+            </a:pPr>
+            <a:r>
+              <a:t>Navigation</a:t>
+            </a:r>
+          </a:p>
+          <a:p>
+            <a:pPr>
+              <a:spcAft>
+                <a:spcPts val="800"/>
+              </a:spcAft>
+              <a:defRPr sz="1600">
+                <a:solidFill>
+                  <a:srgbClr val="1A1A1A"/>
+                </a:solidFill>
+              </a:defRPr>
+            </a:pPr>
+            <a:r>
+              <a:t>The Merchant Portal navigation is in config/Zed/navigation-main-merchant-portal.xml (separate from the Back Office navigation.xml ). The supplier entry is automatically merged by load.sh .</a:t>
+            </a:r>
+          </a:p>
+          <a:p>
+            <a:pPr>
+              <a:spcBef>
+                <a:spcPts val="1200"/>
+              </a:spcBef>
+              <a:spcAft>
+                <a:spcPts val="600"/>
+              </a:spcAft>
+              <a:defRPr sz="2000" b="1">
+                <a:solidFill>
+                  <a:srgbClr val="1A1A1A"/>
+                </a:solidFill>
+              </a:defRPr>
+            </a:pPr>
+            <a:r>
+              <a:t>ACL (Access Control)</a:t>
+            </a:r>
+          </a:p>
+          <a:p>
+            <a:pPr>
+              <a:spcAft>
+                <a:spcPts val="800"/>
+              </a:spcAft>
+              <a:defRPr sz="1600">
+                <a:solidFill>
+                  <a:srgbClr val="1A1A1A"/>
+                </a:solidFill>
+              </a:defRPr>
+            </a:pPr>
+            <a:r>
+              <a:t>Every Merchant Portal module must register ACL rules so merchant users can access its controllers. The skeleton includes:</a:t>
+            </a:r>
+          </a:p>
+          <a:p>
+            <a:pPr>
+              <a:spcAft>
+                <a:spcPts val="400"/>
+              </a:spcAft>
+              <a:defRPr sz="1500">
+                <a:solidFill>
+                  <a:srgbClr val="1A1A1A"/>
+                </a:solidFill>
+              </a:defRPr>
+            </a:pPr>
+            <a:r>
+              <a:t>• SupplierMerchantPortalGuiMerchantAclRuleExpanderPlugin — allows all routes in the supplier-merchant-portal-gui bundle</a:t>
+            </a:r>
+          </a:p>
+        </p:txBody>
+      </p:sp>
+    </p:spTree>
+  </p:cSld>
+  <p:clrMapOvr>
+    <a:masterClrMapping/>
+  </p:clrMapOvr>
+</p:sld>
+</file>
+
+<file path=ppt/slides/slide209.xml><?xml version="1.0" encoding="utf-8"?>
+<p:sld xmlns:a="http://schemas.openxmlformats.org/drawingml/2006/main" xmlns:p="http://schemas.openxmlformats.org/presentationml/2006/main" xmlns:r="http://schemas.openxmlformats.org/officeDocument/2006/relationships">
+  <p:cSld>
+    <p:spTree>
+      <p:nvGrpSpPr>
+        <p:cNvPr id="1" name=""/>
+        <p:cNvGrpSpPr/>
+        <p:nvPr/>
+      </p:nvGrpSpPr>
+      <p:grpSpPr/>
+      <p:sp>
+        <p:nvSpPr>
+          <p:cNvPr id="2" name="TextBox 1"/>
+          <p:cNvSpPr txBox="1"/>
+          <p:nvPr/>
+        </p:nvSpPr>
+        <p:spPr>
+          <a:xfrm>
+            <a:off x="640080" y="365760"/>
+            <a:ext cx="10881360" cy="731520"/>
+          </a:xfrm>
+          <a:prstGeom prst="rect">
+            <a:avLst/>
+          </a:prstGeom>
+          <a:noFill/>
+        </p:spPr>
+        <p:txBody>
+          <a:bodyPr wrap="square">
+            <a:spAutoFit/>
+          </a:bodyPr>
+          <a:lstStyle/>
+          <a:p>
+            <a:pPr>
+              <a:defRPr sz="2800" b="1">
+                <a:solidFill>
+                  <a:srgbClr val="00A89B"/>
+                </a:solidFill>
+              </a:defRPr>
+            </a:pPr>
+            <a:r>
+              <a:t>Setup: Navigation and ACL (cont.)</a:t>
+            </a:r>
+          </a:p>
+        </p:txBody>
+      </p:sp>
+      <p:sp>
+        <p:nvSpPr>
+          <p:cNvPr id="3" name="Rectangle 2"/>
+          <p:cNvSpPr/>
+          <p:nvPr/>
+        </p:nvSpPr>
+        <p:spPr>
+          <a:xfrm>
+            <a:off x="640080" y="1051560"/>
+            <a:ext cx="1828800" cy="25400"/>
+          </a:xfrm>
+          <a:prstGeom prst="rect">
+            <a:avLst/>
+          </a:prstGeom>
+          <a:solidFill>
+            <a:srgbClr val="00A89B"/>
+          </a:solidFill>
+          <a:ln>
+            <a:noFill/>
+          </a:ln>
+        </p:spPr>
+        <p:style>
+          <a:lnRef idx="1">
+            <a:schemeClr val="accent1"/>
+          </a:lnRef>
+          <a:fillRef idx="3">
+            <a:schemeClr val="accent1"/>
+          </a:fillRef>
+          <a:effectRef idx="2">
+            <a:schemeClr val="accent1"/>
+          </a:effectRef>
+          <a:fontRef idx="minor">
+            <a:schemeClr val="lt1"/>
+          </a:fontRef>
+        </p:style>
+        <p:txBody>
+          <a:bodyPr rtlCol="0" anchor="ctr"/>
+          <a:lstStyle/>
+          <a:p>
+            <a:pPr algn="ctr"/>
+          </a:p>
+        </p:txBody>
+      </p:sp>
+      <p:sp>
+        <p:nvSpPr>
+          <p:cNvPr id="4" name="TextBox 3"/>
+          <p:cNvSpPr txBox="1"/>
+          <p:nvPr/>
+        </p:nvSpPr>
+        <p:spPr>
+          <a:xfrm>
+            <a:off x="640080" y="1371600"/>
+            <a:ext cx="10881360" cy="5029200"/>
+          </a:xfrm>
+          <a:prstGeom prst="rect">
+            <a:avLst/>
+          </a:prstGeom>
+          <a:noFill/>
+        </p:spPr>
+        <p:txBody>
+          <a:bodyPr wrap="square">
+            <a:spAutoFit/>
+          </a:bodyPr>
+          <a:lstStyle/>
+          <a:p>
+            <a:pPr>
+              <a:spcAft>
+                <a:spcPts val="400"/>
+              </a:spcAft>
+              <a:defRPr sz="1500">
+                <a:solidFill>
+                  <a:srgbClr val="1A1A1A"/>
+                </a:solidFill>
+              </a:defRPr>
+            </a:pPr>
+            <a:r>
+              <a:t>• AclMerchantPortalDependencyProvider override — registers the plugin via SprykerAcademy namespace</a:t>
+            </a:r>
+          </a:p>
+          <a:p>
+            <a:pPr>
+              <a:spcAft>
+                <a:spcPts val="800"/>
+              </a:spcAft>
+              <a:defRPr sz="1400" i="1">
+                <a:solidFill>
+                  <a:srgbClr val="888888"/>
+                </a:solidFill>
+              </a:defRPr>
+            </a:pPr>
+            <a:r>
+              <a:t>❝ Why ACL? The Merchant Portal is multi-tenant. Each merchant user can only access modules explicitly allowed by ACL rules. Without the ACL plugin, all routes return 403 Forbidden.</a:t>
+            </a:r>
+          </a:p>
+        </p:txBody>
+      </p:sp>
+    </p:spTree>
+  </p:cSld>
+  <p:clrMapOvr>
+    <a:masterClrMapping/>
+  </p:clrMapOvr>
+</p:sld>
+</file>
+
 <file path=ppt/slides/slide21.xml><?xml version="1.0" encoding="utf-8"?>
 <p:sld xmlns:a="http://schemas.openxmlformats.org/drawingml/2006/main" xmlns:p="http://schemas.openxmlformats.org/presentationml/2006/main" xmlns:r="http://schemas.openxmlformats.org/officeDocument/2006/relationships">
   <p:cSld>
@@ -32035,6 +33710,1887 @@
             </a:pPr>
             <a:r>
               <a:t>Open src/Pyz/Zed/DataImport/DataImportDependencyProvider.php in the project. Find the getDataImporterPlugins() method and add instances of both SupplierDataImportPlugin and SupplierLocationDataImportPlugin to the returned array.</a:t>
+            </a:r>
+          </a:p>
+        </p:txBody>
+      </p:sp>
+    </p:spTree>
+  </p:cSld>
+  <p:clrMapOvr>
+    <a:masterClrMapping/>
+  </p:clrMapOvr>
+</p:sld>
+</file>
+
+<file path=ppt/slides/slide210.xml><?xml version="1.0" encoding="utf-8"?>
+<p:sld xmlns:a="http://schemas.openxmlformats.org/drawingml/2006/main" xmlns:p="http://schemas.openxmlformats.org/presentationml/2006/main" xmlns:r="http://schemas.openxmlformats.org/officeDocument/2006/relationships">
+  <p:cSld>
+    <p:spTree>
+      <p:nvGrpSpPr>
+        <p:cNvPr id="1" name=""/>
+        <p:cNvGrpSpPr/>
+        <p:nvPr/>
+      </p:nvGrpSpPr>
+      <p:grpSpPr/>
+      <p:sp>
+        <p:nvSpPr>
+          <p:cNvPr id="2" name="TextBox 1"/>
+          <p:cNvSpPr txBox="1"/>
+          <p:nvPr/>
+        </p:nvSpPr>
+        <p:spPr>
+          <a:xfrm>
+            <a:off x="640080" y="365760"/>
+            <a:ext cx="10881360" cy="731520"/>
+          </a:xfrm>
+          <a:prstGeom prst="rect">
+            <a:avLst/>
+          </a:prstGeom>
+          <a:noFill/>
+        </p:spPr>
+        <p:txBody>
+          <a:bodyPr wrap="square">
+            <a:spAutoFit/>
+          </a:bodyPr>
+          <a:lstStyle/>
+          <a:p>
+            <a:pPr>
+              <a:defRPr sz="2800" b="1">
+                <a:solidFill>
+                  <a:srgbClr val="00A89B"/>
+                </a:solidFill>
+              </a:defRPr>
+            </a:pPr>
+            <a:r>
+              <a:t>Working on the Exercise</a:t>
+            </a:r>
+          </a:p>
+        </p:txBody>
+      </p:sp>
+      <p:sp>
+        <p:nvSpPr>
+          <p:cNvPr id="3" name="Rectangle 2"/>
+          <p:cNvSpPr/>
+          <p:nvPr/>
+        </p:nvSpPr>
+        <p:spPr>
+          <a:xfrm>
+            <a:off x="640080" y="1051560"/>
+            <a:ext cx="1828800" cy="25400"/>
+          </a:xfrm>
+          <a:prstGeom prst="rect">
+            <a:avLst/>
+          </a:prstGeom>
+          <a:solidFill>
+            <a:srgbClr val="00A89B"/>
+          </a:solidFill>
+          <a:ln>
+            <a:noFill/>
+          </a:ln>
+        </p:spPr>
+        <p:style>
+          <a:lnRef idx="1">
+            <a:schemeClr val="accent1"/>
+          </a:lnRef>
+          <a:fillRef idx="3">
+            <a:schemeClr val="accent1"/>
+          </a:fillRef>
+          <a:effectRef idx="2">
+            <a:schemeClr val="accent1"/>
+          </a:effectRef>
+          <a:fontRef idx="minor">
+            <a:schemeClr val="lt1"/>
+          </a:fontRef>
+        </p:style>
+        <p:txBody>
+          <a:bodyPr rtlCol="0" anchor="ctr"/>
+          <a:lstStyle/>
+          <a:p>
+            <a:pPr algn="ctr"/>
+          </a:p>
+        </p:txBody>
+      </p:sp>
+      <p:sp>
+        <p:nvSpPr>
+          <p:cNvPr id="4" name="TextBox 3"/>
+          <p:cNvSpPr txBox="1"/>
+          <p:nvPr/>
+        </p:nvSpPr>
+        <p:spPr>
+          <a:xfrm>
+            <a:off x="640080" y="1371600"/>
+            <a:ext cx="10881360" cy="5029200"/>
+          </a:xfrm>
+          <a:prstGeom prst="rect">
+            <a:avLst/>
+          </a:prstGeom>
+          <a:noFill/>
+        </p:spPr>
+        <p:txBody>
+          <a:bodyPr wrap="square">
+            <a:spAutoFit/>
+          </a:bodyPr>
+          <a:lstStyle/>
+          <a:p>
+            <a:pPr>
+              <a:spcBef>
+                <a:spcPts val="1200"/>
+              </a:spcBef>
+              <a:spcAft>
+                <a:spcPts val="600"/>
+              </a:spcAft>
+              <a:defRPr sz="2000" b="1">
+                <a:solidFill>
+                  <a:srgbClr val="1A1A1A"/>
+                </a:solidFill>
+              </a:defRPr>
+            </a:pPr>
+            <a:r>
+              <a:t>Part 1: GuiTable Configuration Provider</a:t>
+            </a:r>
+          </a:p>
+          <a:p>
+            <a:pPr>
+              <a:spcAft>
+                <a:spcPts val="800"/>
+              </a:spcAft>
+              <a:defRPr sz="1600">
+                <a:solidFill>
+                  <a:srgbClr val="1A1A1A"/>
+                </a:solidFill>
+              </a:defRPr>
+            </a:pPr>
+            <a:r>
+              <a:t>The configuration provider defines the table structure: columns, filters, sorting, row actions, and data source URL.</a:t>
+            </a:r>
+          </a:p>
+          <a:p>
+            <a:pPr>
+              <a:spcAft>
+                <a:spcPts val="800"/>
+              </a:spcAft>
+              <a:defRPr sz="1600">
+                <a:solidFill>
+                  <a:srgbClr val="1A1A1A"/>
+                </a:solidFill>
+              </a:defRPr>
+            </a:pPr>
+            <a:r>
+              <a:t>Coding time:</a:t>
+            </a:r>
+          </a:p>
+          <a:p>
+            <a:pPr>
+              <a:spcAft>
+                <a:spcPts val="800"/>
+              </a:spcAft>
+              <a:defRPr sz="1600">
+                <a:solidFill>
+                  <a:srgbClr val="1A1A1A"/>
+                </a:solidFill>
+              </a:defRPr>
+            </a:pPr>
+            <a:r>
+              <a:t>Open src/SprykerAcademy/Zed/SupplierMerchantPortalGui/Communication/ConfigurationProvider/SupplierGuiTableConfigurationProvider.php :</a:t>
+            </a:r>
+          </a:p>
+          <a:p>
+            <a:pPr>
+              <a:spcAft>
+                <a:spcPts val="400"/>
+              </a:spcAft>
+              <a:defRPr sz="1500">
+                <a:solidFill>
+                  <a:srgbClr val="1A1A1A"/>
+                </a:solidFill>
+              </a:defRPr>
+            </a:pPr>
+            <a:r>
+              <a:t>• Get a configuration builder from $this-&gt;guiTableFactory-&gt;createConfigurationBuilder()</a:t>
+            </a:r>
+          </a:p>
+        </p:txBody>
+      </p:sp>
+    </p:spTree>
+  </p:cSld>
+  <p:clrMapOvr>
+    <a:masterClrMapping/>
+  </p:clrMapOvr>
+</p:sld>
+</file>
+
+<file path=ppt/slides/slide211.xml><?xml version="1.0" encoding="utf-8"?>
+<p:sld xmlns:a="http://schemas.openxmlformats.org/drawingml/2006/main" xmlns:p="http://schemas.openxmlformats.org/presentationml/2006/main" xmlns:r="http://schemas.openxmlformats.org/officeDocument/2006/relationships">
+  <p:cSld>
+    <p:spTree>
+      <p:nvGrpSpPr>
+        <p:cNvPr id="1" name=""/>
+        <p:cNvGrpSpPr/>
+        <p:nvPr/>
+      </p:nvGrpSpPr>
+      <p:grpSpPr/>
+      <p:sp>
+        <p:nvSpPr>
+          <p:cNvPr id="2" name="TextBox 1"/>
+          <p:cNvSpPr txBox="1"/>
+          <p:nvPr/>
+        </p:nvSpPr>
+        <p:spPr>
+          <a:xfrm>
+            <a:off x="640080" y="365760"/>
+            <a:ext cx="10881360" cy="731520"/>
+          </a:xfrm>
+          <a:prstGeom prst="rect">
+            <a:avLst/>
+          </a:prstGeom>
+          <a:noFill/>
+        </p:spPr>
+        <p:txBody>
+          <a:bodyPr wrap="square">
+            <a:spAutoFit/>
+          </a:bodyPr>
+          <a:lstStyle/>
+          <a:p>
+            <a:pPr>
+              <a:defRPr sz="2800" b="1">
+                <a:solidFill>
+                  <a:srgbClr val="00A89B"/>
+                </a:solidFill>
+              </a:defRPr>
+            </a:pPr>
+            <a:r>
+              <a:t>Working on the Exercise (cont.)</a:t>
+            </a:r>
+          </a:p>
+        </p:txBody>
+      </p:sp>
+      <p:sp>
+        <p:nvSpPr>
+          <p:cNvPr id="3" name="Rectangle 2"/>
+          <p:cNvSpPr/>
+          <p:nvPr/>
+        </p:nvSpPr>
+        <p:spPr>
+          <a:xfrm>
+            <a:off x="640080" y="1051560"/>
+            <a:ext cx="1828800" cy="25400"/>
+          </a:xfrm>
+          <a:prstGeom prst="rect">
+            <a:avLst/>
+          </a:prstGeom>
+          <a:solidFill>
+            <a:srgbClr val="00A89B"/>
+          </a:solidFill>
+          <a:ln>
+            <a:noFill/>
+          </a:ln>
+        </p:spPr>
+        <p:style>
+          <a:lnRef idx="1">
+            <a:schemeClr val="accent1"/>
+          </a:lnRef>
+          <a:fillRef idx="3">
+            <a:schemeClr val="accent1"/>
+          </a:fillRef>
+          <a:effectRef idx="2">
+            <a:schemeClr val="accent1"/>
+          </a:effectRef>
+          <a:fontRef idx="minor">
+            <a:schemeClr val="lt1"/>
+          </a:fontRef>
+        </p:style>
+        <p:txBody>
+          <a:bodyPr rtlCol="0" anchor="ctr"/>
+          <a:lstStyle/>
+          <a:p>
+            <a:pPr algn="ctr"/>
+          </a:p>
+        </p:txBody>
+      </p:sp>
+      <p:sp>
+        <p:nvSpPr>
+          <p:cNvPr id="4" name="TextBox 3"/>
+          <p:cNvSpPr txBox="1"/>
+          <p:nvPr/>
+        </p:nvSpPr>
+        <p:spPr>
+          <a:xfrm>
+            <a:off x="640080" y="1371600"/>
+            <a:ext cx="10881360" cy="5029200"/>
+          </a:xfrm>
+          <a:prstGeom prst="rect">
+            <a:avLst/>
+          </a:prstGeom>
+          <a:noFill/>
+        </p:spPr>
+        <p:txBody>
+          <a:bodyPr wrap="square">
+            <a:spAutoFit/>
+          </a:bodyPr>
+          <a:lstStyle/>
+          <a:p>
+            <a:pPr>
+              <a:spcAft>
+                <a:spcPts val="400"/>
+              </a:spcAft>
+              <a:defRPr sz="1500">
+                <a:solidFill>
+                  <a:srgbClr val="1A1A1A"/>
+                </a:solidFill>
+              </a:defRPr>
+            </a:pPr>
+            <a:r>
+              <a:t>• Add columns: addColumnText('name', 'Name', sortable: true, searchable: true) addColumnText('description', 'Description', sortable: true, searchable: false) addColumnChip('status', 'Status', ...) with color map: 1 =&gt; green/Active , 0 =&gt; gray/Inactive addColumnText('email', 'Email', ...) addColumnText('phone', 'Phone', ...)</a:t>
+            </a:r>
+          </a:p>
+          <a:p>
+            <a:pPr>
+              <a:spcAft>
+                <a:spcPts val="400"/>
+              </a:spcAft>
+              <a:defRPr sz="1500">
+                <a:solidFill>
+                  <a:srgbClr val="1A1A1A"/>
+                </a:solidFill>
+              </a:defRPr>
+            </a:pPr>
+            <a:r>
+              <a:t>• Add a status filter: addFilterSelect('status', 'Status', false, [1 =&gt; 'Active', 0 =&gt; 'Inactive'])</a:t>
+            </a:r>
+          </a:p>
+          <a:p>
+            <a:pPr>
+              <a:spcAft>
+                <a:spcPts val="400"/>
+              </a:spcAft>
+              <a:defRPr sz="1500">
+                <a:solidFill>
+                  <a:srgbClr val="1A1A1A"/>
+                </a:solidFill>
+              </a:defRPr>
+            </a:pPr>
+            <a:r>
+              <a:t>• Add a row action for editing: addRowActionDrawerAjaxForm('edit', 'Edit', '/supplier-merchant-portal-gui/update-supplier?id-supplier=${row.idSupplier}')</a:t>
+            </a:r>
+          </a:p>
+          <a:p>
+            <a:pPr>
+              <a:spcAft>
+                <a:spcPts val="400"/>
+              </a:spcAft>
+              <a:defRPr sz="1500">
+                <a:solidFill>
+                  <a:srgbClr val="1A1A1A"/>
+                </a:solidFill>
+              </a:defRPr>
+            </a:pPr>
+            <a:r>
+              <a:t>• Set data source URL, page size, and enable search</a:t>
+            </a:r>
+          </a:p>
+          <a:p>
+            <a:pPr>
+              <a:spcAft>
+                <a:spcPts val="800"/>
+              </a:spcAft>
+              <a:defRPr sz="1400" i="1">
+                <a:solidFill>
+                  <a:srgbClr val="888888"/>
+                </a:solidFill>
+              </a:defRPr>
+            </a:pPr>
+            <a:r>
+              <a:t>❝ Column types: addColumnText() for plain text, addColumnChip() for status badges with color coding, addColumnDate() for dates.</a:t>
+            </a:r>
+          </a:p>
+        </p:txBody>
+      </p:sp>
+    </p:spTree>
+  </p:cSld>
+  <p:clrMapOvr>
+    <a:masterClrMapping/>
+  </p:clrMapOvr>
+</p:sld>
+</file>
+
+<file path=ppt/slides/slide212.xml><?xml version="1.0" encoding="utf-8"?>
+<p:sld xmlns:a="http://schemas.openxmlformats.org/drawingml/2006/main" xmlns:p="http://schemas.openxmlformats.org/presentationml/2006/main" xmlns:r="http://schemas.openxmlformats.org/officeDocument/2006/relationships">
+  <p:cSld>
+    <p:spTree>
+      <p:nvGrpSpPr>
+        <p:cNvPr id="1" name=""/>
+        <p:cNvGrpSpPr/>
+        <p:nvPr/>
+      </p:nvGrpSpPr>
+      <p:grpSpPr/>
+      <p:sp>
+        <p:nvSpPr>
+          <p:cNvPr id="2" name="TextBox 1"/>
+          <p:cNvSpPr txBox="1"/>
+          <p:nvPr/>
+        </p:nvSpPr>
+        <p:spPr>
+          <a:xfrm>
+            <a:off x="640080" y="365760"/>
+            <a:ext cx="10881360" cy="731520"/>
+          </a:xfrm>
+          <a:prstGeom prst="rect">
+            <a:avLst/>
+          </a:prstGeom>
+          <a:noFill/>
+        </p:spPr>
+        <p:txBody>
+          <a:bodyPr wrap="square">
+            <a:spAutoFit/>
+          </a:bodyPr>
+          <a:lstStyle/>
+          <a:p>
+            <a:pPr>
+              <a:defRPr sz="2800" b="1">
+                <a:solidFill>
+                  <a:srgbClr val="00A89B"/>
+                </a:solidFill>
+              </a:defRPr>
+            </a:pPr>
+            <a:r>
+              <a:t>Working on the Exercise (cont.)</a:t>
+            </a:r>
+          </a:p>
+        </p:txBody>
+      </p:sp>
+      <p:sp>
+        <p:nvSpPr>
+          <p:cNvPr id="3" name="Rectangle 2"/>
+          <p:cNvSpPr/>
+          <p:nvPr/>
+        </p:nvSpPr>
+        <p:spPr>
+          <a:xfrm>
+            <a:off x="640080" y="1051560"/>
+            <a:ext cx="1828800" cy="25400"/>
+          </a:xfrm>
+          <a:prstGeom prst="rect">
+            <a:avLst/>
+          </a:prstGeom>
+          <a:solidFill>
+            <a:srgbClr val="00A89B"/>
+          </a:solidFill>
+          <a:ln>
+            <a:noFill/>
+          </a:ln>
+        </p:spPr>
+        <p:style>
+          <a:lnRef idx="1">
+            <a:schemeClr val="accent1"/>
+          </a:lnRef>
+          <a:fillRef idx="3">
+            <a:schemeClr val="accent1"/>
+          </a:fillRef>
+          <a:effectRef idx="2">
+            <a:schemeClr val="accent1"/>
+          </a:effectRef>
+          <a:fontRef idx="minor">
+            <a:schemeClr val="lt1"/>
+          </a:fontRef>
+        </p:style>
+        <p:txBody>
+          <a:bodyPr rtlCol="0" anchor="ctr"/>
+          <a:lstStyle/>
+          <a:p>
+            <a:pPr algn="ctr"/>
+          </a:p>
+        </p:txBody>
+      </p:sp>
+      <p:sp>
+        <p:nvSpPr>
+          <p:cNvPr id="4" name="TextBox 3"/>
+          <p:cNvSpPr txBox="1"/>
+          <p:nvPr/>
+        </p:nvSpPr>
+        <p:spPr>
+          <a:xfrm>
+            <a:off x="640080" y="1371600"/>
+            <a:ext cx="10881360" cy="5029200"/>
+          </a:xfrm>
+          <a:prstGeom prst="rect">
+            <a:avLst/>
+          </a:prstGeom>
+          <a:noFill/>
+        </p:spPr>
+        <p:txBody>
+          <a:bodyPr wrap="square">
+            <a:spAutoFit/>
+          </a:bodyPr>
+          <a:lstStyle/>
+          <a:p>
+            <a:pPr>
+              <a:spcAft>
+                <a:spcPts val="800"/>
+              </a:spcAft>
+              <a:defRPr sz="1400" i="1">
+                <a:solidFill>
+                  <a:srgbClr val="888888"/>
+                </a:solidFill>
+              </a:defRPr>
+            </a:pPr>
+            <a:r>
+              <a:t>❝ Row action: addRowActionDrawerAjaxForm() opens a drawer overlay that loads a form via AJAX — you’ll build this in Exercise 16.</a:t>
+            </a:r>
+          </a:p>
+        </p:txBody>
+      </p:sp>
+    </p:spTree>
+  </p:cSld>
+  <p:clrMapOvr>
+    <a:masterClrMapping/>
+  </p:clrMapOvr>
+</p:sld>
+</file>
+
+<file path=ppt/slides/slide213.xml><?xml version="1.0" encoding="utf-8"?>
+<p:sld xmlns:a="http://schemas.openxmlformats.org/drawingml/2006/main" xmlns:p="http://schemas.openxmlformats.org/presentationml/2006/main" xmlns:r="http://schemas.openxmlformats.org/officeDocument/2006/relationships">
+  <p:cSld>
+    <p:spTree>
+      <p:nvGrpSpPr>
+        <p:cNvPr id="1" name=""/>
+        <p:cNvGrpSpPr/>
+        <p:nvPr/>
+      </p:nvGrpSpPr>
+      <p:grpSpPr/>
+      <p:sp>
+        <p:nvSpPr>
+          <p:cNvPr id="2" name="TextBox 1"/>
+          <p:cNvSpPr txBox="1"/>
+          <p:nvPr/>
+        </p:nvSpPr>
+        <p:spPr>
+          <a:xfrm>
+            <a:off x="640080" y="365760"/>
+            <a:ext cx="10881360" cy="731520"/>
+          </a:xfrm>
+          <a:prstGeom prst="rect">
+            <a:avLst/>
+          </a:prstGeom>
+          <a:noFill/>
+        </p:spPr>
+        <p:txBody>
+          <a:bodyPr wrap="square">
+            <a:spAutoFit/>
+          </a:bodyPr>
+          <a:lstStyle/>
+          <a:p>
+            <a:pPr>
+              <a:defRPr sz="2800" b="1">
+                <a:solidFill>
+                  <a:srgbClr val="00A89B"/>
+                </a:solidFill>
+              </a:defRPr>
+            </a:pPr>
+            <a:r>
+              <a:t>Part 2: GuiTable Data Provider</a:t>
+            </a:r>
+          </a:p>
+        </p:txBody>
+      </p:sp>
+      <p:sp>
+        <p:nvSpPr>
+          <p:cNvPr id="3" name="Rectangle 2"/>
+          <p:cNvSpPr/>
+          <p:nvPr/>
+        </p:nvSpPr>
+        <p:spPr>
+          <a:xfrm>
+            <a:off x="640080" y="1051560"/>
+            <a:ext cx="1828800" cy="25400"/>
+          </a:xfrm>
+          <a:prstGeom prst="rect">
+            <a:avLst/>
+          </a:prstGeom>
+          <a:solidFill>
+            <a:srgbClr val="00A89B"/>
+          </a:solidFill>
+          <a:ln>
+            <a:noFill/>
+          </a:ln>
+        </p:spPr>
+        <p:style>
+          <a:lnRef idx="1">
+            <a:schemeClr val="accent1"/>
+          </a:lnRef>
+          <a:fillRef idx="3">
+            <a:schemeClr val="accent1"/>
+          </a:fillRef>
+          <a:effectRef idx="2">
+            <a:schemeClr val="accent1"/>
+          </a:effectRef>
+          <a:fontRef idx="minor">
+            <a:schemeClr val="lt1"/>
+          </a:fontRef>
+        </p:style>
+        <p:txBody>
+          <a:bodyPr rtlCol="0" anchor="ctr"/>
+          <a:lstStyle/>
+          <a:p>
+            <a:pPr algn="ctr"/>
+          </a:p>
+        </p:txBody>
+      </p:sp>
+      <p:sp>
+        <p:nvSpPr>
+          <p:cNvPr id="4" name="TextBox 3"/>
+          <p:cNvSpPr txBox="1"/>
+          <p:nvPr/>
+        </p:nvSpPr>
+        <p:spPr>
+          <a:xfrm>
+            <a:off x="640080" y="1371600"/>
+            <a:ext cx="10881360" cy="5029200"/>
+          </a:xfrm>
+          <a:prstGeom prst="rect">
+            <a:avLst/>
+          </a:prstGeom>
+          <a:noFill/>
+        </p:spPr>
+        <p:txBody>
+          <a:bodyPr wrap="square">
+            <a:spAutoFit/>
+          </a:bodyPr>
+          <a:lstStyle/>
+          <a:p>
+            <a:pPr>
+              <a:spcAft>
+                <a:spcPts val="800"/>
+              </a:spcAft>
+              <a:defRPr sz="1600">
+                <a:solidFill>
+                  <a:srgbClr val="1A1A1A"/>
+                </a:solidFill>
+              </a:defRPr>
+            </a:pPr>
+            <a:r>
+              <a:t>The data provider bridges the GuiTable framework with your repository.</a:t>
+            </a:r>
+          </a:p>
+          <a:p>
+            <a:pPr>
+              <a:spcAft>
+                <a:spcPts val="800"/>
+              </a:spcAft>
+              <a:defRPr sz="1600">
+                <a:solidFill>
+                  <a:srgbClr val="1A1A1A"/>
+                </a:solidFill>
+              </a:defRPr>
+            </a:pPr>
+            <a:r>
+              <a:t>Coding time:</a:t>
+            </a:r>
+          </a:p>
+          <a:p>
+            <a:pPr>
+              <a:spcAft>
+                <a:spcPts val="800"/>
+              </a:spcAft>
+              <a:defRPr sz="1600">
+                <a:solidFill>
+                  <a:srgbClr val="1A1A1A"/>
+                </a:solidFill>
+              </a:defRPr>
+            </a:pPr>
+            <a:r>
+              <a:t>Open src/SprykerAcademy/Zed/SupplierMerchantPortalGui/Communication/DataProvider/SupplierGuiTableDataProvider.php :</a:t>
+            </a:r>
+          </a:p>
+          <a:p>
+            <a:pPr>
+              <a:spcAft>
+                <a:spcPts val="400"/>
+              </a:spcAft>
+              <a:defRPr sz="1500">
+                <a:solidFill>
+                  <a:srgbClr val="1A1A1A"/>
+                </a:solidFill>
+              </a:defRPr>
+            </a:pPr>
+            <a:r>
+              <a:t>• In createCriteria() , build a SupplierMerchantPortalTableCriteriaTransfer with the current merchant’s reference: $this -&gt;merchantUserFacade-&gt;getCurrentMerchantUser()-&gt;getMerchantOrFail()-&gt;getMerchantReference()</a:t>
+            </a:r>
+          </a:p>
+          <a:p>
+            <a:pPr>
+              <a:spcAft>
+                <a:spcPts val="400"/>
+              </a:spcAft>
+              <a:defRPr sz="1500">
+                <a:solidFill>
+                  <a:srgbClr val="1A1A1A"/>
+                </a:solidFill>
+              </a:defRPr>
+            </a:pPr>
+            <a:r>
+              <a:t>• In fetchData() , delegate to the repository: $this-&gt;repository-&gt;getSupplierTableData($criteriaTransfer)</a:t>
+            </a:r>
+          </a:p>
+        </p:txBody>
+      </p:sp>
+    </p:spTree>
+  </p:cSld>
+  <p:clrMapOvr>
+    <a:masterClrMapping/>
+  </p:clrMapOvr>
+</p:sld>
+</file>
+
+<file path=ppt/slides/slide214.xml><?xml version="1.0" encoding="utf-8"?>
+<p:sld xmlns:a="http://schemas.openxmlformats.org/drawingml/2006/main" xmlns:p="http://schemas.openxmlformats.org/presentationml/2006/main" xmlns:r="http://schemas.openxmlformats.org/officeDocument/2006/relationships">
+  <p:cSld>
+    <p:spTree>
+      <p:nvGrpSpPr>
+        <p:cNvPr id="1" name=""/>
+        <p:cNvGrpSpPr/>
+        <p:nvPr/>
+      </p:nvGrpSpPr>
+      <p:grpSpPr/>
+      <p:sp>
+        <p:nvSpPr>
+          <p:cNvPr id="2" name="TextBox 1"/>
+          <p:cNvSpPr txBox="1"/>
+          <p:nvPr/>
+        </p:nvSpPr>
+        <p:spPr>
+          <a:xfrm>
+            <a:off x="640080" y="365760"/>
+            <a:ext cx="10881360" cy="731520"/>
+          </a:xfrm>
+          <a:prstGeom prst="rect">
+            <a:avLst/>
+          </a:prstGeom>
+          <a:noFill/>
+        </p:spPr>
+        <p:txBody>
+          <a:bodyPr wrap="square">
+            <a:spAutoFit/>
+          </a:bodyPr>
+          <a:lstStyle/>
+          <a:p>
+            <a:pPr>
+              <a:defRPr sz="2800" b="1">
+                <a:solidFill>
+                  <a:srgbClr val="00A89B"/>
+                </a:solidFill>
+              </a:defRPr>
+            </a:pPr>
+            <a:r>
+              <a:t>Part 2: GuiTable Data Provider (cont.)</a:t>
+            </a:r>
+          </a:p>
+        </p:txBody>
+      </p:sp>
+      <p:sp>
+        <p:nvSpPr>
+          <p:cNvPr id="3" name="Rectangle 2"/>
+          <p:cNvSpPr/>
+          <p:nvPr/>
+        </p:nvSpPr>
+        <p:spPr>
+          <a:xfrm>
+            <a:off x="640080" y="1051560"/>
+            <a:ext cx="1828800" cy="25400"/>
+          </a:xfrm>
+          <a:prstGeom prst="rect">
+            <a:avLst/>
+          </a:prstGeom>
+          <a:solidFill>
+            <a:srgbClr val="00A89B"/>
+          </a:solidFill>
+          <a:ln>
+            <a:noFill/>
+          </a:ln>
+        </p:spPr>
+        <p:style>
+          <a:lnRef idx="1">
+            <a:schemeClr val="accent1"/>
+          </a:lnRef>
+          <a:fillRef idx="3">
+            <a:schemeClr val="accent1"/>
+          </a:fillRef>
+          <a:effectRef idx="2">
+            <a:schemeClr val="accent1"/>
+          </a:effectRef>
+          <a:fontRef idx="minor">
+            <a:schemeClr val="lt1"/>
+          </a:fontRef>
+        </p:style>
+        <p:txBody>
+          <a:bodyPr rtlCol="0" anchor="ctr"/>
+          <a:lstStyle/>
+          <a:p>
+            <a:pPr algn="ctr"/>
+          </a:p>
+        </p:txBody>
+      </p:sp>
+      <p:sp>
+        <p:nvSpPr>
+          <p:cNvPr id="4" name="TextBox 3"/>
+          <p:cNvSpPr txBox="1"/>
+          <p:nvPr/>
+        </p:nvSpPr>
+        <p:spPr>
+          <a:xfrm>
+            <a:off x="640080" y="1371600"/>
+            <a:ext cx="10881360" cy="5029200"/>
+          </a:xfrm>
+          <a:prstGeom prst="rect">
+            <a:avLst/>
+          </a:prstGeom>
+          <a:noFill/>
+        </p:spPr>
+        <p:txBody>
+          <a:bodyPr wrap="square">
+            <a:spAutoFit/>
+          </a:bodyPr>
+          <a:lstStyle/>
+          <a:p>
+            <a:pPr>
+              <a:spcAft>
+                <a:spcPts val="800"/>
+              </a:spcAft>
+              <a:defRPr sz="1400" i="1">
+                <a:solidFill>
+                  <a:srgbClr val="888888"/>
+                </a:solidFill>
+              </a:defRPr>
+            </a:pPr>
+            <a:r>
+              <a:t>❝ AbstractGuiTableDataProvider: The base class handles extracting pagination, sorting, filtering, and search parameters from the HTTP request and passing them to your criteria transfer.</a:t>
+            </a:r>
+          </a:p>
+        </p:txBody>
+      </p:sp>
+    </p:spTree>
+  </p:cSld>
+  <p:clrMapOvr>
+    <a:masterClrMapping/>
+  </p:clrMapOvr>
+</p:sld>
+</file>
+
+<file path=ppt/slides/slide215.xml><?xml version="1.0" encoding="utf-8"?>
+<p:sld xmlns:a="http://schemas.openxmlformats.org/drawingml/2006/main" xmlns:p="http://schemas.openxmlformats.org/presentationml/2006/main" xmlns:r="http://schemas.openxmlformats.org/officeDocument/2006/relationships">
+  <p:cSld>
+    <p:spTree>
+      <p:nvGrpSpPr>
+        <p:cNvPr id="1" name=""/>
+        <p:cNvGrpSpPr/>
+        <p:nvPr/>
+      </p:nvGrpSpPr>
+      <p:grpSpPr/>
+      <p:sp>
+        <p:nvSpPr>
+          <p:cNvPr id="2" name="TextBox 1"/>
+          <p:cNvSpPr txBox="1"/>
+          <p:nvPr/>
+        </p:nvSpPr>
+        <p:spPr>
+          <a:xfrm>
+            <a:off x="640080" y="365760"/>
+            <a:ext cx="10881360" cy="731520"/>
+          </a:xfrm>
+          <a:prstGeom prst="rect">
+            <a:avLst/>
+          </a:prstGeom>
+          <a:noFill/>
+        </p:spPr>
+        <p:txBody>
+          <a:bodyPr wrap="square">
+            <a:spAutoFit/>
+          </a:bodyPr>
+          <a:lstStyle/>
+          <a:p>
+            <a:pPr>
+              <a:defRPr sz="2800" b="1">
+                <a:solidFill>
+                  <a:srgbClr val="00A89B"/>
+                </a:solidFill>
+              </a:defRPr>
+            </a:pPr>
+            <a:r>
+              <a:t>Part 3: Repository (Merchant-Scoped Query)</a:t>
+            </a:r>
+          </a:p>
+        </p:txBody>
+      </p:sp>
+      <p:sp>
+        <p:nvSpPr>
+          <p:cNvPr id="3" name="Rectangle 2"/>
+          <p:cNvSpPr/>
+          <p:nvPr/>
+        </p:nvSpPr>
+        <p:spPr>
+          <a:xfrm>
+            <a:off x="640080" y="1051560"/>
+            <a:ext cx="1828800" cy="25400"/>
+          </a:xfrm>
+          <a:prstGeom prst="rect">
+            <a:avLst/>
+          </a:prstGeom>
+          <a:solidFill>
+            <a:srgbClr val="00A89B"/>
+          </a:solidFill>
+          <a:ln>
+            <a:noFill/>
+          </a:ln>
+        </p:spPr>
+        <p:style>
+          <a:lnRef idx="1">
+            <a:schemeClr val="accent1"/>
+          </a:lnRef>
+          <a:fillRef idx="3">
+            <a:schemeClr val="accent1"/>
+          </a:fillRef>
+          <a:effectRef idx="2">
+            <a:schemeClr val="accent1"/>
+          </a:effectRef>
+          <a:fontRef idx="minor">
+            <a:schemeClr val="lt1"/>
+          </a:fontRef>
+        </p:style>
+        <p:txBody>
+          <a:bodyPr rtlCol="0" anchor="ctr"/>
+          <a:lstStyle/>
+          <a:p>
+            <a:pPr algn="ctr"/>
+          </a:p>
+        </p:txBody>
+      </p:sp>
+      <p:sp>
+        <p:nvSpPr>
+          <p:cNvPr id="4" name="TextBox 3"/>
+          <p:cNvSpPr txBox="1"/>
+          <p:nvPr/>
+        </p:nvSpPr>
+        <p:spPr>
+          <a:xfrm>
+            <a:off x="640080" y="1371600"/>
+            <a:ext cx="10881360" cy="5029200"/>
+          </a:xfrm>
+          <a:prstGeom prst="rect">
+            <a:avLst/>
+          </a:prstGeom>
+          <a:noFill/>
+        </p:spPr>
+        <p:txBody>
+          <a:bodyPr wrap="square">
+            <a:spAutoFit/>
+          </a:bodyPr>
+          <a:lstStyle/>
+          <a:p>
+            <a:pPr>
+              <a:spcAft>
+                <a:spcPts val="800"/>
+              </a:spcAft>
+              <a:defRPr sz="1600">
+                <a:solidFill>
+                  <a:srgbClr val="1A1A1A"/>
+                </a:solidFill>
+              </a:defRPr>
+            </a:pPr>
+            <a:r>
+              <a:t>The repository builds a Propel query that only returns suppliers assigned to the current merchant.</a:t>
+            </a:r>
+          </a:p>
+          <a:p>
+            <a:pPr>
+              <a:spcAft>
+                <a:spcPts val="800"/>
+              </a:spcAft>
+              <a:defRPr sz="1600">
+                <a:solidFill>
+                  <a:srgbClr val="1A1A1A"/>
+                </a:solidFill>
+              </a:defRPr>
+            </a:pPr>
+            <a:r>
+              <a:t>Coding time:</a:t>
+            </a:r>
+          </a:p>
+          <a:p>
+            <a:pPr>
+              <a:spcAft>
+                <a:spcPts val="800"/>
+              </a:spcAft>
+              <a:defRPr sz="1600">
+                <a:solidFill>
+                  <a:srgbClr val="1A1A1A"/>
+                </a:solidFill>
+              </a:defRPr>
+            </a:pPr>
+            <a:r>
+              <a:t>Open src/SprykerAcademy/Zed/SupplierMerchantPortalGui/Persistence/SupplierMerchantPortalGuiRepository.php :</a:t>
+            </a:r>
+          </a:p>
+          <a:p>
+            <a:pPr>
+              <a:spcAft>
+                <a:spcPts val="800"/>
+              </a:spcAft>
+              <a:defRPr sz="1600">
+                <a:solidFill>
+                  <a:srgbClr val="1A1A1A"/>
+                </a:solidFill>
+              </a:defRPr>
+            </a:pPr>
+            <a:r>
+              <a:t>In getSupplierTableData() :</a:t>
+            </a:r>
+          </a:p>
+          <a:p>
+            <a:pPr>
+              <a:spcAft>
+                <a:spcPts val="400"/>
+              </a:spcAft>
+              <a:defRPr sz="1500">
+                <a:solidFill>
+                  <a:srgbClr val="1A1A1A"/>
+                </a:solidFill>
+              </a:defRPr>
+            </a:pPr>
+            <a:r>
+              <a:t>• Get a fresh PyzSupplierQuery from the factory</a:t>
+            </a:r>
+          </a:p>
+          <a:p>
+            <a:pPr>
+              <a:spcAft>
+                <a:spcPts val="400"/>
+              </a:spcAft>
+              <a:defRPr sz="1500">
+                <a:solidFill>
+                  <a:srgbClr val="1A1A1A"/>
+                </a:solidFill>
+              </a:defRPr>
+            </a:pPr>
+            <a:r>
+              <a:t>• Join with PyzMerchantToSupplier and filter by merchant reference: $supplierQuery -&gt;usePyzMerchantToSupplierQuery() -&gt;useSpyMerchantQuery() -&gt;filterByMerchantReference( $criteriaTransfer -&gt;getMerchantReference()) -&gt;endUse() -&gt;endUse() ;</a:t>
+            </a:r>
+          </a:p>
+          <a:p>
+            <a:pPr>
+              <a:spcAft>
+                <a:spcPts val="400"/>
+              </a:spcAft>
+              <a:defRPr sz="1500">
+                <a:solidFill>
+                  <a:srgbClr val="1A1A1A"/>
+                </a:solidFill>
+              </a:defRPr>
+            </a:pPr>
+            <a:r>
+              <a:t>• Apply search filter on name/description/email if searchTerm is set</a:t>
+            </a:r>
+          </a:p>
+        </p:txBody>
+      </p:sp>
+    </p:spTree>
+  </p:cSld>
+  <p:clrMapOvr>
+    <a:masterClrMapping/>
+  </p:clrMapOvr>
+</p:sld>
+</file>
+
+<file path=ppt/slides/slide216.xml><?xml version="1.0" encoding="utf-8"?>
+<p:sld xmlns:a="http://schemas.openxmlformats.org/drawingml/2006/main" xmlns:p="http://schemas.openxmlformats.org/presentationml/2006/main" xmlns:r="http://schemas.openxmlformats.org/officeDocument/2006/relationships">
+  <p:cSld>
+    <p:spTree>
+      <p:nvGrpSpPr>
+        <p:cNvPr id="1" name=""/>
+        <p:cNvGrpSpPr/>
+        <p:nvPr/>
+      </p:nvGrpSpPr>
+      <p:grpSpPr/>
+      <p:sp>
+        <p:nvSpPr>
+          <p:cNvPr id="2" name="TextBox 1"/>
+          <p:cNvSpPr txBox="1"/>
+          <p:nvPr/>
+        </p:nvSpPr>
+        <p:spPr>
+          <a:xfrm>
+            <a:off x="640080" y="365760"/>
+            <a:ext cx="10881360" cy="731520"/>
+          </a:xfrm>
+          <a:prstGeom prst="rect">
+            <a:avLst/>
+          </a:prstGeom>
+          <a:noFill/>
+        </p:spPr>
+        <p:txBody>
+          <a:bodyPr wrap="square">
+            <a:spAutoFit/>
+          </a:bodyPr>
+          <a:lstStyle/>
+          <a:p>
+            <a:pPr>
+              <a:defRPr sz="2800" b="1">
+                <a:solidFill>
+                  <a:srgbClr val="00A89B"/>
+                </a:solidFill>
+              </a:defRPr>
+            </a:pPr>
+            <a:r>
+              <a:t>Part 3: Repository (Merchant-Scoped Query) (cont.)</a:t>
+            </a:r>
+          </a:p>
+        </p:txBody>
+      </p:sp>
+      <p:sp>
+        <p:nvSpPr>
+          <p:cNvPr id="3" name="Rectangle 2"/>
+          <p:cNvSpPr/>
+          <p:nvPr/>
+        </p:nvSpPr>
+        <p:spPr>
+          <a:xfrm>
+            <a:off x="640080" y="1051560"/>
+            <a:ext cx="1828800" cy="25400"/>
+          </a:xfrm>
+          <a:prstGeom prst="rect">
+            <a:avLst/>
+          </a:prstGeom>
+          <a:solidFill>
+            <a:srgbClr val="00A89B"/>
+          </a:solidFill>
+          <a:ln>
+            <a:noFill/>
+          </a:ln>
+        </p:spPr>
+        <p:style>
+          <a:lnRef idx="1">
+            <a:schemeClr val="accent1"/>
+          </a:lnRef>
+          <a:fillRef idx="3">
+            <a:schemeClr val="accent1"/>
+          </a:fillRef>
+          <a:effectRef idx="2">
+            <a:schemeClr val="accent1"/>
+          </a:effectRef>
+          <a:fontRef idx="minor">
+            <a:schemeClr val="lt1"/>
+          </a:fontRef>
+        </p:style>
+        <p:txBody>
+          <a:bodyPr rtlCol="0" anchor="ctr"/>
+          <a:lstStyle/>
+          <a:p>
+            <a:pPr algn="ctr"/>
+          </a:p>
+        </p:txBody>
+      </p:sp>
+      <p:sp>
+        <p:nvSpPr>
+          <p:cNvPr id="4" name="TextBox 3"/>
+          <p:cNvSpPr txBox="1"/>
+          <p:nvPr/>
+        </p:nvSpPr>
+        <p:spPr>
+          <a:xfrm>
+            <a:off x="640080" y="1371600"/>
+            <a:ext cx="10881360" cy="5029200"/>
+          </a:xfrm>
+          <a:prstGeom prst="rect">
+            <a:avLst/>
+          </a:prstGeom>
+          <a:noFill/>
+        </p:spPr>
+        <p:txBody>
+          <a:bodyPr wrap="square">
+            <a:spAutoFit/>
+          </a:bodyPr>
+          <a:lstStyle/>
+          <a:p>
+            <a:pPr>
+              <a:spcAft>
+                <a:spcPts val="400"/>
+              </a:spcAft>
+              <a:defRPr sz="1500">
+                <a:solidFill>
+                  <a:srgbClr val="1A1A1A"/>
+                </a:solidFill>
+              </a:defRPr>
+            </a:pPr>
+            <a:r>
+              <a:t>• Apply status filter if filterStatus is set</a:t>
+            </a:r>
+          </a:p>
+          <a:p>
+            <a:pPr>
+              <a:spcAft>
+                <a:spcPts val="400"/>
+              </a:spcAft>
+              <a:defRPr sz="1500">
+                <a:solidFill>
+                  <a:srgbClr val="1A1A1A"/>
+                </a:solidFill>
+              </a:defRPr>
+            </a:pPr>
+            <a:r>
+              <a:t>• Count total before pagination</a:t>
+            </a:r>
+          </a:p>
+          <a:p>
+            <a:pPr>
+              <a:spcAft>
+                <a:spcPts val="400"/>
+              </a:spcAft>
+              <a:defRPr sz="1500">
+                <a:solidFill>
+                  <a:srgbClr val="1A1A1A"/>
+                </a:solidFill>
+              </a:defRPr>
+            </a:pPr>
+            <a:r>
+              <a:t>• Apply sorting and pagination</a:t>
+            </a:r>
+          </a:p>
+          <a:p>
+            <a:pPr>
+              <a:spcAft>
+                <a:spcPts val="400"/>
+              </a:spcAft>
+              <a:defRPr sz="1500">
+                <a:solidFill>
+                  <a:srgbClr val="1A1A1A"/>
+                </a:solidFill>
+              </a:defRPr>
+            </a:pPr>
+            <a:r>
+              <a:t>• Map each PyzSupplier entity to a GuiTableRowDataResponseTransfer with keys matching the column IDs</a:t>
+            </a:r>
+          </a:p>
+          <a:p>
+            <a:pPr>
+              <a:spcAft>
+                <a:spcPts val="800"/>
+              </a:spcAft>
+              <a:defRPr sz="1400" i="1">
+                <a:solidFill>
+                  <a:srgbClr val="888888"/>
+                </a:solidFill>
+              </a:defRPr>
+            </a:pPr>
+            <a:r>
+              <a:t>❝ Propel nested joins: usePyzMerchantToSupplierQuery() creates a JOIN with the bridge table. useSpyMerchantQuery() then joins with the merchant table to filter by reference.</a:t>
+            </a:r>
+          </a:p>
+        </p:txBody>
+      </p:sp>
+    </p:spTree>
+  </p:cSld>
+  <p:clrMapOvr>
+    <a:masterClrMapping/>
+  </p:clrMapOvr>
+</p:sld>
+</file>
+
+<file path=ppt/slides/slide217.xml><?xml version="1.0" encoding="utf-8"?>
+<p:sld xmlns:a="http://schemas.openxmlformats.org/drawingml/2006/main" xmlns:p="http://schemas.openxmlformats.org/presentationml/2006/main" xmlns:r="http://schemas.openxmlformats.org/officeDocument/2006/relationships">
+  <p:cSld>
+    <p:spTree>
+      <p:nvGrpSpPr>
+        <p:cNvPr id="1" name=""/>
+        <p:cNvGrpSpPr/>
+        <p:nvPr/>
+      </p:nvGrpSpPr>
+      <p:grpSpPr/>
+      <p:sp>
+        <p:nvSpPr>
+          <p:cNvPr id="2" name="TextBox 1"/>
+          <p:cNvSpPr txBox="1"/>
+          <p:nvPr/>
+        </p:nvSpPr>
+        <p:spPr>
+          <a:xfrm>
+            <a:off x="640080" y="365760"/>
+            <a:ext cx="10881360" cy="731520"/>
+          </a:xfrm>
+          <a:prstGeom prst="rect">
+            <a:avLst/>
+          </a:prstGeom>
+          <a:noFill/>
+        </p:spPr>
+        <p:txBody>
+          <a:bodyPr wrap="square">
+            <a:spAutoFit/>
+          </a:bodyPr>
+          <a:lstStyle/>
+          <a:p>
+            <a:pPr>
+              <a:defRPr sz="2800" b="1">
+                <a:solidFill>
+                  <a:srgbClr val="00A89B"/>
+                </a:solidFill>
+              </a:defRPr>
+            </a:pPr>
+            <a:r>
+              <a:t>Part 4: Controller</a:t>
+            </a:r>
+          </a:p>
+        </p:txBody>
+      </p:sp>
+      <p:sp>
+        <p:nvSpPr>
+          <p:cNvPr id="3" name="Rectangle 2"/>
+          <p:cNvSpPr/>
+          <p:nvPr/>
+        </p:nvSpPr>
+        <p:spPr>
+          <a:xfrm>
+            <a:off x="640080" y="1051560"/>
+            <a:ext cx="1828800" cy="25400"/>
+          </a:xfrm>
+          <a:prstGeom prst="rect">
+            <a:avLst/>
+          </a:prstGeom>
+          <a:solidFill>
+            <a:srgbClr val="00A89B"/>
+          </a:solidFill>
+          <a:ln>
+            <a:noFill/>
+          </a:ln>
+        </p:spPr>
+        <p:style>
+          <a:lnRef idx="1">
+            <a:schemeClr val="accent1"/>
+          </a:lnRef>
+          <a:fillRef idx="3">
+            <a:schemeClr val="accent1"/>
+          </a:fillRef>
+          <a:effectRef idx="2">
+            <a:schemeClr val="accent1"/>
+          </a:effectRef>
+          <a:fontRef idx="minor">
+            <a:schemeClr val="lt1"/>
+          </a:fontRef>
+        </p:style>
+        <p:txBody>
+          <a:bodyPr rtlCol="0" anchor="ctr"/>
+          <a:lstStyle/>
+          <a:p>
+            <a:pPr algn="ctr"/>
+          </a:p>
+        </p:txBody>
+      </p:sp>
+      <p:sp>
+        <p:nvSpPr>
+          <p:cNvPr id="4" name="TextBox 3"/>
+          <p:cNvSpPr txBox="1"/>
+          <p:nvPr/>
+        </p:nvSpPr>
+        <p:spPr>
+          <a:xfrm>
+            <a:off x="640080" y="1371600"/>
+            <a:ext cx="10881360" cy="5029200"/>
+          </a:xfrm>
+          <a:prstGeom prst="rect">
+            <a:avLst/>
+          </a:prstGeom>
+          <a:noFill/>
+        </p:spPr>
+        <p:txBody>
+          <a:bodyPr wrap="square">
+            <a:spAutoFit/>
+          </a:bodyPr>
+          <a:lstStyle/>
+          <a:p>
+            <a:pPr>
+              <a:spcAft>
+                <a:spcPts val="800"/>
+              </a:spcAft>
+              <a:defRPr sz="1600">
+                <a:solidFill>
+                  <a:srgbClr val="1A1A1A"/>
+                </a:solidFill>
+              </a:defRPr>
+            </a:pPr>
+            <a:r>
+              <a:t>The controller has two actions: one for the page and one for AJAX table data.</a:t>
+            </a:r>
+          </a:p>
+          <a:p>
+            <a:pPr>
+              <a:spcAft>
+                <a:spcPts val="800"/>
+              </a:spcAft>
+              <a:defRPr sz="1600">
+                <a:solidFill>
+                  <a:srgbClr val="1A1A1A"/>
+                </a:solidFill>
+              </a:defRPr>
+            </a:pPr>
+            <a:r>
+              <a:t>Coding time:</a:t>
+            </a:r>
+          </a:p>
+          <a:p>
+            <a:pPr>
+              <a:spcAft>
+                <a:spcPts val="800"/>
+              </a:spcAft>
+              <a:defRPr sz="1600">
+                <a:solidFill>
+                  <a:srgbClr val="1A1A1A"/>
+                </a:solidFill>
+              </a:defRPr>
+            </a:pPr>
+            <a:r>
+              <a:t>Open src/SprykerAcademy/Zed/SupplierMerchantPortalGui/Communication/Controller/SupplierController.php :</a:t>
+            </a:r>
+          </a:p>
+          <a:p>
+            <a:pPr>
+              <a:spcAft>
+                <a:spcPts val="400"/>
+              </a:spcAft>
+              <a:defRPr sz="1500">
+                <a:solidFill>
+                  <a:srgbClr val="1A1A1A"/>
+                </a:solidFill>
+              </a:defRPr>
+            </a:pPr>
+            <a:r>
+              <a:t>• indexAction() — return viewResponse with supplierTableConfiguration from the configuration provider</a:t>
+            </a:r>
+          </a:p>
+          <a:p>
+            <a:pPr>
+              <a:spcAft>
+                <a:spcPts val="400"/>
+              </a:spcAft>
+              <a:defRPr sz="1500">
+                <a:solidFill>
+                  <a:srgbClr val="1A1A1A"/>
+                </a:solidFill>
+              </a:defRPr>
+            </a:pPr>
+            <a:r>
+              <a:t>• tableDataAction() — use GuiTableHttpDataRequestExecutor::execute() with the data provider and configuration</a:t>
+            </a:r>
+          </a:p>
+        </p:txBody>
+      </p:sp>
+    </p:spTree>
+  </p:cSld>
+  <p:clrMapOvr>
+    <a:masterClrMapping/>
+  </p:clrMapOvr>
+</p:sld>
+</file>
+
+<file path=ppt/slides/slide218.xml><?xml version="1.0" encoding="utf-8"?>
+<p:sld xmlns:a="http://schemas.openxmlformats.org/drawingml/2006/main" xmlns:p="http://schemas.openxmlformats.org/presentationml/2006/main" xmlns:r="http://schemas.openxmlformats.org/officeDocument/2006/relationships">
+  <p:cSld>
+    <p:spTree>
+      <p:nvGrpSpPr>
+        <p:cNvPr id="1" name=""/>
+        <p:cNvGrpSpPr/>
+        <p:nvPr/>
+      </p:nvGrpSpPr>
+      <p:grpSpPr/>
+      <p:sp>
+        <p:nvSpPr>
+          <p:cNvPr id="2" name="TextBox 1"/>
+          <p:cNvSpPr txBox="1"/>
+          <p:nvPr/>
+        </p:nvSpPr>
+        <p:spPr>
+          <a:xfrm>
+            <a:off x="640080" y="365760"/>
+            <a:ext cx="10881360" cy="731520"/>
+          </a:xfrm>
+          <a:prstGeom prst="rect">
+            <a:avLst/>
+          </a:prstGeom>
+          <a:noFill/>
+        </p:spPr>
+        <p:txBody>
+          <a:bodyPr wrap="square">
+            <a:spAutoFit/>
+          </a:bodyPr>
+          <a:lstStyle/>
+          <a:p>
+            <a:pPr>
+              <a:defRPr sz="2800" b="1">
+                <a:solidFill>
+                  <a:srgbClr val="00A89B"/>
+                </a:solidFill>
+              </a:defRPr>
+            </a:pPr>
+            <a:r>
+              <a:t>Part 5: Angular Component Wiring</a:t>
+            </a:r>
+          </a:p>
+        </p:txBody>
+      </p:sp>
+      <p:sp>
+        <p:nvSpPr>
+          <p:cNvPr id="3" name="Rectangle 2"/>
+          <p:cNvSpPr/>
+          <p:nvPr/>
+        </p:nvSpPr>
+        <p:spPr>
+          <a:xfrm>
+            <a:off x="640080" y="1051560"/>
+            <a:ext cx="1828800" cy="25400"/>
+          </a:xfrm>
+          <a:prstGeom prst="rect">
+            <a:avLst/>
+          </a:prstGeom>
+          <a:solidFill>
+            <a:srgbClr val="00A89B"/>
+          </a:solidFill>
+          <a:ln>
+            <a:noFill/>
+          </a:ln>
+        </p:spPr>
+        <p:style>
+          <a:lnRef idx="1">
+            <a:schemeClr val="accent1"/>
+          </a:lnRef>
+          <a:fillRef idx="3">
+            <a:schemeClr val="accent1"/>
+          </a:fillRef>
+          <a:effectRef idx="2">
+            <a:schemeClr val="accent1"/>
+          </a:effectRef>
+          <a:fontRef idx="minor">
+            <a:schemeClr val="lt1"/>
+          </a:fontRef>
+        </p:style>
+        <p:txBody>
+          <a:bodyPr rtlCol="0" anchor="ctr"/>
+          <a:lstStyle/>
+          <a:p>
+            <a:pPr algn="ctr"/>
+          </a:p>
+        </p:txBody>
+      </p:sp>
+      <p:sp>
+        <p:nvSpPr>
+          <p:cNvPr id="4" name="TextBox 3"/>
+          <p:cNvSpPr txBox="1"/>
+          <p:nvPr/>
+        </p:nvSpPr>
+        <p:spPr>
+          <a:xfrm>
+            <a:off x="640080" y="1371600"/>
+            <a:ext cx="10881360" cy="5029200"/>
+          </a:xfrm>
+          <a:prstGeom prst="rect">
+            <a:avLst/>
+          </a:prstGeom>
+          <a:noFill/>
+        </p:spPr>
+        <p:txBody>
+          <a:bodyPr wrap="square">
+            <a:spAutoFit/>
+          </a:bodyPr>
+          <a:lstStyle/>
+          <a:p>
+            <a:pPr>
+              <a:spcAft>
+                <a:spcPts val="800"/>
+              </a:spcAft>
+              <a:defRPr sz="1600">
+                <a:solidFill>
+                  <a:srgbClr val="1A1A1A"/>
+                </a:solidFill>
+              </a:defRPr>
+            </a:pPr>
+            <a:r>
+              <a:t>The Angular components are provided. You need to register them as web components.</a:t>
+            </a:r>
+          </a:p>
+          <a:p>
+            <a:pPr>
+              <a:spcAft>
+                <a:spcPts val="800"/>
+              </a:spcAft>
+              <a:defRPr sz="1600">
+                <a:solidFill>
+                  <a:srgbClr val="1A1A1A"/>
+                </a:solidFill>
+              </a:defRPr>
+            </a:pPr>
+            <a:r>
+              <a:t>Coding time:</a:t>
+            </a:r>
+          </a:p>
+          <a:p>
+            <a:pPr>
+              <a:spcAft>
+                <a:spcPts val="800"/>
+              </a:spcAft>
+              <a:defRPr sz="1600">
+                <a:solidFill>
+                  <a:srgbClr val="1A1A1A"/>
+                </a:solidFill>
+              </a:defRPr>
+            </a:pPr>
+            <a:r>
+              <a:t>Open src/SprykerAcademy/Zed/SupplierMerchantPortalGui/Presentation/Components/app/components.module.ts :</a:t>
+            </a:r>
+          </a:p>
+          <a:p>
+            <a:pPr>
+              <a:spcAft>
+                <a:spcPts val="800"/>
+              </a:spcAft>
+              <a:defRPr sz="1600">
+                <a:solidFill>
+                  <a:srgbClr val="1A1A1A"/>
+                </a:solidFill>
+              </a:defRPr>
+            </a:pPr>
+            <a:r>
+              <a:t>Add SupplierListComponent to the WebComponentsModule.withComponents([...]) array. This transforms the Angular component into a custom HTML element ( &lt;web-mp-supplier-list&gt; ) that Twig can use.</a:t>
+            </a:r>
+          </a:p>
+          <a:p>
+            <a:pPr>
+              <a:spcAft>
+                <a:spcPts val="800"/>
+              </a:spcAft>
+              <a:defRPr sz="1400" i="1">
+                <a:solidFill>
+                  <a:srgbClr val="888888"/>
+                </a:solidFill>
+              </a:defRPr>
+            </a:pPr>
+            <a:r>
+              <a:t>❝ Web Components pattern: Spryker uses @spryker/web-components to bridge Angular components with server-rendered Twig. The withComponents([...]) call registers each Angular component as a custom element with the web- prefix added to its selector.</a:t>
+            </a:r>
+          </a:p>
+        </p:txBody>
+      </p:sp>
+    </p:spTree>
+  </p:cSld>
+  <p:clrMapOvr>
+    <a:masterClrMapping/>
+  </p:clrMapOvr>
+</p:sld>
+</file>
+
+<file path=ppt/slides/slide219.xml><?xml version="1.0" encoding="utf-8"?>
+<p:sld xmlns:a="http://schemas.openxmlformats.org/drawingml/2006/main" xmlns:p="http://schemas.openxmlformats.org/presentationml/2006/main" xmlns:r="http://schemas.openxmlformats.org/officeDocument/2006/relationships">
+  <p:cSld>
+    <p:spTree>
+      <p:nvGrpSpPr>
+        <p:cNvPr id="1" name=""/>
+        <p:cNvGrpSpPr/>
+        <p:nvPr/>
+      </p:nvGrpSpPr>
+      <p:grpSpPr/>
+      <p:sp>
+        <p:nvSpPr>
+          <p:cNvPr id="2" name="TextBox 1"/>
+          <p:cNvSpPr txBox="1"/>
+          <p:nvPr/>
+        </p:nvSpPr>
+        <p:spPr>
+          <a:xfrm>
+            <a:off x="640080" y="365760"/>
+            <a:ext cx="10881360" cy="731520"/>
+          </a:xfrm>
+          <a:prstGeom prst="rect">
+            <a:avLst/>
+          </a:prstGeom>
+          <a:noFill/>
+        </p:spPr>
+        <p:txBody>
+          <a:bodyPr wrap="square">
+            <a:spAutoFit/>
+          </a:bodyPr>
+          <a:lstStyle/>
+          <a:p>
+            <a:pPr>
+              <a:defRPr sz="2800" b="1">
+                <a:solidFill>
+                  <a:srgbClr val="00A89B"/>
+                </a:solidFill>
+              </a:defRPr>
+            </a:pPr>
+            <a:r>
+              <a:t>Testing</a:t>
+            </a:r>
+          </a:p>
+        </p:txBody>
+      </p:sp>
+      <p:sp>
+        <p:nvSpPr>
+          <p:cNvPr id="3" name="Rectangle 2"/>
+          <p:cNvSpPr/>
+          <p:nvPr/>
+        </p:nvSpPr>
+        <p:spPr>
+          <a:xfrm>
+            <a:off x="640080" y="1051560"/>
+            <a:ext cx="1828800" cy="25400"/>
+          </a:xfrm>
+          <a:prstGeom prst="rect">
+            <a:avLst/>
+          </a:prstGeom>
+          <a:solidFill>
+            <a:srgbClr val="00A89B"/>
+          </a:solidFill>
+          <a:ln>
+            <a:noFill/>
+          </a:ln>
+        </p:spPr>
+        <p:style>
+          <a:lnRef idx="1">
+            <a:schemeClr val="accent1"/>
+          </a:lnRef>
+          <a:fillRef idx="3">
+            <a:schemeClr val="accent1"/>
+          </a:fillRef>
+          <a:effectRef idx="2">
+            <a:schemeClr val="accent1"/>
+          </a:effectRef>
+          <a:fontRef idx="minor">
+            <a:schemeClr val="lt1"/>
+          </a:fontRef>
+        </p:style>
+        <p:txBody>
+          <a:bodyPr rtlCol="0" anchor="ctr"/>
+          <a:lstStyle/>
+          <a:p>
+            <a:pPr algn="ctr"/>
+          </a:p>
+        </p:txBody>
+      </p:sp>
+      <p:sp>
+        <p:nvSpPr>
+          <p:cNvPr id="4" name="TextBox 3"/>
+          <p:cNvSpPr txBox="1"/>
+          <p:nvPr/>
+        </p:nvSpPr>
+        <p:spPr>
+          <a:xfrm>
+            <a:off x="640080" y="1371600"/>
+            <a:ext cx="10881360" cy="5029200"/>
+          </a:xfrm>
+          <a:prstGeom prst="rect">
+            <a:avLst/>
+          </a:prstGeom>
+          <a:noFill/>
+        </p:spPr>
+        <p:txBody>
+          <a:bodyPr wrap="square">
+            <a:spAutoFit/>
+          </a:bodyPr>
+          <a:lstStyle/>
+          <a:p>
+            <a:pPr>
+              <a:spcAft>
+                <a:spcPts val="800"/>
+              </a:spcAft>
+              <a:defRPr sz="1600">
+                <a:solidFill>
+                  <a:srgbClr val="1A1A1A"/>
+                </a:solidFill>
+              </a:defRPr>
+            </a:pPr>
+            <a:r>
+              <a:t>After completing all parts:</a:t>
+            </a:r>
+          </a:p>
+          <a:p>
+            <a:pPr>
+              <a:spcBef>
+                <a:spcPts val="0"/>
+              </a:spcBef>
+              <a:spcAft>
+                <a:spcPts val="0"/>
+              </a:spcAft>
+            </a:pPr>
+            <a:r>
+              <a:rPr sz="900">
+                <a:solidFill>
+                  <a:srgbClr val="2D2D2D"/>
+                </a:solidFill>
+                <a:latin typeface="Consolas"/>
+              </a:rPr>
+              <a:t>docker/sdk</a:t>
+            </a:r>
+            <a:r>
+              <a:rPr sz="900">
+                <a:solidFill>
+                  <a:srgbClr val="2D2D2D"/>
+                </a:solidFill>
+                <a:latin typeface="Consolas"/>
+              </a:rPr>
+              <a:t> console cache:empty-all</a:t>
+            </a:r>
+          </a:p>
+          <a:p>
+            <a:pPr>
+              <a:spcAft>
+                <a:spcPts val="400"/>
+              </a:spcAft>
+              <a:defRPr sz="1500">
+                <a:solidFill>
+                  <a:srgbClr val="1A1A1A"/>
+                </a:solidFill>
+              </a:defRPr>
+            </a:pPr>
+            <a:r>
+              <a:t>• Log in to the Merchant Portal (e.g., mp.eu.spryker.local )</a:t>
+            </a:r>
+          </a:p>
+          <a:p>
+            <a:pPr>
+              <a:spcAft>
+                <a:spcPts val="400"/>
+              </a:spcAft>
+              <a:defRPr sz="1500">
+                <a:solidFill>
+                  <a:srgbClr val="1A1A1A"/>
+                </a:solidFill>
+              </a:defRPr>
+            </a:pPr>
+            <a:r>
+              <a:t>• You should see “Suppliers” in the navigation</a:t>
+            </a:r>
+          </a:p>
+          <a:p>
+            <a:pPr>
+              <a:spcAft>
+                <a:spcPts val="400"/>
+              </a:spcAft>
+              <a:defRPr sz="1500">
+                <a:solidFill>
+                  <a:srgbClr val="1A1A1A"/>
+                </a:solidFill>
+              </a:defRPr>
+            </a:pPr>
+            <a:r>
+              <a:t>• The table should show only suppliers assigned to your merchant</a:t>
+            </a:r>
+          </a:p>
+          <a:p>
+            <a:pPr>
+              <a:spcAft>
+                <a:spcPts val="400"/>
+              </a:spcAft>
+              <a:defRPr sz="1500">
+                <a:solidFill>
+                  <a:srgbClr val="1A1A1A"/>
+                </a:solidFill>
+              </a:defRPr>
+            </a:pPr>
+            <a:r>
+              <a:t>• Try the search, status filter, and column sorting</a:t>
             </a:r>
           </a:p>
         </p:txBody>
@@ -32252,6 +35808,1946 @@
 </p:sld>
 </file>
 
+<file path=ppt/slides/slide220.xml><?xml version="1.0" encoding="utf-8"?>
+<p:sld xmlns:a="http://schemas.openxmlformats.org/drawingml/2006/main" xmlns:p="http://schemas.openxmlformats.org/presentationml/2006/main" xmlns:r="http://schemas.openxmlformats.org/officeDocument/2006/relationships">
+  <p:cSld>
+    <p:spTree>
+      <p:nvGrpSpPr>
+        <p:cNvPr id="1" name=""/>
+        <p:cNvGrpSpPr/>
+        <p:nvPr/>
+      </p:nvGrpSpPr>
+      <p:grpSpPr/>
+      <p:sp>
+        <p:nvSpPr>
+          <p:cNvPr id="2" name="TextBox 1"/>
+          <p:cNvSpPr txBox="1"/>
+          <p:nvPr/>
+        </p:nvSpPr>
+        <p:spPr>
+          <a:xfrm>
+            <a:off x="640080" y="365760"/>
+            <a:ext cx="10881360" cy="731520"/>
+          </a:xfrm>
+          <a:prstGeom prst="rect">
+            <a:avLst/>
+          </a:prstGeom>
+          <a:noFill/>
+        </p:spPr>
+        <p:txBody>
+          <a:bodyPr wrap="square">
+            <a:spAutoFit/>
+          </a:bodyPr>
+          <a:lstStyle/>
+          <a:p>
+            <a:pPr>
+              <a:defRPr sz="2800" b="1">
+                <a:solidFill>
+                  <a:srgbClr val="00A89B"/>
+                </a:solidFill>
+              </a:defRPr>
+            </a:pPr>
+            <a:r>
+              <a:t>Solution</a:t>
+            </a:r>
+          </a:p>
+        </p:txBody>
+      </p:sp>
+      <p:sp>
+        <p:nvSpPr>
+          <p:cNvPr id="3" name="Rectangle 2"/>
+          <p:cNvSpPr/>
+          <p:nvPr/>
+        </p:nvSpPr>
+        <p:spPr>
+          <a:xfrm>
+            <a:off x="640080" y="1051560"/>
+            <a:ext cx="1828800" cy="25400"/>
+          </a:xfrm>
+          <a:prstGeom prst="rect">
+            <a:avLst/>
+          </a:prstGeom>
+          <a:solidFill>
+            <a:srgbClr val="00A89B"/>
+          </a:solidFill>
+          <a:ln>
+            <a:noFill/>
+          </a:ln>
+        </p:spPr>
+        <p:style>
+          <a:lnRef idx="1">
+            <a:schemeClr val="accent1"/>
+          </a:lnRef>
+          <a:fillRef idx="3">
+            <a:schemeClr val="accent1"/>
+          </a:fillRef>
+          <a:effectRef idx="2">
+            <a:schemeClr val="accent1"/>
+          </a:effectRef>
+          <a:fontRef idx="minor">
+            <a:schemeClr val="lt1"/>
+          </a:fontRef>
+        </p:style>
+        <p:txBody>
+          <a:bodyPr rtlCol="0" anchor="ctr"/>
+          <a:lstStyle/>
+          <a:p>
+            <a:pPr algn="ctr"/>
+          </a:p>
+        </p:txBody>
+      </p:sp>
+      <p:sp>
+        <p:nvSpPr>
+          <p:cNvPr id="4" name="TextBox 3"/>
+          <p:cNvSpPr txBox="1"/>
+          <p:nvPr/>
+        </p:nvSpPr>
+        <p:spPr>
+          <a:xfrm>
+            <a:off x="640080" y="1371600"/>
+            <a:ext cx="10881360" cy="5029200"/>
+          </a:xfrm>
+          <a:prstGeom prst="rect">
+            <a:avLst/>
+          </a:prstGeom>
+          <a:noFill/>
+        </p:spPr>
+        <p:txBody>
+          <a:bodyPr wrap="square">
+            <a:spAutoFit/>
+          </a:bodyPr>
+          <a:lstStyle/>
+          <a:p>
+            <a:pPr>
+              <a:spcBef>
+                <a:spcPts val="0"/>
+              </a:spcBef>
+              <a:spcAft>
+                <a:spcPts val="0"/>
+              </a:spcAft>
+            </a:pPr>
+            <a:r>
+              <a:rPr sz="900">
+                <a:solidFill>
+                  <a:srgbClr val="2D2D2D"/>
+                </a:solidFill>
+                <a:latin typeface="Consolas"/>
+              </a:rPr>
+              <a:t>./exercises/load.sh</a:t>
+            </a:r>
+            <a:r>
+              <a:rPr sz="900">
+                <a:solidFill>
+                  <a:srgbClr val="2D2D2D"/>
+                </a:solidFill>
+                <a:latin typeface="Consolas"/>
+              </a:rPr>
+              <a:t> supplier intermediate/merchant-portal-table/complete</a:t>
+            </a:r>
+          </a:p>
+        </p:txBody>
+      </p:sp>
+    </p:spTree>
+  </p:cSld>
+  <p:clrMapOvr>
+    <a:masterClrMapping/>
+  </p:clrMapOvr>
+</p:sld>
+</file>
+
+<file path=ppt/slides/slide221.xml><?xml version="1.0" encoding="utf-8"?>
+<p:sld xmlns:a="http://schemas.openxmlformats.org/drawingml/2006/main" xmlns:p="http://schemas.openxmlformats.org/presentationml/2006/main" xmlns:r="http://schemas.openxmlformats.org/officeDocument/2006/relationships">
+  <p:cSld>
+    <p:spTree>
+      <p:nvGrpSpPr>
+        <p:cNvPr id="1" name=""/>
+        <p:cNvGrpSpPr/>
+        <p:nvPr/>
+      </p:nvGrpSpPr>
+      <p:grpSpPr/>
+      <p:sp>
+        <p:nvSpPr>
+          <p:cNvPr id="2" name="TextBox 1"/>
+          <p:cNvSpPr txBox="1"/>
+          <p:nvPr/>
+        </p:nvSpPr>
+        <p:spPr>
+          <a:xfrm>
+            <a:off x="914400" y="2560320"/>
+            <a:ext cx="10362895" cy="1371600"/>
+          </a:xfrm>
+          <a:prstGeom prst="rect">
+            <a:avLst/>
+          </a:prstGeom>
+          <a:noFill/>
+        </p:spPr>
+        <p:txBody>
+          <a:bodyPr wrap="square">
+            <a:spAutoFit/>
+          </a:bodyPr>
+          <a:lstStyle/>
+          <a:p>
+            <a:pPr algn="ctr">
+              <a:defRPr sz="3600" b="1">
+                <a:solidFill>
+                  <a:srgbClr val="00A89B"/>
+                </a:solidFill>
+              </a:defRPr>
+            </a:pPr>
+            <a:r>
+              <a:t>10-merchant-portal-form</a:t>
+            </a:r>
+          </a:p>
+        </p:txBody>
+      </p:sp>
+      <p:sp>
+        <p:nvSpPr>
+          <p:cNvPr id="3" name="Rectangle 2"/>
+          <p:cNvSpPr/>
+          <p:nvPr/>
+        </p:nvSpPr>
+        <p:spPr>
+          <a:xfrm>
+            <a:off x="3657600" y="2286000"/>
+            <a:ext cx="4876495" cy="38100"/>
+          </a:xfrm>
+          <a:prstGeom prst="rect">
+            <a:avLst/>
+          </a:prstGeom>
+          <a:solidFill>
+            <a:srgbClr val="00A89B"/>
+          </a:solidFill>
+          <a:ln>
+            <a:noFill/>
+          </a:ln>
+        </p:spPr>
+        <p:style>
+          <a:lnRef idx="1">
+            <a:schemeClr val="accent1"/>
+          </a:lnRef>
+          <a:fillRef idx="3">
+            <a:schemeClr val="accent1"/>
+          </a:fillRef>
+          <a:effectRef idx="2">
+            <a:schemeClr val="accent1"/>
+          </a:effectRef>
+          <a:fontRef idx="minor">
+            <a:schemeClr val="lt1"/>
+          </a:fontRef>
+        </p:style>
+        <p:txBody>
+          <a:bodyPr rtlCol="0" anchor="ctr"/>
+          <a:lstStyle/>
+          <a:p>
+            <a:pPr algn="ctr"/>
+          </a:p>
+        </p:txBody>
+      </p:sp>
+    </p:spTree>
+  </p:cSld>
+  <p:clrMapOvr>
+    <a:masterClrMapping/>
+  </p:clrMapOvr>
+</p:sld>
+</file>
+
+<file path=ppt/slides/slide222.xml><?xml version="1.0" encoding="utf-8"?>
+<p:sld xmlns:a="http://schemas.openxmlformats.org/drawingml/2006/main" xmlns:p="http://schemas.openxmlformats.org/presentationml/2006/main" xmlns:r="http://schemas.openxmlformats.org/officeDocument/2006/relationships">
+  <p:cSld>
+    <p:spTree>
+      <p:nvGrpSpPr>
+        <p:cNvPr id="1" name=""/>
+        <p:cNvGrpSpPr/>
+        <p:nvPr/>
+      </p:nvGrpSpPr>
+      <p:grpSpPr/>
+      <p:sp>
+        <p:nvSpPr>
+          <p:cNvPr id="2" name="TextBox 1"/>
+          <p:cNvSpPr txBox="1"/>
+          <p:nvPr/>
+        </p:nvSpPr>
+        <p:spPr>
+          <a:xfrm>
+            <a:off x="640080" y="365760"/>
+            <a:ext cx="10881360" cy="731520"/>
+          </a:xfrm>
+          <a:prstGeom prst="rect">
+            <a:avLst/>
+          </a:prstGeom>
+          <a:noFill/>
+        </p:spPr>
+        <p:txBody>
+          <a:bodyPr wrap="square">
+            <a:spAutoFit/>
+          </a:bodyPr>
+          <a:lstStyle/>
+          <a:p>
+            <a:pPr>
+              <a:defRPr sz="2800" b="1">
+                <a:solidFill>
+                  <a:srgbClr val="00A89B"/>
+                </a:solidFill>
+              </a:defRPr>
+            </a:pPr>
+            <a:r>
+              <a:t>Exercise 16: Merchant Portal — Supplier Create/Edit Form</a:t>
+            </a:r>
+          </a:p>
+        </p:txBody>
+      </p:sp>
+      <p:sp>
+        <p:nvSpPr>
+          <p:cNvPr id="3" name="Rectangle 2"/>
+          <p:cNvSpPr/>
+          <p:nvPr/>
+        </p:nvSpPr>
+        <p:spPr>
+          <a:xfrm>
+            <a:off x="640080" y="1051560"/>
+            <a:ext cx="1828800" cy="25400"/>
+          </a:xfrm>
+          <a:prstGeom prst="rect">
+            <a:avLst/>
+          </a:prstGeom>
+          <a:solidFill>
+            <a:srgbClr val="00A89B"/>
+          </a:solidFill>
+          <a:ln>
+            <a:noFill/>
+          </a:ln>
+        </p:spPr>
+        <p:style>
+          <a:lnRef idx="1">
+            <a:schemeClr val="accent1"/>
+          </a:lnRef>
+          <a:fillRef idx="3">
+            <a:schemeClr val="accent1"/>
+          </a:fillRef>
+          <a:effectRef idx="2">
+            <a:schemeClr val="accent1"/>
+          </a:effectRef>
+          <a:fontRef idx="minor">
+            <a:schemeClr val="lt1"/>
+          </a:fontRef>
+        </p:style>
+        <p:txBody>
+          <a:bodyPr rtlCol="0" anchor="ctr"/>
+          <a:lstStyle/>
+          <a:p>
+            <a:pPr algn="ctr"/>
+          </a:p>
+        </p:txBody>
+      </p:sp>
+      <p:sp>
+        <p:nvSpPr>
+          <p:cNvPr id="4" name="TextBox 3"/>
+          <p:cNvSpPr txBox="1"/>
+          <p:nvPr/>
+        </p:nvSpPr>
+        <p:spPr>
+          <a:xfrm>
+            <a:off x="640080" y="1371600"/>
+            <a:ext cx="10881360" cy="5029200"/>
+          </a:xfrm>
+          <a:prstGeom prst="rect">
+            <a:avLst/>
+          </a:prstGeom>
+          <a:noFill/>
+        </p:spPr>
+        <p:txBody>
+          <a:bodyPr wrap="square">
+            <a:spAutoFit/>
+          </a:bodyPr>
+          <a:lstStyle/>
+          <a:p>
+            <a:pPr>
+              <a:spcAft>
+                <a:spcPts val="800"/>
+              </a:spcAft>
+              <a:defRPr sz="1600">
+                <a:solidFill>
+                  <a:srgbClr val="1A1A1A"/>
+                </a:solidFill>
+              </a:defRPr>
+            </a:pPr>
+            <a:r>
+              <a:t>In this exercise, you will add create and edit functionality for suppliers in the Merchant Portal using drawer forms. You will learn the Merchant Portal form pattern: Symfony forms rendered in Angular drawers, with JSON responses controlling the UI lifecycle (close drawer, refresh table, show notifications).</a:t>
+            </a:r>
+          </a:p>
+          <a:p>
+            <a:pPr>
+              <a:spcAft>
+                <a:spcPts val="800"/>
+              </a:spcAft>
+              <a:defRPr sz="1600">
+                <a:solidFill>
+                  <a:srgbClr val="1A1A1A"/>
+                </a:solidFill>
+              </a:defRPr>
+            </a:pPr>
+            <a:r>
+              <a:t>You will learn how to: - Create a Symfony form type for the Merchant Portal - Build create and update controllers that return JsonResponse - Use ZedUiFormResponseBuilder for drawer actions (close, refresh, notify) - Auto-link new suppliers to the current merchant - Register an Angular edit component as a web component</a:t>
+            </a:r>
+          </a:p>
+        </p:txBody>
+      </p:sp>
+    </p:spTree>
+  </p:cSld>
+  <p:clrMapOvr>
+    <a:masterClrMapping/>
+  </p:clrMapOvr>
+</p:sld>
+</file>
+
+<file path=ppt/slides/slide223.xml><?xml version="1.0" encoding="utf-8"?>
+<p:sld xmlns:a="http://schemas.openxmlformats.org/drawingml/2006/main" xmlns:p="http://schemas.openxmlformats.org/presentationml/2006/main" xmlns:r="http://schemas.openxmlformats.org/officeDocument/2006/relationships">
+  <p:cSld>
+    <p:spTree>
+      <p:nvGrpSpPr>
+        <p:cNvPr id="1" name=""/>
+        <p:cNvGrpSpPr/>
+        <p:nvPr/>
+      </p:nvGrpSpPr>
+      <p:grpSpPr/>
+      <p:sp>
+        <p:nvSpPr>
+          <p:cNvPr id="2" name="TextBox 1"/>
+          <p:cNvSpPr txBox="1"/>
+          <p:nvPr/>
+        </p:nvSpPr>
+        <p:spPr>
+          <a:xfrm>
+            <a:off x="640080" y="365760"/>
+            <a:ext cx="10881360" cy="731520"/>
+          </a:xfrm>
+          <a:prstGeom prst="rect">
+            <a:avLst/>
+          </a:prstGeom>
+          <a:noFill/>
+        </p:spPr>
+        <p:txBody>
+          <a:bodyPr wrap="square">
+            <a:spAutoFit/>
+          </a:bodyPr>
+          <a:lstStyle/>
+          <a:p>
+            <a:pPr>
+              <a:defRPr sz="2800" b="1">
+                <a:solidFill>
+                  <a:srgbClr val="00A89B"/>
+                </a:solidFill>
+              </a:defRPr>
+            </a:pPr>
+            <a:r>
+              <a:t>Prerequisites</a:t>
+            </a:r>
+          </a:p>
+        </p:txBody>
+      </p:sp>
+      <p:sp>
+        <p:nvSpPr>
+          <p:cNvPr id="3" name="Rectangle 2"/>
+          <p:cNvSpPr/>
+          <p:nvPr/>
+        </p:nvSpPr>
+        <p:spPr>
+          <a:xfrm>
+            <a:off x="640080" y="1051560"/>
+            <a:ext cx="1828800" cy="25400"/>
+          </a:xfrm>
+          <a:prstGeom prst="rect">
+            <a:avLst/>
+          </a:prstGeom>
+          <a:solidFill>
+            <a:srgbClr val="00A89B"/>
+          </a:solidFill>
+          <a:ln>
+            <a:noFill/>
+          </a:ln>
+        </p:spPr>
+        <p:style>
+          <a:lnRef idx="1">
+            <a:schemeClr val="accent1"/>
+          </a:lnRef>
+          <a:fillRef idx="3">
+            <a:schemeClr val="accent1"/>
+          </a:fillRef>
+          <a:effectRef idx="2">
+            <a:schemeClr val="accent1"/>
+          </a:effectRef>
+          <a:fontRef idx="minor">
+            <a:schemeClr val="lt1"/>
+          </a:fontRef>
+        </p:style>
+        <p:txBody>
+          <a:bodyPr rtlCol="0" anchor="ctr"/>
+          <a:lstStyle/>
+          <a:p>
+            <a:pPr algn="ctr"/>
+          </a:p>
+        </p:txBody>
+      </p:sp>
+      <p:sp>
+        <p:nvSpPr>
+          <p:cNvPr id="4" name="TextBox 3"/>
+          <p:cNvSpPr txBox="1"/>
+          <p:nvPr/>
+        </p:nvSpPr>
+        <p:spPr>
+          <a:xfrm>
+            <a:off x="640080" y="1371600"/>
+            <a:ext cx="10881360" cy="5029200"/>
+          </a:xfrm>
+          <a:prstGeom prst="rect">
+            <a:avLst/>
+          </a:prstGeom>
+          <a:noFill/>
+        </p:spPr>
+        <p:txBody>
+          <a:bodyPr wrap="square">
+            <a:spAutoFit/>
+          </a:bodyPr>
+          <a:lstStyle/>
+          <a:p>
+            <a:pPr>
+              <a:spcAft>
+                <a:spcPts val="400"/>
+              </a:spcAft>
+              <a:defRPr sz="1500">
+                <a:solidFill>
+                  <a:srgbClr val="1A1A1A"/>
+                </a:solidFill>
+              </a:defRPr>
+            </a:pPr>
+            <a:r>
+              <a:t>• Completed Exercise 15 (Merchant Portal Table)</a:t>
+            </a:r>
+          </a:p>
+        </p:txBody>
+      </p:sp>
+    </p:spTree>
+  </p:cSld>
+  <p:clrMapOvr>
+    <a:masterClrMapping/>
+  </p:clrMapOvr>
+</p:sld>
+</file>
+
+<file path=ppt/slides/slide224.xml><?xml version="1.0" encoding="utf-8"?>
+<p:sld xmlns:a="http://schemas.openxmlformats.org/drawingml/2006/main" xmlns:p="http://schemas.openxmlformats.org/presentationml/2006/main" xmlns:r="http://schemas.openxmlformats.org/officeDocument/2006/relationships">
+  <p:cSld>
+    <p:spTree>
+      <p:nvGrpSpPr>
+        <p:cNvPr id="1" name=""/>
+        <p:cNvGrpSpPr/>
+        <p:nvPr/>
+      </p:nvGrpSpPr>
+      <p:grpSpPr/>
+      <p:sp>
+        <p:nvSpPr>
+          <p:cNvPr id="2" name="TextBox 1"/>
+          <p:cNvSpPr txBox="1"/>
+          <p:nvPr/>
+        </p:nvSpPr>
+        <p:spPr>
+          <a:xfrm>
+            <a:off x="640080" y="365760"/>
+            <a:ext cx="10881360" cy="731520"/>
+          </a:xfrm>
+          <a:prstGeom prst="rect">
+            <a:avLst/>
+          </a:prstGeom>
+          <a:noFill/>
+        </p:spPr>
+        <p:txBody>
+          <a:bodyPr wrap="square">
+            <a:spAutoFit/>
+          </a:bodyPr>
+          <a:lstStyle/>
+          <a:p>
+            <a:pPr>
+              <a:defRPr sz="2800" b="1">
+                <a:solidFill>
+                  <a:srgbClr val="00A89B"/>
+                </a:solidFill>
+              </a:defRPr>
+            </a:pPr>
+            <a:r>
+              <a:t>Loading the Exercise</a:t>
+            </a:r>
+          </a:p>
+        </p:txBody>
+      </p:sp>
+      <p:sp>
+        <p:nvSpPr>
+          <p:cNvPr id="3" name="Rectangle 2"/>
+          <p:cNvSpPr/>
+          <p:nvPr/>
+        </p:nvSpPr>
+        <p:spPr>
+          <a:xfrm>
+            <a:off x="640080" y="1051560"/>
+            <a:ext cx="1828800" cy="25400"/>
+          </a:xfrm>
+          <a:prstGeom prst="rect">
+            <a:avLst/>
+          </a:prstGeom>
+          <a:solidFill>
+            <a:srgbClr val="00A89B"/>
+          </a:solidFill>
+          <a:ln>
+            <a:noFill/>
+          </a:ln>
+        </p:spPr>
+        <p:style>
+          <a:lnRef idx="1">
+            <a:schemeClr val="accent1"/>
+          </a:lnRef>
+          <a:fillRef idx="3">
+            <a:schemeClr val="accent1"/>
+          </a:fillRef>
+          <a:effectRef idx="2">
+            <a:schemeClr val="accent1"/>
+          </a:effectRef>
+          <a:fontRef idx="minor">
+            <a:schemeClr val="lt1"/>
+          </a:fontRef>
+        </p:style>
+        <p:txBody>
+          <a:bodyPr rtlCol="0" anchor="ctr"/>
+          <a:lstStyle/>
+          <a:p>
+            <a:pPr algn="ctr"/>
+          </a:p>
+        </p:txBody>
+      </p:sp>
+      <p:sp>
+        <p:nvSpPr>
+          <p:cNvPr id="4" name="TextBox 3"/>
+          <p:cNvSpPr txBox="1"/>
+          <p:nvPr/>
+        </p:nvSpPr>
+        <p:spPr>
+          <a:xfrm>
+            <a:off x="640080" y="1371600"/>
+            <a:ext cx="10881360" cy="5029200"/>
+          </a:xfrm>
+          <a:prstGeom prst="rect">
+            <a:avLst/>
+          </a:prstGeom>
+          <a:noFill/>
+        </p:spPr>
+        <p:txBody>
+          <a:bodyPr wrap="square">
+            <a:spAutoFit/>
+          </a:bodyPr>
+          <a:lstStyle/>
+          <a:p>
+            <a:pPr>
+              <a:spcBef>
+                <a:spcPts val="0"/>
+              </a:spcBef>
+              <a:spcAft>
+                <a:spcPts val="0"/>
+              </a:spcAft>
+            </a:pPr>
+            <a:r>
+              <a:rPr sz="900">
+                <a:solidFill>
+                  <a:srgbClr val="2D2D2D"/>
+                </a:solidFill>
+                <a:latin typeface="Consolas"/>
+              </a:rPr>
+              <a:t>./exercises/load.sh</a:t>
+            </a:r>
+            <a:r>
+              <a:rPr sz="900">
+                <a:solidFill>
+                  <a:srgbClr val="2D2D2D"/>
+                </a:solidFill>
+                <a:latin typeface="Consolas"/>
+              </a:rPr>
+              <a:t> supplier intermediate/merchant-portal-form/skeleton</a:t>
+            </a:r>
+          </a:p>
+          <a:p>
+            <a:pPr>
+              <a:spcBef>
+                <a:spcPts val="0"/>
+              </a:spcBef>
+              <a:spcAft>
+                <a:spcPts val="0"/>
+              </a:spcAft>
+            </a:pPr>
+            <a:r>
+              <a:rPr sz="900">
+                <a:solidFill>
+                  <a:srgbClr val="2D2D2D"/>
+                </a:solidFill>
+                <a:latin typeface="Consolas"/>
+              </a:rPr>
+              <a:t>docker/sdk</a:t>
+            </a:r>
+            <a:r>
+              <a:rPr sz="900">
+                <a:solidFill>
+                  <a:srgbClr val="2D2D2D"/>
+                </a:solidFill>
+                <a:latin typeface="Consolas"/>
+              </a:rPr>
+              <a:t> cli composer dump-autoload</a:t>
+            </a:r>
+          </a:p>
+          <a:p>
+            <a:pPr>
+              <a:spcBef>
+                <a:spcPts val="0"/>
+              </a:spcBef>
+              <a:spcAft>
+                <a:spcPts val="0"/>
+              </a:spcAft>
+            </a:pPr>
+            <a:r>
+              <a:rPr sz="900">
+                <a:solidFill>
+                  <a:srgbClr val="2D2D2D"/>
+                </a:solidFill>
+                <a:latin typeface="Consolas"/>
+              </a:rPr>
+              <a:t>docker/sdk</a:t>
+            </a:r>
+            <a:r>
+              <a:rPr sz="900">
+                <a:solidFill>
+                  <a:srgbClr val="2D2D2D"/>
+                </a:solidFill>
+                <a:latin typeface="Consolas"/>
+              </a:rPr>
+              <a:t> console transfer:generate</a:t>
+            </a:r>
+          </a:p>
+          <a:p>
+            <a:pPr>
+              <a:spcBef>
+                <a:spcPts val="0"/>
+              </a:spcBef>
+              <a:spcAft>
+                <a:spcPts val="0"/>
+              </a:spcAft>
+            </a:pPr>
+            <a:r>
+              <a:rPr sz="900">
+                <a:solidFill>
+                  <a:srgbClr val="2D2D2D"/>
+                </a:solidFill>
+                <a:latin typeface="Consolas"/>
+              </a:rPr>
+              <a:t>docker/sdk</a:t>
+            </a:r>
+            <a:r>
+              <a:rPr sz="900">
+                <a:solidFill>
+                  <a:srgbClr val="2D2D2D"/>
+                </a:solidFill>
+                <a:latin typeface="Consolas"/>
+              </a:rPr>
+              <a:t> console cache:empty-all</a:t>
+            </a:r>
+          </a:p>
+        </p:txBody>
+      </p:sp>
+    </p:spTree>
+  </p:cSld>
+  <p:clrMapOvr>
+    <a:masterClrMapping/>
+  </p:clrMapOvr>
+</p:sld>
+</file>
+
+<file path=ppt/slides/slide225.xml><?xml version="1.0" encoding="utf-8"?>
+<p:sld xmlns:a="http://schemas.openxmlformats.org/drawingml/2006/main" xmlns:p="http://schemas.openxmlformats.org/presentationml/2006/main" xmlns:r="http://schemas.openxmlformats.org/officeDocument/2006/relationships">
+  <p:cSld>
+    <p:spTree>
+      <p:nvGrpSpPr>
+        <p:cNvPr id="1" name=""/>
+        <p:cNvGrpSpPr/>
+        <p:nvPr/>
+      </p:nvGrpSpPr>
+      <p:grpSpPr/>
+      <p:sp>
+        <p:nvSpPr>
+          <p:cNvPr id="2" name="TextBox 1"/>
+          <p:cNvSpPr txBox="1"/>
+          <p:nvPr/>
+        </p:nvSpPr>
+        <p:spPr>
+          <a:xfrm>
+            <a:off x="640080" y="365760"/>
+            <a:ext cx="10881360" cy="731520"/>
+          </a:xfrm>
+          <a:prstGeom prst="rect">
+            <a:avLst/>
+          </a:prstGeom>
+          <a:noFill/>
+        </p:spPr>
+        <p:txBody>
+          <a:bodyPr wrap="square">
+            <a:spAutoFit/>
+          </a:bodyPr>
+          <a:lstStyle/>
+          <a:p>
+            <a:pPr>
+              <a:defRPr sz="2800" b="1">
+                <a:solidFill>
+                  <a:srgbClr val="00A89B"/>
+                </a:solidFill>
+              </a:defRPr>
+            </a:pPr>
+            <a:r>
+              <a:t>Background: Merchant Portal Form Pattern</a:t>
+            </a:r>
+          </a:p>
+        </p:txBody>
+      </p:sp>
+      <p:sp>
+        <p:nvSpPr>
+          <p:cNvPr id="3" name="Rectangle 2"/>
+          <p:cNvSpPr/>
+          <p:nvPr/>
+        </p:nvSpPr>
+        <p:spPr>
+          <a:xfrm>
+            <a:off x="640080" y="1051560"/>
+            <a:ext cx="1828800" cy="25400"/>
+          </a:xfrm>
+          <a:prstGeom prst="rect">
+            <a:avLst/>
+          </a:prstGeom>
+          <a:solidFill>
+            <a:srgbClr val="00A89B"/>
+          </a:solidFill>
+          <a:ln>
+            <a:noFill/>
+          </a:ln>
+        </p:spPr>
+        <p:style>
+          <a:lnRef idx="1">
+            <a:schemeClr val="accent1"/>
+          </a:lnRef>
+          <a:fillRef idx="3">
+            <a:schemeClr val="accent1"/>
+          </a:fillRef>
+          <a:effectRef idx="2">
+            <a:schemeClr val="accent1"/>
+          </a:effectRef>
+          <a:fontRef idx="minor">
+            <a:schemeClr val="lt1"/>
+          </a:fontRef>
+        </p:style>
+        <p:txBody>
+          <a:bodyPr rtlCol="0" anchor="ctr"/>
+          <a:lstStyle/>
+          <a:p>
+            <a:pPr algn="ctr"/>
+          </a:p>
+        </p:txBody>
+      </p:sp>
+      <p:sp>
+        <p:nvSpPr>
+          <p:cNvPr id="4" name="TextBox 3"/>
+          <p:cNvSpPr txBox="1"/>
+          <p:nvPr/>
+        </p:nvSpPr>
+        <p:spPr>
+          <a:xfrm>
+            <a:off x="640080" y="1371600"/>
+            <a:ext cx="10881360" cy="5029200"/>
+          </a:xfrm>
+          <a:prstGeom prst="rect">
+            <a:avLst/>
+          </a:prstGeom>
+          <a:noFill/>
+        </p:spPr>
+        <p:txBody>
+          <a:bodyPr wrap="square">
+            <a:spAutoFit/>
+          </a:bodyPr>
+          <a:lstStyle/>
+          <a:p>
+            <a:pPr>
+              <a:spcAft>
+                <a:spcPts val="800"/>
+              </a:spcAft>
+              <a:defRPr sz="1600">
+                <a:solidFill>
+                  <a:srgbClr val="1A1A1A"/>
+                </a:solidFill>
+              </a:defRPr>
+            </a:pPr>
+            <a:r>
+              <a:t>Unlike the Back Office (which uses full page reloads), the Merchant Portal uses drawer forms that open as side panels over the table:</a:t>
+            </a:r>
+          </a:p>
+          <a:p>
+            <a:pPr>
+              <a:spcBef>
+                <a:spcPts val="0"/>
+              </a:spcBef>
+              <a:spcAft>
+                <a:spcPts val="0"/>
+              </a:spcAft>
+            </a:pPr>
+            <a:r>
+              <a:rPr sz="900">
+                <a:solidFill>
+                  <a:srgbClr val="2D2D2D"/>
+                </a:solidFill>
+                <a:latin typeface="Consolas"/>
+              </a:rPr>
+              <a:t>Table row action "Edit" clicked</a:t>
+            </a:r>
+          </a:p>
+          <a:p>
+            <a:pPr>
+              <a:spcBef>
+                <a:spcPts val="0"/>
+              </a:spcBef>
+              <a:spcAft>
+                <a:spcPts val="0"/>
+              </a:spcAft>
+            </a:pPr>
+            <a:r>
+              <a:rPr sz="900">
+                <a:solidFill>
+                  <a:srgbClr val="2D2D2D"/>
+                </a:solidFill>
+                <a:latin typeface="Consolas"/>
+              </a:rPr>
+              <a:t>    → AJAX GET /supplier-merchant-portal-gui/update-supplier?id-supplier=5</a:t>
+            </a:r>
+          </a:p>
+          <a:p>
+            <a:pPr>
+              <a:spcBef>
+                <a:spcPts val="0"/>
+              </a:spcBef>
+              <a:spcAft>
+                <a:spcPts val="0"/>
+              </a:spcAft>
+            </a:pPr>
+            <a:r>
+              <a:rPr sz="900">
+                <a:solidFill>
+                  <a:srgbClr val="2D2D2D"/>
+                </a:solidFill>
+                <a:latin typeface="Consolas"/>
+              </a:rPr>
+              <a:t>    → Controller renders form HTML as JsonResponse</a:t>
+            </a:r>
+          </a:p>
+          <a:p>
+            <a:pPr>
+              <a:spcBef>
+                <a:spcPts val="0"/>
+              </a:spcBef>
+              <a:spcAft>
+                <a:spcPts val="0"/>
+              </a:spcAft>
+            </a:pPr>
+            <a:r>
+              <a:rPr sz="900">
+                <a:solidFill>
+                  <a:srgbClr val="2D2D2D"/>
+                </a:solidFill>
+                <a:latin typeface="Consolas"/>
+              </a:rPr>
+              <a:t>    → Angular opens drawer with the HTML content</a:t>
+            </a:r>
+          </a:p>
+          <a:p>
+            <a:pPr>
+              <a:spcBef>
+                <a:spcPts val="0"/>
+              </a:spcBef>
+              <a:spcAft>
+                <a:spcPts val="0"/>
+              </a:spcAft>
+            </a:pPr>
+            <a:r>
+              <a:rPr sz="900">
+                <a:latin typeface="Consolas"/>
+              </a:rPr>
+              <a:t> </a:t>
+            </a:r>
+          </a:p>
+          <a:p>
+            <a:pPr>
+              <a:spcBef>
+                <a:spcPts val="0"/>
+              </a:spcBef>
+              <a:spcAft>
+                <a:spcPts val="0"/>
+              </a:spcAft>
+            </a:pPr>
+            <a:r>
+              <a:rPr sz="900">
+                <a:solidFill>
+                  <a:srgbClr val="2D2D2D"/>
+                </a:solidFill>
+                <a:latin typeface="Consolas"/>
+              </a:rPr>
+              <a:t>Form submitted</a:t>
+            </a:r>
+          </a:p>
+          <a:p>
+            <a:pPr>
+              <a:spcBef>
+                <a:spcPts val="0"/>
+              </a:spcBef>
+              <a:spcAft>
+                <a:spcPts val="0"/>
+              </a:spcAft>
+            </a:pPr>
+            <a:r>
+              <a:rPr sz="900">
+                <a:solidFill>
+                  <a:srgbClr val="2D2D2D"/>
+                </a:solidFill>
+                <a:latin typeface="Consolas"/>
+              </a:rPr>
+              <a:t>    → AJAX POST to same URL</a:t>
+            </a:r>
+          </a:p>
+          <a:p>
+            <a:pPr>
+              <a:spcBef>
+                <a:spcPts val="0"/>
+              </a:spcBef>
+              <a:spcAft>
+                <a:spcPts val="0"/>
+              </a:spcAft>
+            </a:pPr>
+            <a:r>
+              <a:rPr sz="900">
+                <a:solidFill>
+                  <a:srgbClr val="2D2D2D"/>
+                </a:solidFill>
+                <a:latin typeface="Consolas"/>
+              </a:rPr>
+              <a:t>    → Controller validates form</a:t>
+            </a:r>
+          </a:p>
+          <a:p>
+            <a:pPr>
+              <a:spcBef>
+                <a:spcPts val="0"/>
+              </a:spcBef>
+              <a:spcAft>
+                <a:spcPts val="0"/>
+              </a:spcAft>
+            </a:pPr>
+            <a:r>
+              <a:rPr sz="900">
+                <a:solidFill>
+                  <a:srgbClr val="2D2D2D"/>
+                </a:solidFill>
+                <a:latin typeface="Consolas"/>
+              </a:rPr>
+              <a:t>    → If valid: returns ZedUiFormResponse with actions</a:t>
+            </a:r>
+          </a:p>
+          <a:p>
+            <a:pPr>
+              <a:spcBef>
+                <a:spcPts val="0"/>
+              </a:spcBef>
+              <a:spcAft>
+                <a:spcPts val="0"/>
+              </a:spcAft>
+            </a:pPr>
+            <a:r>
+              <a:rPr sz="900">
+                <a:solidFill>
+                  <a:srgbClr val="2D2D2D"/>
+                </a:solidFill>
+                <a:latin typeface="Consolas"/>
+              </a:rPr>
+              <a:t>        → addSuccessNotification("Supplier updated")</a:t>
+            </a:r>
+          </a:p>
+          <a:p>
+            <a:pPr>
+              <a:spcBef>
+                <a:spcPts val="0"/>
+              </a:spcBef>
+              <a:spcAft>
+                <a:spcPts val="0"/>
+              </a:spcAft>
+            </a:pPr>
+            <a:r>
+              <a:rPr sz="900">
+                <a:solidFill>
+                  <a:srgbClr val="2D2D2D"/>
+                </a:solidFill>
+                <a:latin typeface="Consolas"/>
+              </a:rPr>
+              <a:t>        → addActionCloseDrawer()</a:t>
+            </a:r>
+          </a:p>
+          <a:p>
+            <a:pPr>
+              <a:spcBef>
+                <a:spcPts val="0"/>
+              </a:spcBef>
+              <a:spcAft>
+                <a:spcPts val="0"/>
+              </a:spcAft>
+            </a:pPr>
+            <a:r>
+              <a:rPr sz="900">
+                <a:solidFill>
+                  <a:srgbClr val="2D2D2D"/>
+                </a:solidFill>
+                <a:latin typeface="Consolas"/>
+              </a:rPr>
+              <a:t>        → addActionRefreshTable()</a:t>
+            </a:r>
+          </a:p>
+          <a:p>
+            <a:pPr>
+              <a:spcBef>
+                <a:spcPts val="0"/>
+              </a:spcBef>
+              <a:spcAft>
+                <a:spcPts val="0"/>
+              </a:spcAft>
+            </a:pPr>
+            <a:r>
+              <a:rPr sz="900">
+                <a:solidFill>
+                  <a:srgbClr val="2D2D2D"/>
+                </a:solidFill>
+                <a:latin typeface="Consolas"/>
+              </a:rPr>
+              <a:t>    → Angular executes actions: closes drawer, refreshes table, shows toast</a:t>
+            </a:r>
+          </a:p>
+          <a:p>
+            <a:pPr>
+              <a:spcBef>
+                <a:spcPts val="0"/>
+              </a:spcBef>
+              <a:spcAft>
+                <a:spcPts val="0"/>
+              </a:spcAft>
+            </a:pPr>
+            <a:r>
+              <a:rPr sz="900">
+                <a:solidFill>
+                  <a:srgbClr val="2D2D2D"/>
+                </a:solidFill>
+                <a:latin typeface="Consolas"/>
+              </a:rPr>
+              <a:t>    → If invalid: returns re-rendered form HTML with errors</a:t>
+            </a:r>
+          </a:p>
+        </p:txBody>
+      </p:sp>
+    </p:spTree>
+  </p:cSld>
+  <p:clrMapOvr>
+    <a:masterClrMapping/>
+  </p:clrMapOvr>
+</p:sld>
+</file>
+
+<file path=ppt/slides/slide226.xml><?xml version="1.0" encoding="utf-8"?>
+<p:sld xmlns:a="http://schemas.openxmlformats.org/drawingml/2006/main" xmlns:p="http://schemas.openxmlformats.org/presentationml/2006/main" xmlns:r="http://schemas.openxmlformats.org/officeDocument/2006/relationships">
+  <p:cSld>
+    <p:spTree>
+      <p:nvGrpSpPr>
+        <p:cNvPr id="1" name=""/>
+        <p:cNvGrpSpPr/>
+        <p:nvPr/>
+      </p:nvGrpSpPr>
+      <p:grpSpPr/>
+      <p:sp>
+        <p:nvSpPr>
+          <p:cNvPr id="2" name="TextBox 1"/>
+          <p:cNvSpPr txBox="1"/>
+          <p:nvPr/>
+        </p:nvSpPr>
+        <p:spPr>
+          <a:xfrm>
+            <a:off x="640080" y="365760"/>
+            <a:ext cx="10881360" cy="731520"/>
+          </a:xfrm>
+          <a:prstGeom prst="rect">
+            <a:avLst/>
+          </a:prstGeom>
+          <a:noFill/>
+        </p:spPr>
+        <p:txBody>
+          <a:bodyPr wrap="square">
+            <a:spAutoFit/>
+          </a:bodyPr>
+          <a:lstStyle/>
+          <a:p>
+            <a:pPr>
+              <a:defRPr sz="2800" b="1">
+                <a:solidFill>
+                  <a:srgbClr val="00A89B"/>
+                </a:solidFill>
+              </a:defRPr>
+            </a:pPr>
+            <a:r>
+              <a:t>Background: Merchant Portal Form Pattern (cont.)</a:t>
+            </a:r>
+          </a:p>
+        </p:txBody>
+      </p:sp>
+      <p:sp>
+        <p:nvSpPr>
+          <p:cNvPr id="3" name="Rectangle 2"/>
+          <p:cNvSpPr/>
+          <p:nvPr/>
+        </p:nvSpPr>
+        <p:spPr>
+          <a:xfrm>
+            <a:off x="640080" y="1051560"/>
+            <a:ext cx="1828800" cy="25400"/>
+          </a:xfrm>
+          <a:prstGeom prst="rect">
+            <a:avLst/>
+          </a:prstGeom>
+          <a:solidFill>
+            <a:srgbClr val="00A89B"/>
+          </a:solidFill>
+          <a:ln>
+            <a:noFill/>
+          </a:ln>
+        </p:spPr>
+        <p:style>
+          <a:lnRef idx="1">
+            <a:schemeClr val="accent1"/>
+          </a:lnRef>
+          <a:fillRef idx="3">
+            <a:schemeClr val="accent1"/>
+          </a:fillRef>
+          <a:effectRef idx="2">
+            <a:schemeClr val="accent1"/>
+          </a:effectRef>
+          <a:fontRef idx="minor">
+            <a:schemeClr val="lt1"/>
+          </a:fontRef>
+        </p:style>
+        <p:txBody>
+          <a:bodyPr rtlCol="0" anchor="ctr"/>
+          <a:lstStyle/>
+          <a:p>
+            <a:pPr algn="ctr"/>
+          </a:p>
+        </p:txBody>
+      </p:sp>
+      <p:sp>
+        <p:nvSpPr>
+          <p:cNvPr id="4" name="TextBox 3"/>
+          <p:cNvSpPr txBox="1"/>
+          <p:nvPr/>
+        </p:nvSpPr>
+        <p:spPr>
+          <a:xfrm>
+            <a:off x="640080" y="1371600"/>
+            <a:ext cx="10881360" cy="5029200"/>
+          </a:xfrm>
+          <a:prstGeom prst="rect">
+            <a:avLst/>
+          </a:prstGeom>
+          <a:noFill/>
+        </p:spPr>
+        <p:txBody>
+          <a:bodyPr wrap="square">
+            <a:spAutoFit/>
+          </a:bodyPr>
+          <a:lstStyle/>
+          <a:p>
+            <a:pPr>
+              <a:spcAft>
+                <a:spcPts val="800"/>
+              </a:spcAft>
+              <a:defRPr sz="1600">
+                <a:solidFill>
+                  <a:srgbClr val="1A1A1A"/>
+                </a:solidFill>
+              </a:defRPr>
+            </a:pPr>
+            <a:r>
+              <a:t>Key difference from Back Office: Controllers return JsonResponse (not viewResponse ), and the response contains either rendered HTML (for the form) or a ZedUI action payload (after successful submit).</a:t>
+            </a:r>
+          </a:p>
+        </p:txBody>
+      </p:sp>
+    </p:spTree>
+  </p:cSld>
+  <p:clrMapOvr>
+    <a:masterClrMapping/>
+  </p:clrMapOvr>
+</p:sld>
+</file>
+
+<file path=ppt/slides/slide227.xml><?xml version="1.0" encoding="utf-8"?>
+<p:sld xmlns:a="http://schemas.openxmlformats.org/drawingml/2006/main" xmlns:p="http://schemas.openxmlformats.org/presentationml/2006/main" xmlns:r="http://schemas.openxmlformats.org/officeDocument/2006/relationships">
+  <p:cSld>
+    <p:spTree>
+      <p:nvGrpSpPr>
+        <p:cNvPr id="1" name=""/>
+        <p:cNvGrpSpPr/>
+        <p:nvPr/>
+      </p:nvGrpSpPr>
+      <p:grpSpPr/>
+      <p:sp>
+        <p:nvSpPr>
+          <p:cNvPr id="2" name="TextBox 1"/>
+          <p:cNvSpPr txBox="1"/>
+          <p:nvPr/>
+        </p:nvSpPr>
+        <p:spPr>
+          <a:xfrm>
+            <a:off x="640080" y="365760"/>
+            <a:ext cx="10881360" cy="731520"/>
+          </a:xfrm>
+          <a:prstGeom prst="rect">
+            <a:avLst/>
+          </a:prstGeom>
+          <a:noFill/>
+        </p:spPr>
+        <p:txBody>
+          <a:bodyPr wrap="square">
+            <a:spAutoFit/>
+          </a:bodyPr>
+          <a:lstStyle/>
+          <a:p>
+            <a:pPr>
+              <a:defRPr sz="2800" b="1">
+                <a:solidFill>
+                  <a:srgbClr val="00A89B"/>
+                </a:solidFill>
+              </a:defRPr>
+            </a:pPr>
+            <a:r>
+              <a:t>Working on the Exercise</a:t>
+            </a:r>
+          </a:p>
+        </p:txBody>
+      </p:sp>
+      <p:sp>
+        <p:nvSpPr>
+          <p:cNvPr id="3" name="Rectangle 2"/>
+          <p:cNvSpPr/>
+          <p:nvPr/>
+        </p:nvSpPr>
+        <p:spPr>
+          <a:xfrm>
+            <a:off x="640080" y="1051560"/>
+            <a:ext cx="1828800" cy="25400"/>
+          </a:xfrm>
+          <a:prstGeom prst="rect">
+            <a:avLst/>
+          </a:prstGeom>
+          <a:solidFill>
+            <a:srgbClr val="00A89B"/>
+          </a:solidFill>
+          <a:ln>
+            <a:noFill/>
+          </a:ln>
+        </p:spPr>
+        <p:style>
+          <a:lnRef idx="1">
+            <a:schemeClr val="accent1"/>
+          </a:lnRef>
+          <a:fillRef idx="3">
+            <a:schemeClr val="accent1"/>
+          </a:fillRef>
+          <a:effectRef idx="2">
+            <a:schemeClr val="accent1"/>
+          </a:effectRef>
+          <a:fontRef idx="minor">
+            <a:schemeClr val="lt1"/>
+          </a:fontRef>
+        </p:style>
+        <p:txBody>
+          <a:bodyPr rtlCol="0" anchor="ctr"/>
+          <a:lstStyle/>
+          <a:p>
+            <a:pPr algn="ctr"/>
+          </a:p>
+        </p:txBody>
+      </p:sp>
+      <p:sp>
+        <p:nvSpPr>
+          <p:cNvPr id="4" name="TextBox 3"/>
+          <p:cNvSpPr txBox="1"/>
+          <p:nvPr/>
+        </p:nvSpPr>
+        <p:spPr>
+          <a:xfrm>
+            <a:off x="640080" y="1371600"/>
+            <a:ext cx="10881360" cy="5029200"/>
+          </a:xfrm>
+          <a:prstGeom prst="rect">
+            <a:avLst/>
+          </a:prstGeom>
+          <a:noFill/>
+        </p:spPr>
+        <p:txBody>
+          <a:bodyPr wrap="square">
+            <a:spAutoFit/>
+          </a:bodyPr>
+          <a:lstStyle/>
+          <a:p>
+            <a:pPr>
+              <a:spcBef>
+                <a:spcPts val="1200"/>
+              </a:spcBef>
+              <a:spcAft>
+                <a:spcPts val="600"/>
+              </a:spcAft>
+              <a:defRPr sz="2000" b="1">
+                <a:solidFill>
+                  <a:srgbClr val="1A1A1A"/>
+                </a:solidFill>
+              </a:defRPr>
+            </a:pPr>
+            <a:r>
+              <a:t>Part 1: Supplier Form</a:t>
+            </a:r>
+          </a:p>
+          <a:p>
+            <a:pPr>
+              <a:spcAft>
+                <a:spcPts val="800"/>
+              </a:spcAft>
+              <a:defRPr sz="1600">
+                <a:solidFill>
+                  <a:srgbClr val="1A1A1A"/>
+                </a:solidFill>
+              </a:defRPr>
+            </a:pPr>
+            <a:r>
+              <a:t>Coding time:</a:t>
+            </a:r>
+          </a:p>
+          <a:p>
+            <a:pPr>
+              <a:spcAft>
+                <a:spcPts val="800"/>
+              </a:spcAft>
+              <a:defRPr sz="1600">
+                <a:solidFill>
+                  <a:srgbClr val="1A1A1A"/>
+                </a:solidFill>
+              </a:defRPr>
+            </a:pPr>
+            <a:r>
+              <a:t>Open src/SprykerAcademy/Zed/SupplierMerchantPortalGui/Communication/Form/SupplierForm.php :</a:t>
+            </a:r>
+          </a:p>
+          <a:p>
+            <a:pPr>
+              <a:spcAft>
+                <a:spcPts val="800"/>
+              </a:spcAft>
+              <a:defRPr sz="1600">
+                <a:solidFill>
+                  <a:srgbClr val="1A1A1A"/>
+                </a:solidFill>
+              </a:defRPr>
+            </a:pPr>
+            <a:r>
+              <a:t>In buildForm() , add these fields:</a:t>
+            </a:r>
+          </a:p>
+          <a:p>
+            <a:pPr>
+              <a:spcAft>
+                <a:spcPts val="100"/>
+              </a:spcAft>
+              <a:defRPr sz="1000">
+                <a:solidFill>
+                  <a:srgbClr val="1A1A1A"/>
+                </a:solidFill>
+                <a:latin typeface="Consolas"/>
+              </a:defRPr>
+            </a:pPr>
+            <a:r>
+              <a:t>Field        Type          Options                               </a:t>
+            </a:r>
+          </a:p>
+          <a:p>
+            <a:pPr>
+              <a:spcAft>
+                <a:spcPts val="100"/>
+              </a:spcAft>
+              <a:defRPr sz="1000">
+                <a:solidFill>
+                  <a:srgbClr val="1A1A1A"/>
+                </a:solidFill>
+                <a:latin typeface="Consolas"/>
+              </a:defRPr>
+            </a:pPr>
+            <a:r>
+              <a:t>-----------  ------------  --------------------------------------</a:t>
+            </a:r>
+          </a:p>
+          <a:p>
+            <a:pPr>
+              <a:spcAft>
+                <a:spcPts val="100"/>
+              </a:spcAft>
+              <a:defRPr sz="1000">
+                <a:solidFill>
+                  <a:srgbClr val="1A1A1A"/>
+                </a:solidFill>
+                <a:latin typeface="Consolas"/>
+              </a:defRPr>
+            </a:pPr>
+            <a:r>
+              <a:t>name         TextType      required, NotBlank constraint         </a:t>
+            </a:r>
+          </a:p>
+          <a:p>
+            <a:pPr>
+              <a:spcAft>
+                <a:spcPts val="100"/>
+              </a:spcAft>
+              <a:defRPr sz="1000">
+                <a:solidFill>
+                  <a:srgbClr val="1A1A1A"/>
+                </a:solidFill>
+                <a:latin typeface="Consolas"/>
+              </a:defRPr>
+            </a:pPr>
+            <a:r>
+              <a:t>description  TextareaType  optional                              </a:t>
+            </a:r>
+          </a:p>
+          <a:p>
+            <a:pPr>
+              <a:spcAft>
+                <a:spcPts val="100"/>
+              </a:spcAft>
+              <a:defRPr sz="1000">
+                <a:solidFill>
+                  <a:srgbClr val="1A1A1A"/>
+                </a:solidFill>
+                <a:latin typeface="Consolas"/>
+              </a:defRPr>
+            </a:pPr>
+            <a:r>
+              <a:t>email        EmailType     required, NotBlank constraint         </a:t>
+            </a:r>
+          </a:p>
+          <a:p>
+            <a:pPr>
+              <a:spcAft>
+                <a:spcPts val="100"/>
+              </a:spcAft>
+              <a:defRPr sz="1000">
+                <a:solidFill>
+                  <a:srgbClr val="1A1A1A"/>
+                </a:solidFill>
+                <a:latin typeface="Consolas"/>
+              </a:defRPr>
+            </a:pPr>
+            <a:r>
+              <a:t>phone        TextType      optional                              </a:t>
+            </a:r>
+          </a:p>
+          <a:p>
+            <a:pPr>
+              <a:spcAft>
+                <a:spcPts val="100"/>
+              </a:spcAft>
+              <a:defRPr sz="1000">
+                <a:solidFill>
+                  <a:srgbClr val="1A1A1A"/>
+                </a:solidFill>
+                <a:latin typeface="Consolas"/>
+              </a:defRPr>
+            </a:pPr>
+            <a:r>
+              <a:t>isActive     CheckboxType  property_path: 'status' , not required</a:t>
+            </a:r>
+          </a:p>
+        </p:txBody>
+      </p:sp>
+    </p:spTree>
+  </p:cSld>
+  <p:clrMapOvr>
+    <a:masterClrMapping/>
+  </p:clrMapOvr>
+</p:sld>
+</file>
+
+<file path=ppt/slides/slide228.xml><?xml version="1.0" encoding="utf-8"?>
+<p:sld xmlns:a="http://schemas.openxmlformats.org/drawingml/2006/main" xmlns:p="http://schemas.openxmlformats.org/presentationml/2006/main" xmlns:r="http://schemas.openxmlformats.org/officeDocument/2006/relationships">
+  <p:cSld>
+    <p:spTree>
+      <p:nvGrpSpPr>
+        <p:cNvPr id="1" name=""/>
+        <p:cNvGrpSpPr/>
+        <p:nvPr/>
+      </p:nvGrpSpPr>
+      <p:grpSpPr/>
+      <p:sp>
+        <p:nvSpPr>
+          <p:cNvPr id="2" name="TextBox 1"/>
+          <p:cNvSpPr txBox="1"/>
+          <p:nvPr/>
+        </p:nvSpPr>
+        <p:spPr>
+          <a:xfrm>
+            <a:off x="640080" y="365760"/>
+            <a:ext cx="10881360" cy="731520"/>
+          </a:xfrm>
+          <a:prstGeom prst="rect">
+            <a:avLst/>
+          </a:prstGeom>
+          <a:noFill/>
+        </p:spPr>
+        <p:txBody>
+          <a:bodyPr wrap="square">
+            <a:spAutoFit/>
+          </a:bodyPr>
+          <a:lstStyle/>
+          <a:p>
+            <a:pPr>
+              <a:defRPr sz="2800" b="1">
+                <a:solidFill>
+                  <a:srgbClr val="00A89B"/>
+                </a:solidFill>
+              </a:defRPr>
+            </a:pPr>
+            <a:r>
+              <a:t>Working on the Exercise (cont.)</a:t>
+            </a:r>
+          </a:p>
+        </p:txBody>
+      </p:sp>
+      <p:sp>
+        <p:nvSpPr>
+          <p:cNvPr id="3" name="Rectangle 2"/>
+          <p:cNvSpPr/>
+          <p:nvPr/>
+        </p:nvSpPr>
+        <p:spPr>
+          <a:xfrm>
+            <a:off x="640080" y="1051560"/>
+            <a:ext cx="1828800" cy="25400"/>
+          </a:xfrm>
+          <a:prstGeom prst="rect">
+            <a:avLst/>
+          </a:prstGeom>
+          <a:solidFill>
+            <a:srgbClr val="00A89B"/>
+          </a:solidFill>
+          <a:ln>
+            <a:noFill/>
+          </a:ln>
+        </p:spPr>
+        <p:style>
+          <a:lnRef idx="1">
+            <a:schemeClr val="accent1"/>
+          </a:lnRef>
+          <a:fillRef idx="3">
+            <a:schemeClr val="accent1"/>
+          </a:fillRef>
+          <a:effectRef idx="2">
+            <a:schemeClr val="accent1"/>
+          </a:effectRef>
+          <a:fontRef idx="minor">
+            <a:schemeClr val="lt1"/>
+          </a:fontRef>
+        </p:style>
+        <p:txBody>
+          <a:bodyPr rtlCol="0" anchor="ctr"/>
+          <a:lstStyle/>
+          <a:p>
+            <a:pPr algn="ctr"/>
+          </a:p>
+        </p:txBody>
+      </p:sp>
+      <p:sp>
+        <p:nvSpPr>
+          <p:cNvPr id="4" name="TextBox 3"/>
+          <p:cNvSpPr txBox="1"/>
+          <p:nvPr/>
+        </p:nvSpPr>
+        <p:spPr>
+          <a:xfrm>
+            <a:off x="640080" y="1371600"/>
+            <a:ext cx="10881360" cy="5029200"/>
+          </a:xfrm>
+          <a:prstGeom prst="rect">
+            <a:avLst/>
+          </a:prstGeom>
+          <a:noFill/>
+        </p:spPr>
+        <p:txBody>
+          <a:bodyPr wrap="square">
+            <a:spAutoFit/>
+          </a:bodyPr>
+          <a:lstStyle/>
+          <a:p>
+            <a:pPr>
+              <a:spcAft>
+                <a:spcPts val="800"/>
+              </a:spcAft>
+              <a:defRPr sz="1400" i="1">
+                <a:solidFill>
+                  <a:srgbClr val="888888"/>
+                </a:solidFill>
+              </a:defRPr>
+            </a:pPr>
+            <a:r>
+              <a:t>❝ property_path : The isActive checkbox maps to the status field on SupplierTransfer via property_path . This lets the form display a friendly checkbox while the transfer uses an integer status.</a:t>
+            </a:r>
+          </a:p>
+          <a:p>
+            <a:pPr>
+              <a:spcAft>
+                <a:spcPts val="800"/>
+              </a:spcAft>
+              <a:defRPr sz="1400" i="1">
+                <a:solidFill>
+                  <a:srgbClr val="888888"/>
+                </a:solidFill>
+              </a:defRPr>
+            </a:pPr>
+            <a:r>
+              <a:t>❝ getBlockPrefix() : Returns 'supplierForm' — this determines the HTML form field name prefix (e.g., supplierForm[name] ).</a:t>
+            </a:r>
+          </a:p>
+        </p:txBody>
+      </p:sp>
+    </p:spTree>
+  </p:cSld>
+  <p:clrMapOvr>
+    <a:masterClrMapping/>
+  </p:clrMapOvr>
+</p:sld>
+</file>
+
+<file path=ppt/slides/slide229.xml><?xml version="1.0" encoding="utf-8"?>
+<p:sld xmlns:a="http://schemas.openxmlformats.org/drawingml/2006/main" xmlns:p="http://schemas.openxmlformats.org/presentationml/2006/main" xmlns:r="http://schemas.openxmlformats.org/officeDocument/2006/relationships">
+  <p:cSld>
+    <p:spTree>
+      <p:nvGrpSpPr>
+        <p:cNvPr id="1" name=""/>
+        <p:cNvGrpSpPr/>
+        <p:nvPr/>
+      </p:nvGrpSpPr>
+      <p:grpSpPr/>
+      <p:sp>
+        <p:nvSpPr>
+          <p:cNvPr id="2" name="TextBox 1"/>
+          <p:cNvSpPr txBox="1"/>
+          <p:nvPr/>
+        </p:nvSpPr>
+        <p:spPr>
+          <a:xfrm>
+            <a:off x="640080" y="365760"/>
+            <a:ext cx="10881360" cy="731520"/>
+          </a:xfrm>
+          <a:prstGeom prst="rect">
+            <a:avLst/>
+          </a:prstGeom>
+          <a:noFill/>
+        </p:spPr>
+        <p:txBody>
+          <a:bodyPr wrap="square">
+            <a:spAutoFit/>
+          </a:bodyPr>
+          <a:lstStyle/>
+          <a:p>
+            <a:pPr>
+              <a:defRPr sz="2800" b="1">
+                <a:solidFill>
+                  <a:srgbClr val="00A89B"/>
+                </a:solidFill>
+              </a:defRPr>
+            </a:pPr>
+            <a:r>
+              <a:t>Part 2: Create Supplier Controller</a:t>
+            </a:r>
+          </a:p>
+        </p:txBody>
+      </p:sp>
+      <p:sp>
+        <p:nvSpPr>
+          <p:cNvPr id="3" name="Rectangle 2"/>
+          <p:cNvSpPr/>
+          <p:nvPr/>
+        </p:nvSpPr>
+        <p:spPr>
+          <a:xfrm>
+            <a:off x="640080" y="1051560"/>
+            <a:ext cx="1828800" cy="25400"/>
+          </a:xfrm>
+          <a:prstGeom prst="rect">
+            <a:avLst/>
+          </a:prstGeom>
+          <a:solidFill>
+            <a:srgbClr val="00A89B"/>
+          </a:solidFill>
+          <a:ln>
+            <a:noFill/>
+          </a:ln>
+        </p:spPr>
+        <p:style>
+          <a:lnRef idx="1">
+            <a:schemeClr val="accent1"/>
+          </a:lnRef>
+          <a:fillRef idx="3">
+            <a:schemeClr val="accent1"/>
+          </a:fillRef>
+          <a:effectRef idx="2">
+            <a:schemeClr val="accent1"/>
+          </a:effectRef>
+          <a:fontRef idx="minor">
+            <a:schemeClr val="lt1"/>
+          </a:fontRef>
+        </p:style>
+        <p:txBody>
+          <a:bodyPr rtlCol="0" anchor="ctr"/>
+          <a:lstStyle/>
+          <a:p>
+            <a:pPr algn="ctr"/>
+          </a:p>
+        </p:txBody>
+      </p:sp>
+      <p:sp>
+        <p:nvSpPr>
+          <p:cNvPr id="4" name="TextBox 3"/>
+          <p:cNvSpPr txBox="1"/>
+          <p:nvPr/>
+        </p:nvSpPr>
+        <p:spPr>
+          <a:xfrm>
+            <a:off x="640080" y="1371600"/>
+            <a:ext cx="10881360" cy="5029200"/>
+          </a:xfrm>
+          <a:prstGeom prst="rect">
+            <a:avLst/>
+          </a:prstGeom>
+          <a:noFill/>
+        </p:spPr>
+        <p:txBody>
+          <a:bodyPr wrap="square">
+            <a:spAutoFit/>
+          </a:bodyPr>
+          <a:lstStyle/>
+          <a:p>
+            <a:pPr>
+              <a:spcAft>
+                <a:spcPts val="800"/>
+              </a:spcAft>
+              <a:defRPr sz="1600">
+                <a:solidFill>
+                  <a:srgbClr val="1A1A1A"/>
+                </a:solidFill>
+              </a:defRPr>
+            </a:pPr>
+            <a:r>
+              <a:t>Coding time:</a:t>
+            </a:r>
+          </a:p>
+          <a:p>
+            <a:pPr>
+              <a:spcAft>
+                <a:spcPts val="800"/>
+              </a:spcAft>
+              <a:defRPr sz="1600">
+                <a:solidFill>
+                  <a:srgbClr val="1A1A1A"/>
+                </a:solidFill>
+              </a:defRPr>
+            </a:pPr>
+            <a:r>
+              <a:t>Open src/SprykerAcademy/Zed/SupplierMerchantPortalGui/Communication/Controller/CreateSupplierController.php :</a:t>
+            </a:r>
+          </a:p>
+          <a:p>
+            <a:pPr>
+              <a:spcAft>
+                <a:spcPts val="800"/>
+              </a:spcAft>
+              <a:defRPr sz="1600">
+                <a:solidFill>
+                  <a:srgbClr val="1A1A1A"/>
+                </a:solidFill>
+              </a:defRPr>
+            </a:pPr>
+            <a:r>
+              <a:t>In indexAction() :</a:t>
+            </a:r>
+          </a:p>
+          <a:p>
+            <a:pPr>
+              <a:spcAft>
+                <a:spcPts val="400"/>
+              </a:spcAft>
+              <a:defRPr sz="1500">
+                <a:solidFill>
+                  <a:srgbClr val="1A1A1A"/>
+                </a:solidFill>
+              </a:defRPr>
+            </a:pPr>
+            <a:r>
+              <a:t>• Get form data provider, create empty SupplierTransfer</a:t>
+            </a:r>
+          </a:p>
+          <a:p>
+            <a:pPr>
+              <a:spcAft>
+                <a:spcPts val="400"/>
+              </a:spcAft>
+              <a:defRPr sz="1500">
+                <a:solidFill>
+                  <a:srgbClr val="1A1A1A"/>
+                </a:solidFill>
+              </a:defRPr>
+            </a:pPr>
+            <a:r>
+              <a:t>• Create the form via factory</a:t>
+            </a:r>
+          </a:p>
+          <a:p>
+            <a:pPr>
+              <a:spcAft>
+                <a:spcPts val="400"/>
+              </a:spcAft>
+              <a:defRPr sz="1500">
+                <a:solidFill>
+                  <a:srgbClr val="1A1A1A"/>
+                </a:solidFill>
+              </a:defRPr>
+            </a:pPr>
+            <a:r>
+              <a:t>• Handle the request: $form-&gt;handleRequest($request)</a:t>
+            </a:r>
+          </a:p>
+        </p:txBody>
+      </p:sp>
+    </p:spTree>
+  </p:cSld>
+  <p:clrMapOvr>
+    <a:masterClrMapping/>
+  </p:clrMapOvr>
+</p:sld>
+</file>
+
 <file path=ppt/slides/slide23.xml><?xml version="1.0" encoding="utf-8"?>
 <p:sld xmlns:a="http://schemas.openxmlformats.org/drawingml/2006/main" xmlns:p="http://schemas.openxmlformats.org/presentationml/2006/main" xmlns:r="http://schemas.openxmlformats.org/officeDocument/2006/relationships">
   <p:cSld>
@@ -32478,6 +37974,1797 @@
             </a:pPr>
             <a:r>
               <a:t>PublishAwareStep (Preview of Publish &amp; Synchronize)</a:t>
+            </a:r>
+          </a:p>
+        </p:txBody>
+      </p:sp>
+    </p:spTree>
+  </p:cSld>
+  <p:clrMapOvr>
+    <a:masterClrMapping/>
+  </p:clrMapOvr>
+</p:sld>
+</file>
+
+<file path=ppt/slides/slide230.xml><?xml version="1.0" encoding="utf-8"?>
+<p:sld xmlns:a="http://schemas.openxmlformats.org/drawingml/2006/main" xmlns:p="http://schemas.openxmlformats.org/presentationml/2006/main" xmlns:r="http://schemas.openxmlformats.org/officeDocument/2006/relationships">
+  <p:cSld>
+    <p:spTree>
+      <p:nvGrpSpPr>
+        <p:cNvPr id="1" name=""/>
+        <p:cNvGrpSpPr/>
+        <p:nvPr/>
+      </p:nvGrpSpPr>
+      <p:grpSpPr/>
+      <p:sp>
+        <p:nvSpPr>
+          <p:cNvPr id="2" name="TextBox 1"/>
+          <p:cNvSpPr txBox="1"/>
+          <p:nvPr/>
+        </p:nvSpPr>
+        <p:spPr>
+          <a:xfrm>
+            <a:off x="640080" y="365760"/>
+            <a:ext cx="10881360" cy="731520"/>
+          </a:xfrm>
+          <a:prstGeom prst="rect">
+            <a:avLst/>
+          </a:prstGeom>
+          <a:noFill/>
+        </p:spPr>
+        <p:txBody>
+          <a:bodyPr wrap="square">
+            <a:spAutoFit/>
+          </a:bodyPr>
+          <a:lstStyle/>
+          <a:p>
+            <a:pPr>
+              <a:defRPr sz="2800" b="1">
+                <a:solidFill>
+                  <a:srgbClr val="00A89B"/>
+                </a:solidFill>
+              </a:defRPr>
+            </a:pPr>
+            <a:r>
+              <a:t>Part 2: Create Supplier Controller (cont.)</a:t>
+            </a:r>
+          </a:p>
+        </p:txBody>
+      </p:sp>
+      <p:sp>
+        <p:nvSpPr>
+          <p:cNvPr id="3" name="Rectangle 2"/>
+          <p:cNvSpPr/>
+          <p:nvPr/>
+        </p:nvSpPr>
+        <p:spPr>
+          <a:xfrm>
+            <a:off x="640080" y="1051560"/>
+            <a:ext cx="1828800" cy="25400"/>
+          </a:xfrm>
+          <a:prstGeom prst="rect">
+            <a:avLst/>
+          </a:prstGeom>
+          <a:solidFill>
+            <a:srgbClr val="00A89B"/>
+          </a:solidFill>
+          <a:ln>
+            <a:noFill/>
+          </a:ln>
+        </p:spPr>
+        <p:style>
+          <a:lnRef idx="1">
+            <a:schemeClr val="accent1"/>
+          </a:lnRef>
+          <a:fillRef idx="3">
+            <a:schemeClr val="accent1"/>
+          </a:fillRef>
+          <a:effectRef idx="2">
+            <a:schemeClr val="accent1"/>
+          </a:effectRef>
+          <a:fontRef idx="minor">
+            <a:schemeClr val="lt1"/>
+          </a:fontRef>
+        </p:style>
+        <p:txBody>
+          <a:bodyPr rtlCol="0" anchor="ctr"/>
+          <a:lstStyle/>
+          <a:p>
+            <a:pPr algn="ctr"/>
+          </a:p>
+        </p:txBody>
+      </p:sp>
+      <p:sp>
+        <p:nvSpPr>
+          <p:cNvPr id="4" name="TextBox 3"/>
+          <p:cNvSpPr txBox="1"/>
+          <p:nvPr/>
+        </p:nvSpPr>
+        <p:spPr>
+          <a:xfrm>
+            <a:off x="640080" y="1371600"/>
+            <a:ext cx="10881360" cy="5029200"/>
+          </a:xfrm>
+          <a:prstGeom prst="rect">
+            <a:avLst/>
+          </a:prstGeom>
+          <a:noFill/>
+        </p:spPr>
+        <p:txBody>
+          <a:bodyPr wrap="square">
+            <a:spAutoFit/>
+          </a:bodyPr>
+          <a:lstStyle/>
+          <a:p>
+            <a:pPr>
+              <a:spcAft>
+                <a:spcPts val="400"/>
+              </a:spcAft>
+              <a:defRPr sz="1500">
+                <a:solidFill>
+                  <a:srgbClr val="1A1A1A"/>
+                </a:solidFill>
+              </a:defRPr>
+            </a:pPr>
+            <a:r>
+              <a:t>• If submitted and valid: Create supplier via facade: $this-&gt;getFactory()-&gt;getSupplierFacade()-&gt;createSupplier($supplierTransfer) Link to current merchant: create a PyzMerchantToSupplier entity Return JsonResponse with ZedUI actions: $this -&gt;getFactory()-&gt;getZedUiFactory() -&gt;createZedUiFormResponseBuilder() -&gt;addSuccessNotification( 'Supplier created successfully.' ) -&gt;addActionCloseDrawer() -&gt;addActionRefreshTable() -&gt;createResponse() ;</a:t>
+            </a:r>
+          </a:p>
+          <a:p>
+            <a:pPr>
+              <a:spcAft>
+                <a:spcPts val="400"/>
+              </a:spcAft>
+              <a:defRPr sz="1500">
+                <a:solidFill>
+                  <a:srgbClr val="1A1A1A"/>
+                </a:solidFill>
+              </a:defRPr>
+            </a:pPr>
+            <a:r>
+              <a:t>• Otherwise: render the form template as JsonResponse</a:t>
+            </a:r>
+          </a:p>
+          <a:p>
+            <a:pPr>
+              <a:spcAft>
+                <a:spcPts val="800"/>
+              </a:spcAft>
+              <a:defRPr sz="1400" i="1">
+                <a:solidFill>
+                  <a:srgbClr val="888888"/>
+                </a:solidFill>
+              </a:defRPr>
+            </a:pPr>
+            <a:r>
+              <a:t>❝ Merchant linking: When a merchant creates a supplier, it must be automatically linked via pyz_merchant_to_supplier . Get the current merchant from MerchantUserFacade::getCurrentMerchantUser()-&gt;getMerchantOrFail() .</a:t>
+            </a:r>
+          </a:p>
+        </p:txBody>
+      </p:sp>
+    </p:spTree>
+  </p:cSld>
+  <p:clrMapOvr>
+    <a:masterClrMapping/>
+  </p:clrMapOvr>
+</p:sld>
+</file>
+
+<file path=ppt/slides/slide231.xml><?xml version="1.0" encoding="utf-8"?>
+<p:sld xmlns:a="http://schemas.openxmlformats.org/drawingml/2006/main" xmlns:p="http://schemas.openxmlformats.org/presentationml/2006/main" xmlns:r="http://schemas.openxmlformats.org/officeDocument/2006/relationships">
+  <p:cSld>
+    <p:spTree>
+      <p:nvGrpSpPr>
+        <p:cNvPr id="1" name=""/>
+        <p:cNvGrpSpPr/>
+        <p:nvPr/>
+      </p:nvGrpSpPr>
+      <p:grpSpPr/>
+      <p:sp>
+        <p:nvSpPr>
+          <p:cNvPr id="2" name="TextBox 1"/>
+          <p:cNvSpPr txBox="1"/>
+          <p:nvPr/>
+        </p:nvSpPr>
+        <p:spPr>
+          <a:xfrm>
+            <a:off x="640080" y="365760"/>
+            <a:ext cx="10881360" cy="731520"/>
+          </a:xfrm>
+          <a:prstGeom prst="rect">
+            <a:avLst/>
+          </a:prstGeom>
+          <a:noFill/>
+        </p:spPr>
+        <p:txBody>
+          <a:bodyPr wrap="square">
+            <a:spAutoFit/>
+          </a:bodyPr>
+          <a:lstStyle/>
+          <a:p>
+            <a:pPr>
+              <a:defRPr sz="2800" b="1">
+                <a:solidFill>
+                  <a:srgbClr val="00A89B"/>
+                </a:solidFill>
+              </a:defRPr>
+            </a:pPr>
+            <a:r>
+              <a:t>Part 3: Update Supplier Controller</a:t>
+            </a:r>
+          </a:p>
+        </p:txBody>
+      </p:sp>
+      <p:sp>
+        <p:nvSpPr>
+          <p:cNvPr id="3" name="Rectangle 2"/>
+          <p:cNvSpPr/>
+          <p:nvPr/>
+        </p:nvSpPr>
+        <p:spPr>
+          <a:xfrm>
+            <a:off x="640080" y="1051560"/>
+            <a:ext cx="1828800" cy="25400"/>
+          </a:xfrm>
+          <a:prstGeom prst="rect">
+            <a:avLst/>
+          </a:prstGeom>
+          <a:solidFill>
+            <a:srgbClr val="00A89B"/>
+          </a:solidFill>
+          <a:ln>
+            <a:noFill/>
+          </a:ln>
+        </p:spPr>
+        <p:style>
+          <a:lnRef idx="1">
+            <a:schemeClr val="accent1"/>
+          </a:lnRef>
+          <a:fillRef idx="3">
+            <a:schemeClr val="accent1"/>
+          </a:fillRef>
+          <a:effectRef idx="2">
+            <a:schemeClr val="accent1"/>
+          </a:effectRef>
+          <a:fontRef idx="minor">
+            <a:schemeClr val="lt1"/>
+          </a:fontRef>
+        </p:style>
+        <p:txBody>
+          <a:bodyPr rtlCol="0" anchor="ctr"/>
+          <a:lstStyle/>
+          <a:p>
+            <a:pPr algn="ctr"/>
+          </a:p>
+        </p:txBody>
+      </p:sp>
+      <p:sp>
+        <p:nvSpPr>
+          <p:cNvPr id="4" name="TextBox 3"/>
+          <p:cNvSpPr txBox="1"/>
+          <p:nvPr/>
+        </p:nvSpPr>
+        <p:spPr>
+          <a:xfrm>
+            <a:off x="640080" y="1371600"/>
+            <a:ext cx="10881360" cy="5029200"/>
+          </a:xfrm>
+          <a:prstGeom prst="rect">
+            <a:avLst/>
+          </a:prstGeom>
+          <a:noFill/>
+        </p:spPr>
+        <p:txBody>
+          <a:bodyPr wrap="square">
+            <a:spAutoFit/>
+          </a:bodyPr>
+          <a:lstStyle/>
+          <a:p>
+            <a:pPr>
+              <a:spcAft>
+                <a:spcPts val="800"/>
+              </a:spcAft>
+              <a:defRPr sz="1600">
+                <a:solidFill>
+                  <a:srgbClr val="1A1A1A"/>
+                </a:solidFill>
+              </a:defRPr>
+            </a:pPr>
+            <a:r>
+              <a:t>Coding time:</a:t>
+            </a:r>
+          </a:p>
+          <a:p>
+            <a:pPr>
+              <a:spcAft>
+                <a:spcPts val="800"/>
+              </a:spcAft>
+              <a:defRPr sz="1600">
+                <a:solidFill>
+                  <a:srgbClr val="1A1A1A"/>
+                </a:solidFill>
+              </a:defRPr>
+            </a:pPr>
+            <a:r>
+              <a:t>Open src/SprykerAcademy/Zed/SupplierMerchantPortalGui/Communication/Controller/UpdateSupplierController.php :</a:t>
+            </a:r>
+          </a:p>
+          <a:p>
+            <a:pPr>
+              <a:spcAft>
+                <a:spcPts val="800"/>
+              </a:spcAft>
+              <a:defRPr sz="1600">
+                <a:solidFill>
+                  <a:srgbClr val="1A1A1A"/>
+                </a:solidFill>
+              </a:defRPr>
+            </a:pPr>
+            <a:r>
+              <a:t>Same pattern as create, but: 1. Read id-supplier from the request 2. Load existing supplier via form data provider 3. Throw NotFoundHttpException if supplier doesn’t exist 4. On valid submit: call updateSupplier() instead of createSupplier()</a:t>
+            </a:r>
+          </a:p>
+        </p:txBody>
+      </p:sp>
+    </p:spTree>
+  </p:cSld>
+  <p:clrMapOvr>
+    <a:masterClrMapping/>
+  </p:clrMapOvr>
+</p:sld>
+</file>
+
+<file path=ppt/slides/slide232.xml><?xml version="1.0" encoding="utf-8"?>
+<p:sld xmlns:a="http://schemas.openxmlformats.org/drawingml/2006/main" xmlns:p="http://schemas.openxmlformats.org/presentationml/2006/main" xmlns:r="http://schemas.openxmlformats.org/officeDocument/2006/relationships">
+  <p:cSld>
+    <p:spTree>
+      <p:nvGrpSpPr>
+        <p:cNvPr id="1" name=""/>
+        <p:cNvGrpSpPr/>
+        <p:nvPr/>
+      </p:nvGrpSpPr>
+      <p:grpSpPr/>
+      <p:sp>
+        <p:nvSpPr>
+          <p:cNvPr id="2" name="TextBox 1"/>
+          <p:cNvSpPr txBox="1"/>
+          <p:nvPr/>
+        </p:nvSpPr>
+        <p:spPr>
+          <a:xfrm>
+            <a:off x="640080" y="365760"/>
+            <a:ext cx="10881360" cy="731520"/>
+          </a:xfrm>
+          <a:prstGeom prst="rect">
+            <a:avLst/>
+          </a:prstGeom>
+          <a:noFill/>
+        </p:spPr>
+        <p:txBody>
+          <a:bodyPr wrap="square">
+            <a:spAutoFit/>
+          </a:bodyPr>
+          <a:lstStyle/>
+          <a:p>
+            <a:pPr>
+              <a:defRPr sz="2800" b="1">
+                <a:solidFill>
+                  <a:srgbClr val="00A89B"/>
+                </a:solidFill>
+              </a:defRPr>
+            </a:pPr>
+            <a:r>
+              <a:t>Part 4: Angular Component Wiring</a:t>
+            </a:r>
+          </a:p>
+        </p:txBody>
+      </p:sp>
+      <p:sp>
+        <p:nvSpPr>
+          <p:cNvPr id="3" name="Rectangle 2"/>
+          <p:cNvSpPr/>
+          <p:nvPr/>
+        </p:nvSpPr>
+        <p:spPr>
+          <a:xfrm>
+            <a:off x="640080" y="1051560"/>
+            <a:ext cx="1828800" cy="25400"/>
+          </a:xfrm>
+          <a:prstGeom prst="rect">
+            <a:avLst/>
+          </a:prstGeom>
+          <a:solidFill>
+            <a:srgbClr val="00A89B"/>
+          </a:solidFill>
+          <a:ln>
+            <a:noFill/>
+          </a:ln>
+        </p:spPr>
+        <p:style>
+          <a:lnRef idx="1">
+            <a:schemeClr val="accent1"/>
+          </a:lnRef>
+          <a:fillRef idx="3">
+            <a:schemeClr val="accent1"/>
+          </a:fillRef>
+          <a:effectRef idx="2">
+            <a:schemeClr val="accent1"/>
+          </a:effectRef>
+          <a:fontRef idx="minor">
+            <a:schemeClr val="lt1"/>
+          </a:fontRef>
+        </p:style>
+        <p:txBody>
+          <a:bodyPr rtlCol="0" anchor="ctr"/>
+          <a:lstStyle/>
+          <a:p>
+            <a:pPr algn="ctr"/>
+          </a:p>
+        </p:txBody>
+      </p:sp>
+      <p:sp>
+        <p:nvSpPr>
+          <p:cNvPr id="4" name="TextBox 3"/>
+          <p:cNvSpPr txBox="1"/>
+          <p:nvPr/>
+        </p:nvSpPr>
+        <p:spPr>
+          <a:xfrm>
+            <a:off x="640080" y="1371600"/>
+            <a:ext cx="10881360" cy="5029200"/>
+          </a:xfrm>
+          <a:prstGeom prst="rect">
+            <a:avLst/>
+          </a:prstGeom>
+          <a:noFill/>
+        </p:spPr>
+        <p:txBody>
+          <a:bodyPr wrap="square">
+            <a:spAutoFit/>
+          </a:bodyPr>
+          <a:lstStyle/>
+          <a:p>
+            <a:pPr>
+              <a:spcAft>
+                <a:spcPts val="800"/>
+              </a:spcAft>
+              <a:defRPr sz="1600">
+                <a:solidFill>
+                  <a:srgbClr val="1A1A1A"/>
+                </a:solidFill>
+              </a:defRPr>
+            </a:pPr>
+            <a:r>
+              <a:t>Coding time:</a:t>
+            </a:r>
+          </a:p>
+          <a:p>
+            <a:pPr>
+              <a:spcAft>
+                <a:spcPts val="800"/>
+              </a:spcAft>
+              <a:defRPr sz="1600">
+                <a:solidFill>
+                  <a:srgbClr val="1A1A1A"/>
+                </a:solidFill>
+              </a:defRPr>
+            </a:pPr>
+            <a:r>
+              <a:t>Open components.module.ts and add EditSupplierComponent and CardComponent to WebComponentsModule.withComponents([...]) .</a:t>
+            </a:r>
+          </a:p>
+          <a:p>
+            <a:pPr>
+              <a:spcAft>
+                <a:spcPts val="800"/>
+              </a:spcAft>
+              <a:defRPr sz="1600">
+                <a:solidFill>
+                  <a:srgbClr val="1A1A1A"/>
+                </a:solidFill>
+              </a:defRPr>
+            </a:pPr>
+            <a:r>
+              <a:t>The edit component ( &lt;web-mp-edit-supplier&gt; ) wraps the form content with named slots for title and action buttons.</a:t>
+            </a:r>
+          </a:p>
+          <a:p>
+            <a:pPr>
+              <a:spcAft>
+                <a:spcPts val="800"/>
+              </a:spcAft>
+              <a:defRPr sz="1600">
+                <a:solidFill>
+                  <a:srgbClr val="1A1A1A"/>
+                </a:solidFill>
+              </a:defRPr>
+            </a:pPr>
+            <a:r>
+              <a:t>The card component ( &lt;web-spy-card&gt; ) provides the card layout used in the form template to group related fields.</a:t>
+            </a:r>
+          </a:p>
+        </p:txBody>
+      </p:sp>
+    </p:spTree>
+  </p:cSld>
+  <p:clrMapOvr>
+    <a:masterClrMapping/>
+  </p:clrMapOvr>
+</p:sld>
+</file>
+
+<file path=ppt/slides/slide233.xml><?xml version="1.0" encoding="utf-8"?>
+<p:sld xmlns:a="http://schemas.openxmlformats.org/drawingml/2006/main" xmlns:p="http://schemas.openxmlformats.org/presentationml/2006/main" xmlns:r="http://schemas.openxmlformats.org/officeDocument/2006/relationships">
+  <p:cSld>
+    <p:spTree>
+      <p:nvGrpSpPr>
+        <p:cNvPr id="1" name=""/>
+        <p:cNvGrpSpPr/>
+        <p:nvPr/>
+      </p:nvGrpSpPr>
+      <p:grpSpPr/>
+      <p:sp>
+        <p:nvSpPr>
+          <p:cNvPr id="2" name="TextBox 1"/>
+          <p:cNvSpPr txBox="1"/>
+          <p:nvPr/>
+        </p:nvSpPr>
+        <p:spPr>
+          <a:xfrm>
+            <a:off x="640080" y="365760"/>
+            <a:ext cx="10881360" cy="731520"/>
+          </a:xfrm>
+          <a:prstGeom prst="rect">
+            <a:avLst/>
+          </a:prstGeom>
+          <a:noFill/>
+        </p:spPr>
+        <p:txBody>
+          <a:bodyPr wrap="square">
+            <a:spAutoFit/>
+          </a:bodyPr>
+          <a:lstStyle/>
+          <a:p>
+            <a:pPr>
+              <a:defRPr sz="2800" b="1">
+                <a:solidFill>
+                  <a:srgbClr val="00A89B"/>
+                </a:solidFill>
+              </a:defRPr>
+            </a:pPr>
+            <a:r>
+              <a:t>Testing</a:t>
+            </a:r>
+          </a:p>
+        </p:txBody>
+      </p:sp>
+      <p:sp>
+        <p:nvSpPr>
+          <p:cNvPr id="3" name="Rectangle 2"/>
+          <p:cNvSpPr/>
+          <p:nvPr/>
+        </p:nvSpPr>
+        <p:spPr>
+          <a:xfrm>
+            <a:off x="640080" y="1051560"/>
+            <a:ext cx="1828800" cy="25400"/>
+          </a:xfrm>
+          <a:prstGeom prst="rect">
+            <a:avLst/>
+          </a:prstGeom>
+          <a:solidFill>
+            <a:srgbClr val="00A89B"/>
+          </a:solidFill>
+          <a:ln>
+            <a:noFill/>
+          </a:ln>
+        </p:spPr>
+        <p:style>
+          <a:lnRef idx="1">
+            <a:schemeClr val="accent1"/>
+          </a:lnRef>
+          <a:fillRef idx="3">
+            <a:schemeClr val="accent1"/>
+          </a:fillRef>
+          <a:effectRef idx="2">
+            <a:schemeClr val="accent1"/>
+          </a:effectRef>
+          <a:fontRef idx="minor">
+            <a:schemeClr val="lt1"/>
+          </a:fontRef>
+        </p:style>
+        <p:txBody>
+          <a:bodyPr rtlCol="0" anchor="ctr"/>
+          <a:lstStyle/>
+          <a:p>
+            <a:pPr algn="ctr"/>
+          </a:p>
+        </p:txBody>
+      </p:sp>
+      <p:sp>
+        <p:nvSpPr>
+          <p:cNvPr id="4" name="TextBox 3"/>
+          <p:cNvSpPr txBox="1"/>
+          <p:nvPr/>
+        </p:nvSpPr>
+        <p:spPr>
+          <a:xfrm>
+            <a:off x="640080" y="1371600"/>
+            <a:ext cx="10881360" cy="5029200"/>
+          </a:xfrm>
+          <a:prstGeom prst="rect">
+            <a:avLst/>
+          </a:prstGeom>
+          <a:noFill/>
+        </p:spPr>
+        <p:txBody>
+          <a:bodyPr wrap="square">
+            <a:spAutoFit/>
+          </a:bodyPr>
+          <a:lstStyle/>
+          <a:p>
+            <a:pPr>
+              <a:spcBef>
+                <a:spcPts val="0"/>
+              </a:spcBef>
+              <a:spcAft>
+                <a:spcPts val="0"/>
+              </a:spcAft>
+            </a:pPr>
+            <a:r>
+              <a:rPr sz="900">
+                <a:solidFill>
+                  <a:srgbClr val="2D2D2D"/>
+                </a:solidFill>
+                <a:latin typeface="Consolas"/>
+              </a:rPr>
+              <a:t>docker/sdk</a:t>
+            </a:r>
+            <a:r>
+              <a:rPr sz="900">
+                <a:solidFill>
+                  <a:srgbClr val="2D2D2D"/>
+                </a:solidFill>
+                <a:latin typeface="Consolas"/>
+              </a:rPr>
+              <a:t> console cache:empty-all</a:t>
+            </a:r>
+          </a:p>
+          <a:p>
+            <a:pPr>
+              <a:spcAft>
+                <a:spcPts val="400"/>
+              </a:spcAft>
+              <a:defRPr sz="1500">
+                <a:solidFill>
+                  <a:srgbClr val="1A1A1A"/>
+                </a:solidFill>
+              </a:defRPr>
+            </a:pPr>
+            <a:r>
+              <a:t>• In the Merchant Portal supplier table, click “Add Supplier” → the create form should open</a:t>
+            </a:r>
+          </a:p>
+          <a:p>
+            <a:pPr>
+              <a:spcAft>
+                <a:spcPts val="400"/>
+              </a:spcAft>
+              <a:defRPr sz="1500">
+                <a:solidFill>
+                  <a:srgbClr val="1A1A1A"/>
+                </a:solidFill>
+              </a:defRPr>
+            </a:pPr>
+            <a:r>
+              <a:t>• Fill in the form and submit → supplier should be created and table refreshed</a:t>
+            </a:r>
+          </a:p>
+          <a:p>
+            <a:pPr>
+              <a:spcAft>
+                <a:spcPts val="400"/>
+              </a:spcAft>
+              <a:defRPr sz="1500">
+                <a:solidFill>
+                  <a:srgbClr val="1A1A1A"/>
+                </a:solidFill>
+              </a:defRPr>
+            </a:pPr>
+            <a:r>
+              <a:t>• Click “Edit” on a table row → the edit drawer should open with pre-filled data</a:t>
+            </a:r>
+          </a:p>
+          <a:p>
+            <a:pPr>
+              <a:spcAft>
+                <a:spcPts val="400"/>
+              </a:spcAft>
+              <a:defRPr sz="1500">
+                <a:solidFill>
+                  <a:srgbClr val="1A1A1A"/>
+                </a:solidFill>
+              </a:defRPr>
+            </a:pPr>
+            <a:r>
+              <a:t>• Update and submit → changes should be saved</a:t>
+            </a:r>
+          </a:p>
+        </p:txBody>
+      </p:sp>
+    </p:spTree>
+  </p:cSld>
+  <p:clrMapOvr>
+    <a:masterClrMapping/>
+  </p:clrMapOvr>
+</p:sld>
+</file>
+
+<file path=ppt/slides/slide234.xml><?xml version="1.0" encoding="utf-8"?>
+<p:sld xmlns:a="http://schemas.openxmlformats.org/drawingml/2006/main" xmlns:p="http://schemas.openxmlformats.org/presentationml/2006/main" xmlns:r="http://schemas.openxmlformats.org/officeDocument/2006/relationships">
+  <p:cSld>
+    <p:spTree>
+      <p:nvGrpSpPr>
+        <p:cNvPr id="1" name=""/>
+        <p:cNvGrpSpPr/>
+        <p:nvPr/>
+      </p:nvGrpSpPr>
+      <p:grpSpPr/>
+      <p:sp>
+        <p:nvSpPr>
+          <p:cNvPr id="2" name="TextBox 1"/>
+          <p:cNvSpPr txBox="1"/>
+          <p:nvPr/>
+        </p:nvSpPr>
+        <p:spPr>
+          <a:xfrm>
+            <a:off x="640080" y="365760"/>
+            <a:ext cx="10881360" cy="731520"/>
+          </a:xfrm>
+          <a:prstGeom prst="rect">
+            <a:avLst/>
+          </a:prstGeom>
+          <a:noFill/>
+        </p:spPr>
+        <p:txBody>
+          <a:bodyPr wrap="square">
+            <a:spAutoFit/>
+          </a:bodyPr>
+          <a:lstStyle/>
+          <a:p>
+            <a:pPr>
+              <a:defRPr sz="2800" b="1">
+                <a:solidFill>
+                  <a:srgbClr val="00A89B"/>
+                </a:solidFill>
+              </a:defRPr>
+            </a:pPr>
+            <a:r>
+              <a:t>Solution</a:t>
+            </a:r>
+          </a:p>
+        </p:txBody>
+      </p:sp>
+      <p:sp>
+        <p:nvSpPr>
+          <p:cNvPr id="3" name="Rectangle 2"/>
+          <p:cNvSpPr/>
+          <p:nvPr/>
+        </p:nvSpPr>
+        <p:spPr>
+          <a:xfrm>
+            <a:off x="640080" y="1051560"/>
+            <a:ext cx="1828800" cy="25400"/>
+          </a:xfrm>
+          <a:prstGeom prst="rect">
+            <a:avLst/>
+          </a:prstGeom>
+          <a:solidFill>
+            <a:srgbClr val="00A89B"/>
+          </a:solidFill>
+          <a:ln>
+            <a:noFill/>
+          </a:ln>
+        </p:spPr>
+        <p:style>
+          <a:lnRef idx="1">
+            <a:schemeClr val="accent1"/>
+          </a:lnRef>
+          <a:fillRef idx="3">
+            <a:schemeClr val="accent1"/>
+          </a:fillRef>
+          <a:effectRef idx="2">
+            <a:schemeClr val="accent1"/>
+          </a:effectRef>
+          <a:fontRef idx="minor">
+            <a:schemeClr val="lt1"/>
+          </a:fontRef>
+        </p:style>
+        <p:txBody>
+          <a:bodyPr rtlCol="0" anchor="ctr"/>
+          <a:lstStyle/>
+          <a:p>
+            <a:pPr algn="ctr"/>
+          </a:p>
+        </p:txBody>
+      </p:sp>
+      <p:sp>
+        <p:nvSpPr>
+          <p:cNvPr id="4" name="TextBox 3"/>
+          <p:cNvSpPr txBox="1"/>
+          <p:nvPr/>
+        </p:nvSpPr>
+        <p:spPr>
+          <a:xfrm>
+            <a:off x="640080" y="1371600"/>
+            <a:ext cx="10881360" cy="5029200"/>
+          </a:xfrm>
+          <a:prstGeom prst="rect">
+            <a:avLst/>
+          </a:prstGeom>
+          <a:noFill/>
+        </p:spPr>
+        <p:txBody>
+          <a:bodyPr wrap="square">
+            <a:spAutoFit/>
+          </a:bodyPr>
+          <a:lstStyle/>
+          <a:p>
+            <a:pPr>
+              <a:spcBef>
+                <a:spcPts val="0"/>
+              </a:spcBef>
+              <a:spcAft>
+                <a:spcPts val="0"/>
+              </a:spcAft>
+            </a:pPr>
+            <a:r>
+              <a:rPr sz="900">
+                <a:solidFill>
+                  <a:srgbClr val="2D2D2D"/>
+                </a:solidFill>
+                <a:latin typeface="Consolas"/>
+              </a:rPr>
+              <a:t>./exercises/load.sh</a:t>
+            </a:r>
+            <a:r>
+              <a:rPr sz="900">
+                <a:solidFill>
+                  <a:srgbClr val="2D2D2D"/>
+                </a:solidFill>
+                <a:latin typeface="Consolas"/>
+              </a:rPr>
+              <a:t> supplier intermediate/merchant-portal-form/complete</a:t>
+            </a:r>
+          </a:p>
+        </p:txBody>
+      </p:sp>
+    </p:spTree>
+  </p:cSld>
+  <p:clrMapOvr>
+    <a:masterClrMapping/>
+  </p:clrMapOvr>
+</p:sld>
+</file>
+
+<file path=ppt/slides/slide235.xml><?xml version="1.0" encoding="utf-8"?>
+<p:sld xmlns:a="http://schemas.openxmlformats.org/drawingml/2006/main" xmlns:p="http://schemas.openxmlformats.org/presentationml/2006/main" xmlns:r="http://schemas.openxmlformats.org/officeDocument/2006/relationships">
+  <p:cSld>
+    <p:spTree>
+      <p:nvGrpSpPr>
+        <p:cNvPr id="1" name=""/>
+        <p:cNvGrpSpPr/>
+        <p:nvPr/>
+      </p:nvGrpSpPr>
+      <p:grpSpPr/>
+      <p:sp>
+        <p:nvSpPr>
+          <p:cNvPr id="2" name="TextBox 1"/>
+          <p:cNvSpPr txBox="1"/>
+          <p:nvPr/>
+        </p:nvSpPr>
+        <p:spPr>
+          <a:xfrm>
+            <a:off x="914400" y="2560320"/>
+            <a:ext cx="10362895" cy="1371600"/>
+          </a:xfrm>
+          <a:prstGeom prst="rect">
+            <a:avLst/>
+          </a:prstGeom>
+          <a:noFill/>
+        </p:spPr>
+        <p:txBody>
+          <a:bodyPr wrap="square">
+            <a:spAutoFit/>
+          </a:bodyPr>
+          <a:lstStyle/>
+          <a:p>
+            <a:pPr algn="ctr">
+              <a:defRPr sz="3600" b="1">
+                <a:solidFill>
+                  <a:srgbClr val="00A89B"/>
+                </a:solidFill>
+              </a:defRPr>
+            </a:pPr>
+            <a:r>
+              <a:t>11-merchant-portal-locations</a:t>
+            </a:r>
+          </a:p>
+        </p:txBody>
+      </p:sp>
+      <p:sp>
+        <p:nvSpPr>
+          <p:cNvPr id="3" name="Rectangle 2"/>
+          <p:cNvSpPr/>
+          <p:nvPr/>
+        </p:nvSpPr>
+        <p:spPr>
+          <a:xfrm>
+            <a:off x="3657600" y="2286000"/>
+            <a:ext cx="4876495" cy="38100"/>
+          </a:xfrm>
+          <a:prstGeom prst="rect">
+            <a:avLst/>
+          </a:prstGeom>
+          <a:solidFill>
+            <a:srgbClr val="00A89B"/>
+          </a:solidFill>
+          <a:ln>
+            <a:noFill/>
+          </a:ln>
+        </p:spPr>
+        <p:style>
+          <a:lnRef idx="1">
+            <a:schemeClr val="accent1"/>
+          </a:lnRef>
+          <a:fillRef idx="3">
+            <a:schemeClr val="accent1"/>
+          </a:fillRef>
+          <a:effectRef idx="2">
+            <a:schemeClr val="accent1"/>
+          </a:effectRef>
+          <a:fontRef idx="minor">
+            <a:schemeClr val="lt1"/>
+          </a:fontRef>
+        </p:style>
+        <p:txBody>
+          <a:bodyPr rtlCol="0" anchor="ctr"/>
+          <a:lstStyle/>
+          <a:p>
+            <a:pPr algn="ctr"/>
+          </a:p>
+        </p:txBody>
+      </p:sp>
+    </p:spTree>
+  </p:cSld>
+  <p:clrMapOvr>
+    <a:masterClrMapping/>
+  </p:clrMapOvr>
+</p:sld>
+</file>
+
+<file path=ppt/slides/slide236.xml><?xml version="1.0" encoding="utf-8"?>
+<p:sld xmlns:a="http://schemas.openxmlformats.org/drawingml/2006/main" xmlns:p="http://schemas.openxmlformats.org/presentationml/2006/main" xmlns:r="http://schemas.openxmlformats.org/officeDocument/2006/relationships">
+  <p:cSld>
+    <p:spTree>
+      <p:nvGrpSpPr>
+        <p:cNvPr id="1" name=""/>
+        <p:cNvGrpSpPr/>
+        <p:nvPr/>
+      </p:nvGrpSpPr>
+      <p:grpSpPr/>
+      <p:sp>
+        <p:nvSpPr>
+          <p:cNvPr id="2" name="TextBox 1"/>
+          <p:cNvSpPr txBox="1"/>
+          <p:nvPr/>
+        </p:nvSpPr>
+        <p:spPr>
+          <a:xfrm>
+            <a:off x="640080" y="365760"/>
+            <a:ext cx="10881360" cy="731520"/>
+          </a:xfrm>
+          <a:prstGeom prst="rect">
+            <a:avLst/>
+          </a:prstGeom>
+          <a:noFill/>
+        </p:spPr>
+        <p:txBody>
+          <a:bodyPr wrap="square">
+            <a:spAutoFit/>
+          </a:bodyPr>
+          <a:lstStyle/>
+          <a:p>
+            <a:pPr>
+              <a:defRPr sz="2800" b="1">
+                <a:solidFill>
+                  <a:srgbClr val="00A89B"/>
+                </a:solidFill>
+              </a:defRPr>
+            </a:pPr>
+            <a:r>
+              <a:t>Exercise 17: Merchant Portal — Supplier Locations (Nested Table)</a:t>
+            </a:r>
+          </a:p>
+        </p:txBody>
+      </p:sp>
+      <p:sp>
+        <p:nvSpPr>
+          <p:cNvPr id="3" name="Rectangle 2"/>
+          <p:cNvSpPr/>
+          <p:nvPr/>
+        </p:nvSpPr>
+        <p:spPr>
+          <a:xfrm>
+            <a:off x="640080" y="1051560"/>
+            <a:ext cx="1828800" cy="25400"/>
+          </a:xfrm>
+          <a:prstGeom prst="rect">
+            <a:avLst/>
+          </a:prstGeom>
+          <a:solidFill>
+            <a:srgbClr val="00A89B"/>
+          </a:solidFill>
+          <a:ln>
+            <a:noFill/>
+          </a:ln>
+        </p:spPr>
+        <p:style>
+          <a:lnRef idx="1">
+            <a:schemeClr val="accent1"/>
+          </a:lnRef>
+          <a:fillRef idx="3">
+            <a:schemeClr val="accent1"/>
+          </a:fillRef>
+          <a:effectRef idx="2">
+            <a:schemeClr val="accent1"/>
+          </a:effectRef>
+          <a:fontRef idx="minor">
+            <a:schemeClr val="lt1"/>
+          </a:fontRef>
+        </p:style>
+        <p:txBody>
+          <a:bodyPr rtlCol="0" anchor="ctr"/>
+          <a:lstStyle/>
+          <a:p>
+            <a:pPr algn="ctr"/>
+          </a:p>
+        </p:txBody>
+      </p:sp>
+      <p:sp>
+        <p:nvSpPr>
+          <p:cNvPr id="4" name="TextBox 3"/>
+          <p:cNvSpPr txBox="1"/>
+          <p:nvPr/>
+        </p:nvSpPr>
+        <p:spPr>
+          <a:xfrm>
+            <a:off x="640080" y="1371600"/>
+            <a:ext cx="10881360" cy="5029200"/>
+          </a:xfrm>
+          <a:prstGeom prst="rect">
+            <a:avLst/>
+          </a:prstGeom>
+          <a:noFill/>
+        </p:spPr>
+        <p:txBody>
+          <a:bodyPr wrap="square">
+            <a:spAutoFit/>
+          </a:bodyPr>
+          <a:lstStyle/>
+          <a:p>
+            <a:pPr>
+              <a:spcAft>
+                <a:spcPts val="800"/>
+              </a:spcAft>
+              <a:defRPr sz="1600">
+                <a:solidFill>
+                  <a:srgbClr val="1A1A1A"/>
+                </a:solidFill>
+              </a:defRPr>
+            </a:pPr>
+            <a:r>
+              <a:t>In this exercise, you will add an editable locations table inside the supplier edit drawer. This teaches the pattern for nested tables within forms — similar to how Spryker’s ProductOffer module embeds a price table inside the offer edit form.</a:t>
+            </a:r>
+          </a:p>
+          <a:p>
+            <a:pPr>
+              <a:spcAft>
+                <a:spcPts val="800"/>
+              </a:spcAft>
+              <a:defRPr sz="1600">
+                <a:solidFill>
+                  <a:srgbClr val="1A1A1A"/>
+                </a:solidFill>
+              </a:defRPr>
+            </a:pPr>
+            <a:r>
+              <a:t>You will learn how to: - Build an editable GuiTable with inline add/edit capabilities - Configure enableAddingNewRows() for adding rows to the table - Implement a Symfony form data transformer for nested table data - Embed a GuiTable inside a form template - Register a nested Angular table component</a:t>
+            </a:r>
+          </a:p>
+        </p:txBody>
+      </p:sp>
+    </p:spTree>
+  </p:cSld>
+  <p:clrMapOvr>
+    <a:masterClrMapping/>
+  </p:clrMapOvr>
+</p:sld>
+</file>
+
+<file path=ppt/slides/slide237.xml><?xml version="1.0" encoding="utf-8"?>
+<p:sld xmlns:a="http://schemas.openxmlformats.org/drawingml/2006/main" xmlns:p="http://schemas.openxmlformats.org/presentationml/2006/main" xmlns:r="http://schemas.openxmlformats.org/officeDocument/2006/relationships">
+  <p:cSld>
+    <p:spTree>
+      <p:nvGrpSpPr>
+        <p:cNvPr id="1" name=""/>
+        <p:cNvGrpSpPr/>
+        <p:nvPr/>
+      </p:nvGrpSpPr>
+      <p:grpSpPr/>
+      <p:sp>
+        <p:nvSpPr>
+          <p:cNvPr id="2" name="TextBox 1"/>
+          <p:cNvSpPr txBox="1"/>
+          <p:nvPr/>
+        </p:nvSpPr>
+        <p:spPr>
+          <a:xfrm>
+            <a:off x="640080" y="365760"/>
+            <a:ext cx="10881360" cy="731520"/>
+          </a:xfrm>
+          <a:prstGeom prst="rect">
+            <a:avLst/>
+          </a:prstGeom>
+          <a:noFill/>
+        </p:spPr>
+        <p:txBody>
+          <a:bodyPr wrap="square">
+            <a:spAutoFit/>
+          </a:bodyPr>
+          <a:lstStyle/>
+          <a:p>
+            <a:pPr>
+              <a:defRPr sz="2800" b="1">
+                <a:solidFill>
+                  <a:srgbClr val="00A89B"/>
+                </a:solidFill>
+              </a:defRPr>
+            </a:pPr>
+            <a:r>
+              <a:t>Prerequisites</a:t>
+            </a:r>
+          </a:p>
+        </p:txBody>
+      </p:sp>
+      <p:sp>
+        <p:nvSpPr>
+          <p:cNvPr id="3" name="Rectangle 2"/>
+          <p:cNvSpPr/>
+          <p:nvPr/>
+        </p:nvSpPr>
+        <p:spPr>
+          <a:xfrm>
+            <a:off x="640080" y="1051560"/>
+            <a:ext cx="1828800" cy="25400"/>
+          </a:xfrm>
+          <a:prstGeom prst="rect">
+            <a:avLst/>
+          </a:prstGeom>
+          <a:solidFill>
+            <a:srgbClr val="00A89B"/>
+          </a:solidFill>
+          <a:ln>
+            <a:noFill/>
+          </a:ln>
+        </p:spPr>
+        <p:style>
+          <a:lnRef idx="1">
+            <a:schemeClr val="accent1"/>
+          </a:lnRef>
+          <a:fillRef idx="3">
+            <a:schemeClr val="accent1"/>
+          </a:fillRef>
+          <a:effectRef idx="2">
+            <a:schemeClr val="accent1"/>
+          </a:effectRef>
+          <a:fontRef idx="minor">
+            <a:schemeClr val="lt1"/>
+          </a:fontRef>
+        </p:style>
+        <p:txBody>
+          <a:bodyPr rtlCol="0" anchor="ctr"/>
+          <a:lstStyle/>
+          <a:p>
+            <a:pPr algn="ctr"/>
+          </a:p>
+        </p:txBody>
+      </p:sp>
+      <p:sp>
+        <p:nvSpPr>
+          <p:cNvPr id="4" name="TextBox 3"/>
+          <p:cNvSpPr txBox="1"/>
+          <p:nvPr/>
+        </p:nvSpPr>
+        <p:spPr>
+          <a:xfrm>
+            <a:off x="640080" y="1371600"/>
+            <a:ext cx="10881360" cy="5029200"/>
+          </a:xfrm>
+          <a:prstGeom prst="rect">
+            <a:avLst/>
+          </a:prstGeom>
+          <a:noFill/>
+        </p:spPr>
+        <p:txBody>
+          <a:bodyPr wrap="square">
+            <a:spAutoFit/>
+          </a:bodyPr>
+          <a:lstStyle/>
+          <a:p>
+            <a:pPr>
+              <a:spcAft>
+                <a:spcPts val="400"/>
+              </a:spcAft>
+              <a:defRPr sz="1500">
+                <a:solidFill>
+                  <a:srgbClr val="1A1A1A"/>
+                </a:solidFill>
+              </a:defRPr>
+            </a:pPr>
+            <a:r>
+              <a:t>• Completed Exercise 16 (Merchant Portal Form)</a:t>
+            </a:r>
+          </a:p>
+        </p:txBody>
+      </p:sp>
+    </p:spTree>
+  </p:cSld>
+  <p:clrMapOvr>
+    <a:masterClrMapping/>
+  </p:clrMapOvr>
+</p:sld>
+</file>
+
+<file path=ppt/slides/slide238.xml><?xml version="1.0" encoding="utf-8"?>
+<p:sld xmlns:a="http://schemas.openxmlformats.org/drawingml/2006/main" xmlns:p="http://schemas.openxmlformats.org/presentationml/2006/main" xmlns:r="http://schemas.openxmlformats.org/officeDocument/2006/relationships">
+  <p:cSld>
+    <p:spTree>
+      <p:nvGrpSpPr>
+        <p:cNvPr id="1" name=""/>
+        <p:cNvGrpSpPr/>
+        <p:nvPr/>
+      </p:nvGrpSpPr>
+      <p:grpSpPr/>
+      <p:sp>
+        <p:nvSpPr>
+          <p:cNvPr id="2" name="TextBox 1"/>
+          <p:cNvSpPr txBox="1"/>
+          <p:nvPr/>
+        </p:nvSpPr>
+        <p:spPr>
+          <a:xfrm>
+            <a:off x="640080" y="365760"/>
+            <a:ext cx="10881360" cy="731520"/>
+          </a:xfrm>
+          <a:prstGeom prst="rect">
+            <a:avLst/>
+          </a:prstGeom>
+          <a:noFill/>
+        </p:spPr>
+        <p:txBody>
+          <a:bodyPr wrap="square">
+            <a:spAutoFit/>
+          </a:bodyPr>
+          <a:lstStyle/>
+          <a:p>
+            <a:pPr>
+              <a:defRPr sz="2800" b="1">
+                <a:solidFill>
+                  <a:srgbClr val="00A89B"/>
+                </a:solidFill>
+              </a:defRPr>
+            </a:pPr>
+            <a:r>
+              <a:t>Loading the Exercise</a:t>
+            </a:r>
+          </a:p>
+        </p:txBody>
+      </p:sp>
+      <p:sp>
+        <p:nvSpPr>
+          <p:cNvPr id="3" name="Rectangle 2"/>
+          <p:cNvSpPr/>
+          <p:nvPr/>
+        </p:nvSpPr>
+        <p:spPr>
+          <a:xfrm>
+            <a:off x="640080" y="1051560"/>
+            <a:ext cx="1828800" cy="25400"/>
+          </a:xfrm>
+          <a:prstGeom prst="rect">
+            <a:avLst/>
+          </a:prstGeom>
+          <a:solidFill>
+            <a:srgbClr val="00A89B"/>
+          </a:solidFill>
+          <a:ln>
+            <a:noFill/>
+          </a:ln>
+        </p:spPr>
+        <p:style>
+          <a:lnRef idx="1">
+            <a:schemeClr val="accent1"/>
+          </a:lnRef>
+          <a:fillRef idx="3">
+            <a:schemeClr val="accent1"/>
+          </a:fillRef>
+          <a:effectRef idx="2">
+            <a:schemeClr val="accent1"/>
+          </a:effectRef>
+          <a:fontRef idx="minor">
+            <a:schemeClr val="lt1"/>
+          </a:fontRef>
+        </p:style>
+        <p:txBody>
+          <a:bodyPr rtlCol="0" anchor="ctr"/>
+          <a:lstStyle/>
+          <a:p>
+            <a:pPr algn="ctr"/>
+          </a:p>
+        </p:txBody>
+      </p:sp>
+      <p:sp>
+        <p:nvSpPr>
+          <p:cNvPr id="4" name="TextBox 3"/>
+          <p:cNvSpPr txBox="1"/>
+          <p:nvPr/>
+        </p:nvSpPr>
+        <p:spPr>
+          <a:xfrm>
+            <a:off x="640080" y="1371600"/>
+            <a:ext cx="10881360" cy="5029200"/>
+          </a:xfrm>
+          <a:prstGeom prst="rect">
+            <a:avLst/>
+          </a:prstGeom>
+          <a:noFill/>
+        </p:spPr>
+        <p:txBody>
+          <a:bodyPr wrap="square">
+            <a:spAutoFit/>
+          </a:bodyPr>
+          <a:lstStyle/>
+          <a:p>
+            <a:pPr>
+              <a:spcBef>
+                <a:spcPts val="0"/>
+              </a:spcBef>
+              <a:spcAft>
+                <a:spcPts val="0"/>
+              </a:spcAft>
+            </a:pPr>
+            <a:r>
+              <a:rPr sz="900">
+                <a:solidFill>
+                  <a:srgbClr val="2D2D2D"/>
+                </a:solidFill>
+                <a:latin typeface="Consolas"/>
+              </a:rPr>
+              <a:t>./exercises/load.sh</a:t>
+            </a:r>
+            <a:r>
+              <a:rPr sz="900">
+                <a:solidFill>
+                  <a:srgbClr val="2D2D2D"/>
+                </a:solidFill>
+                <a:latin typeface="Consolas"/>
+              </a:rPr>
+              <a:t> supplier intermediate/merchant-portal-locations/skeleton</a:t>
+            </a:r>
+          </a:p>
+          <a:p>
+            <a:pPr>
+              <a:spcBef>
+                <a:spcPts val="0"/>
+              </a:spcBef>
+              <a:spcAft>
+                <a:spcPts val="0"/>
+              </a:spcAft>
+            </a:pPr>
+            <a:r>
+              <a:rPr sz="900">
+                <a:solidFill>
+                  <a:srgbClr val="2D2D2D"/>
+                </a:solidFill>
+                <a:latin typeface="Consolas"/>
+              </a:rPr>
+              <a:t>docker/sdk</a:t>
+            </a:r>
+            <a:r>
+              <a:rPr sz="900">
+                <a:solidFill>
+                  <a:srgbClr val="2D2D2D"/>
+                </a:solidFill>
+                <a:latin typeface="Consolas"/>
+              </a:rPr>
+              <a:t> cli composer dump-autoload</a:t>
+            </a:r>
+          </a:p>
+          <a:p>
+            <a:pPr>
+              <a:spcBef>
+                <a:spcPts val="0"/>
+              </a:spcBef>
+              <a:spcAft>
+                <a:spcPts val="0"/>
+              </a:spcAft>
+            </a:pPr>
+            <a:r>
+              <a:rPr sz="900">
+                <a:solidFill>
+                  <a:srgbClr val="2D2D2D"/>
+                </a:solidFill>
+                <a:latin typeface="Consolas"/>
+              </a:rPr>
+              <a:t>docker/sdk</a:t>
+            </a:r>
+            <a:r>
+              <a:rPr sz="900">
+                <a:solidFill>
+                  <a:srgbClr val="2D2D2D"/>
+                </a:solidFill>
+                <a:latin typeface="Consolas"/>
+              </a:rPr>
+              <a:t> console transfer:generate</a:t>
+            </a:r>
+          </a:p>
+          <a:p>
+            <a:pPr>
+              <a:spcBef>
+                <a:spcPts val="0"/>
+              </a:spcBef>
+              <a:spcAft>
+                <a:spcPts val="0"/>
+              </a:spcAft>
+            </a:pPr>
+            <a:r>
+              <a:rPr sz="900">
+                <a:solidFill>
+                  <a:srgbClr val="2D2D2D"/>
+                </a:solidFill>
+                <a:latin typeface="Consolas"/>
+              </a:rPr>
+              <a:t>docker/sdk</a:t>
+            </a:r>
+            <a:r>
+              <a:rPr sz="900">
+                <a:solidFill>
+                  <a:srgbClr val="2D2D2D"/>
+                </a:solidFill>
+                <a:latin typeface="Consolas"/>
+              </a:rPr>
+              <a:t> console cache:empty-all</a:t>
+            </a:r>
+          </a:p>
+        </p:txBody>
+      </p:sp>
+    </p:spTree>
+  </p:cSld>
+  <p:clrMapOvr>
+    <a:masterClrMapping/>
+  </p:clrMapOvr>
+</p:sld>
+</file>
+
+<file path=ppt/slides/slide239.xml><?xml version="1.0" encoding="utf-8"?>
+<p:sld xmlns:a="http://schemas.openxmlformats.org/drawingml/2006/main" xmlns:p="http://schemas.openxmlformats.org/presentationml/2006/main" xmlns:r="http://schemas.openxmlformats.org/officeDocument/2006/relationships">
+  <p:cSld>
+    <p:spTree>
+      <p:nvGrpSpPr>
+        <p:cNvPr id="1" name=""/>
+        <p:cNvGrpSpPr/>
+        <p:nvPr/>
+      </p:nvGrpSpPr>
+      <p:grpSpPr/>
+      <p:sp>
+        <p:nvSpPr>
+          <p:cNvPr id="2" name="TextBox 1"/>
+          <p:cNvSpPr txBox="1"/>
+          <p:nvPr/>
+        </p:nvSpPr>
+        <p:spPr>
+          <a:xfrm>
+            <a:off x="640080" y="365760"/>
+            <a:ext cx="10881360" cy="731520"/>
+          </a:xfrm>
+          <a:prstGeom prst="rect">
+            <a:avLst/>
+          </a:prstGeom>
+          <a:noFill/>
+        </p:spPr>
+        <p:txBody>
+          <a:bodyPr wrap="square">
+            <a:spAutoFit/>
+          </a:bodyPr>
+          <a:lstStyle/>
+          <a:p>
+            <a:pPr>
+              <a:defRPr sz="2800" b="1">
+                <a:solidFill>
+                  <a:srgbClr val="00A89B"/>
+                </a:solidFill>
+              </a:defRPr>
+            </a:pPr>
+            <a:r>
+              <a:t>Background: Editable GuiTable Pattern</a:t>
+            </a:r>
+          </a:p>
+        </p:txBody>
+      </p:sp>
+      <p:sp>
+        <p:nvSpPr>
+          <p:cNvPr id="3" name="Rectangle 2"/>
+          <p:cNvSpPr/>
+          <p:nvPr/>
+        </p:nvSpPr>
+        <p:spPr>
+          <a:xfrm>
+            <a:off x="640080" y="1051560"/>
+            <a:ext cx="1828800" cy="25400"/>
+          </a:xfrm>
+          <a:prstGeom prst="rect">
+            <a:avLst/>
+          </a:prstGeom>
+          <a:solidFill>
+            <a:srgbClr val="00A89B"/>
+          </a:solidFill>
+          <a:ln>
+            <a:noFill/>
+          </a:ln>
+        </p:spPr>
+        <p:style>
+          <a:lnRef idx="1">
+            <a:schemeClr val="accent1"/>
+          </a:lnRef>
+          <a:fillRef idx="3">
+            <a:schemeClr val="accent1"/>
+          </a:fillRef>
+          <a:effectRef idx="2">
+            <a:schemeClr val="accent1"/>
+          </a:effectRef>
+          <a:fontRef idx="minor">
+            <a:schemeClr val="lt1"/>
+          </a:fontRef>
+        </p:style>
+        <p:txBody>
+          <a:bodyPr rtlCol="0" anchor="ctr"/>
+          <a:lstStyle/>
+          <a:p>
+            <a:pPr algn="ctr"/>
+          </a:p>
+        </p:txBody>
+      </p:sp>
+      <p:sp>
+        <p:nvSpPr>
+          <p:cNvPr id="4" name="TextBox 3"/>
+          <p:cNvSpPr txBox="1"/>
+          <p:nvPr/>
+        </p:nvSpPr>
+        <p:spPr>
+          <a:xfrm>
+            <a:off x="640080" y="1371600"/>
+            <a:ext cx="10881360" cy="5029200"/>
+          </a:xfrm>
+          <a:prstGeom prst="rect">
+            <a:avLst/>
+          </a:prstGeom>
+          <a:noFill/>
+        </p:spPr>
+        <p:txBody>
+          <a:bodyPr wrap="square">
+            <a:spAutoFit/>
+          </a:bodyPr>
+          <a:lstStyle/>
+          <a:p>
+            <a:pPr>
+              <a:spcAft>
+                <a:spcPts val="800"/>
+              </a:spcAft>
+              <a:defRPr sz="1600">
+                <a:solidFill>
+                  <a:srgbClr val="1A1A1A"/>
+                </a:solidFill>
+              </a:defRPr>
+            </a:pPr>
+            <a:r>
+              <a:t>A regular GuiTable displays read-only data. An editable GuiTable allows inline editing and adding of rows, with the data submitted as part of a parent form.</a:t>
+            </a:r>
+          </a:p>
+          <a:p>
+            <a:pPr>
+              <a:spcBef>
+                <a:spcPts val="0"/>
+              </a:spcBef>
+              <a:spcAft>
+                <a:spcPts val="0"/>
+              </a:spcAft>
+            </a:pPr>
+            <a:r>
+              <a:rPr sz="900">
+                <a:solidFill>
+                  <a:srgbClr val="2D2D2D"/>
+                </a:solidFill>
+                <a:latin typeface="Consolas"/>
+              </a:rPr>
+              <a:t>Edit Supplier drawer</a:t>
+            </a:r>
+          </a:p>
+          <a:p>
+            <a:pPr>
+              <a:spcBef>
+                <a:spcPts val="0"/>
+              </a:spcBef>
+              <a:spcAft>
+                <a:spcPts val="0"/>
+              </a:spcAft>
+            </a:pPr>
+            <a:r>
+              <a:rPr sz="900">
+                <a:solidFill>
+                  <a:srgbClr val="2D2D2D"/>
+                </a:solidFill>
+                <a:latin typeface="Consolas"/>
+              </a:rPr>
+              <a:t>├── Supplier Details card (name, description)</a:t>
+            </a:r>
+          </a:p>
+          <a:p>
+            <a:pPr>
+              <a:spcBef>
+                <a:spcPts val="0"/>
+              </a:spcBef>
+              <a:spcAft>
+                <a:spcPts val="0"/>
+              </a:spcAft>
+            </a:pPr>
+            <a:r>
+              <a:rPr sz="900">
+                <a:solidFill>
+                  <a:srgbClr val="2D2D2D"/>
+                </a:solidFill>
+                <a:latin typeface="Consolas"/>
+              </a:rPr>
+              <a:t>├── Contact Info card (email, phone)</a:t>
+            </a:r>
+          </a:p>
+          <a:p>
+            <a:pPr>
+              <a:spcBef>
+                <a:spcPts val="0"/>
+              </a:spcBef>
+              <a:spcAft>
+                <a:spcPts val="0"/>
+              </a:spcAft>
+            </a:pPr>
+            <a:r>
+              <a:rPr sz="900">
+                <a:solidFill>
+                  <a:srgbClr val="2D2D2D"/>
+                </a:solidFill>
+                <a:latin typeface="Consolas"/>
+              </a:rPr>
+              <a:t>├── Status card (isActive)</a:t>
+            </a:r>
+          </a:p>
+          <a:p>
+            <a:pPr>
+              <a:spcBef>
+                <a:spcPts val="0"/>
+              </a:spcBef>
+              <a:spcAft>
+                <a:spcPts val="0"/>
+              </a:spcAft>
+            </a:pPr>
+            <a:r>
+              <a:rPr sz="900">
+                <a:solidFill>
+                  <a:srgbClr val="2D2D2D"/>
+                </a:solidFill>
+                <a:latin typeface="Consolas"/>
+              </a:rPr>
+              <a:t>└── Locations card</a:t>
+            </a:r>
+          </a:p>
+          <a:p>
+            <a:pPr>
+              <a:spcBef>
+                <a:spcPts val="0"/>
+              </a:spcBef>
+              <a:spcAft>
+                <a:spcPts val="0"/>
+              </a:spcAft>
+            </a:pPr>
+            <a:r>
+              <a:rPr sz="900">
+                <a:solidFill>
+                  <a:srgbClr val="2D2D2D"/>
+                </a:solidFill>
+                <a:latin typeface="Consolas"/>
+              </a:rPr>
+              <a:t>    └── Editable GuiTable</a:t>
+            </a:r>
+          </a:p>
+          <a:p>
+            <a:pPr>
+              <a:spcBef>
+                <a:spcPts val="0"/>
+              </a:spcBef>
+              <a:spcAft>
+                <a:spcPts val="0"/>
+              </a:spcAft>
+            </a:pPr>
+            <a:r>
+              <a:rPr sz="900">
+                <a:solidFill>
+                  <a:srgbClr val="2D2D2D"/>
+                </a:solidFill>
+                <a:latin typeface="Consolas"/>
+              </a:rPr>
+              <a:t>        ├── Existing location rows (editable)</a:t>
+            </a:r>
+          </a:p>
+          <a:p>
+            <a:pPr>
+              <a:spcBef>
+                <a:spcPts val="0"/>
+              </a:spcBef>
+              <a:spcAft>
+                <a:spcPts val="0"/>
+              </a:spcAft>
+            </a:pPr>
+            <a:r>
+              <a:rPr sz="900">
+                <a:solidFill>
+                  <a:srgbClr val="2D2D2D"/>
+                </a:solidFill>
+                <a:latin typeface="Consolas"/>
+              </a:rPr>
+              <a:t>        ├── "Add Location" button → new empty row</a:t>
+            </a:r>
+          </a:p>
+          <a:p>
+            <a:pPr>
+              <a:spcBef>
+                <a:spcPts val="0"/>
+              </a:spcBef>
+              <a:spcAft>
+                <a:spcPts val="0"/>
+              </a:spcAft>
+            </a:pPr>
+            <a:r>
+              <a:rPr sz="900">
+                <a:solidFill>
+                  <a:srgbClr val="2D2D2D"/>
+                </a:solidFill>
+                <a:latin typeface="Consolas"/>
+              </a:rPr>
+              <a:t>        └── Hidden form inputs: supplierForm[locations][0][city], etc.</a:t>
+            </a:r>
+          </a:p>
+          <a:p>
+            <a:pPr>
+              <a:spcAft>
+                <a:spcPts val="800"/>
+              </a:spcAft>
+              <a:defRPr sz="1600">
+                <a:solidFill>
+                  <a:srgbClr val="1A1A1A"/>
+                </a:solidFill>
+              </a:defRPr>
+            </a:pPr>
+            <a:r>
+              <a:t>When the form is submitted, the table data is sent as nested form fields. A data transformer converts between the transfer objects and the array format the table uses.</a:t>
             </a:r>
           </a:p>
         </p:txBody>
@@ -32646,6 +39933,1377 @@
             </a:pPr>
             <a:r>
               <a:t>We will explore this in detail in the Publish &amp; Synchronize exercise.</a:t>
+            </a:r>
+          </a:p>
+        </p:txBody>
+      </p:sp>
+    </p:spTree>
+  </p:cSld>
+  <p:clrMapOvr>
+    <a:masterClrMapping/>
+  </p:clrMapOvr>
+</p:sld>
+</file>
+
+<file path=ppt/slides/slide240.xml><?xml version="1.0" encoding="utf-8"?>
+<p:sld xmlns:a="http://schemas.openxmlformats.org/drawingml/2006/main" xmlns:p="http://schemas.openxmlformats.org/presentationml/2006/main" xmlns:r="http://schemas.openxmlformats.org/officeDocument/2006/relationships">
+  <p:cSld>
+    <p:spTree>
+      <p:nvGrpSpPr>
+        <p:cNvPr id="1" name=""/>
+        <p:cNvGrpSpPr/>
+        <p:nvPr/>
+      </p:nvGrpSpPr>
+      <p:grpSpPr/>
+      <p:sp>
+        <p:nvSpPr>
+          <p:cNvPr id="2" name="TextBox 1"/>
+          <p:cNvSpPr txBox="1"/>
+          <p:nvPr/>
+        </p:nvSpPr>
+        <p:spPr>
+          <a:xfrm>
+            <a:off x="640080" y="365760"/>
+            <a:ext cx="10881360" cy="731520"/>
+          </a:xfrm>
+          <a:prstGeom prst="rect">
+            <a:avLst/>
+          </a:prstGeom>
+          <a:noFill/>
+        </p:spPr>
+        <p:txBody>
+          <a:bodyPr wrap="square">
+            <a:spAutoFit/>
+          </a:bodyPr>
+          <a:lstStyle/>
+          <a:p>
+            <a:pPr>
+              <a:defRPr sz="2800" b="1">
+                <a:solidFill>
+                  <a:srgbClr val="00A89B"/>
+                </a:solidFill>
+              </a:defRPr>
+            </a:pPr>
+            <a:r>
+              <a:t>Working on the Exercise</a:t>
+            </a:r>
+          </a:p>
+        </p:txBody>
+      </p:sp>
+      <p:sp>
+        <p:nvSpPr>
+          <p:cNvPr id="3" name="Rectangle 2"/>
+          <p:cNvSpPr/>
+          <p:nvPr/>
+        </p:nvSpPr>
+        <p:spPr>
+          <a:xfrm>
+            <a:off x="640080" y="1051560"/>
+            <a:ext cx="1828800" cy="25400"/>
+          </a:xfrm>
+          <a:prstGeom prst="rect">
+            <a:avLst/>
+          </a:prstGeom>
+          <a:solidFill>
+            <a:srgbClr val="00A89B"/>
+          </a:solidFill>
+          <a:ln>
+            <a:noFill/>
+          </a:ln>
+        </p:spPr>
+        <p:style>
+          <a:lnRef idx="1">
+            <a:schemeClr val="accent1"/>
+          </a:lnRef>
+          <a:fillRef idx="3">
+            <a:schemeClr val="accent1"/>
+          </a:fillRef>
+          <a:effectRef idx="2">
+            <a:schemeClr val="accent1"/>
+          </a:effectRef>
+          <a:fontRef idx="minor">
+            <a:schemeClr val="lt1"/>
+          </a:fontRef>
+        </p:style>
+        <p:txBody>
+          <a:bodyPr rtlCol="0" anchor="ctr"/>
+          <a:lstStyle/>
+          <a:p>
+            <a:pPr algn="ctr"/>
+          </a:p>
+        </p:txBody>
+      </p:sp>
+      <p:sp>
+        <p:nvSpPr>
+          <p:cNvPr id="4" name="TextBox 3"/>
+          <p:cNvSpPr txBox="1"/>
+          <p:nvPr/>
+        </p:nvSpPr>
+        <p:spPr>
+          <a:xfrm>
+            <a:off x="640080" y="1371600"/>
+            <a:ext cx="10881360" cy="5029200"/>
+          </a:xfrm>
+          <a:prstGeom prst="rect">
+            <a:avLst/>
+          </a:prstGeom>
+          <a:noFill/>
+        </p:spPr>
+        <p:txBody>
+          <a:bodyPr wrap="square">
+            <a:spAutoFit/>
+          </a:bodyPr>
+          <a:lstStyle/>
+          <a:p>
+            <a:pPr>
+              <a:spcBef>
+                <a:spcPts val="1200"/>
+              </a:spcBef>
+              <a:spcAft>
+                <a:spcPts val="600"/>
+              </a:spcAft>
+              <a:defRPr sz="2000" b="1">
+                <a:solidFill>
+                  <a:srgbClr val="1A1A1A"/>
+                </a:solidFill>
+              </a:defRPr>
+            </a:pPr>
+            <a:r>
+              <a:t>Part 1: Location GuiTable Configuration</a:t>
+            </a:r>
+          </a:p>
+          <a:p>
+            <a:pPr>
+              <a:spcAft>
+                <a:spcPts val="800"/>
+              </a:spcAft>
+              <a:defRPr sz="1600">
+                <a:solidFill>
+                  <a:srgbClr val="1A1A1A"/>
+                </a:solidFill>
+              </a:defRPr>
+            </a:pPr>
+            <a:r>
+              <a:t>Coding time:</a:t>
+            </a:r>
+          </a:p>
+          <a:p>
+            <a:pPr>
+              <a:spcAft>
+                <a:spcPts val="800"/>
+              </a:spcAft>
+              <a:defRPr sz="1600">
+                <a:solidFill>
+                  <a:srgbClr val="1A1A1A"/>
+                </a:solidFill>
+              </a:defRPr>
+            </a:pPr>
+            <a:r>
+              <a:t>Open src/SprykerAcademy/Zed/SupplierMerchantPortalGui/Communication/ConfigurationProvider/SupplierLocationGuiTableConfigurationProvider.php :</a:t>
+            </a:r>
+          </a:p>
+          <a:p>
+            <a:pPr>
+              <a:spcAft>
+                <a:spcPts val="400"/>
+              </a:spcAft>
+              <a:defRPr sz="1500">
+                <a:solidFill>
+                  <a:srgbClr val="1A1A1A"/>
+                </a:solidFill>
+              </a:defRPr>
+            </a:pPr>
+            <a:r>
+              <a:t>• Add editable columns using addEditableColumnInput() : city → text input country → text input address → text input zipCode → text input isDefault → checkbox input</a:t>
+            </a:r>
+          </a:p>
+          <a:p>
+            <a:pPr>
+              <a:spcAft>
+                <a:spcPts val="400"/>
+              </a:spcAft>
+              <a:defRPr sz="1500">
+                <a:solidFill>
+                  <a:srgbClr val="1A1A1A"/>
+                </a:solidFill>
+              </a:defRPr>
+            </a:pPr>
+            <a:r>
+              <a:t>• Enable adding new rows: $guiTableConfigurationBuilder -&gt;enableAddingNewRows( static :: FORM_INPUT_NAME , // 'supplierForm[locations]' $initialData , [ 'title' =&gt; 'Add Location' , 'variant' =&gt; 'outline' ] , // Add button [ 'title' =&gt; 'Cancel' , 'variant' =&gt; 'outline' ] , // Cancel button ) ;</a:t>
+            </a:r>
+          </a:p>
+        </p:txBody>
+      </p:sp>
+    </p:spTree>
+  </p:cSld>
+  <p:clrMapOvr>
+    <a:masterClrMapping/>
+  </p:clrMapOvr>
+</p:sld>
+</file>
+
+<file path=ppt/slides/slide241.xml><?xml version="1.0" encoding="utf-8"?>
+<p:sld xmlns:a="http://schemas.openxmlformats.org/drawingml/2006/main" xmlns:p="http://schemas.openxmlformats.org/presentationml/2006/main" xmlns:r="http://schemas.openxmlformats.org/officeDocument/2006/relationships">
+  <p:cSld>
+    <p:spTree>
+      <p:nvGrpSpPr>
+        <p:cNvPr id="1" name=""/>
+        <p:cNvGrpSpPr/>
+        <p:nvPr/>
+      </p:nvGrpSpPr>
+      <p:grpSpPr/>
+      <p:sp>
+        <p:nvSpPr>
+          <p:cNvPr id="2" name="TextBox 1"/>
+          <p:cNvSpPr txBox="1"/>
+          <p:nvPr/>
+        </p:nvSpPr>
+        <p:spPr>
+          <a:xfrm>
+            <a:off x="640080" y="365760"/>
+            <a:ext cx="10881360" cy="731520"/>
+          </a:xfrm>
+          <a:prstGeom prst="rect">
+            <a:avLst/>
+          </a:prstGeom>
+          <a:noFill/>
+        </p:spPr>
+        <p:txBody>
+          <a:bodyPr wrap="square">
+            <a:spAutoFit/>
+          </a:bodyPr>
+          <a:lstStyle/>
+          <a:p>
+            <a:pPr>
+              <a:defRPr sz="2800" b="1">
+                <a:solidFill>
+                  <a:srgbClr val="00A89B"/>
+                </a:solidFill>
+              </a:defRPr>
+            </a:pPr>
+            <a:r>
+              <a:t>Working on the Exercise (cont.)</a:t>
+            </a:r>
+          </a:p>
+        </p:txBody>
+      </p:sp>
+      <p:sp>
+        <p:nvSpPr>
+          <p:cNvPr id="3" name="Rectangle 2"/>
+          <p:cNvSpPr/>
+          <p:nvPr/>
+        </p:nvSpPr>
+        <p:spPr>
+          <a:xfrm>
+            <a:off x="640080" y="1051560"/>
+            <a:ext cx="1828800" cy="25400"/>
+          </a:xfrm>
+          <a:prstGeom prst="rect">
+            <a:avLst/>
+          </a:prstGeom>
+          <a:solidFill>
+            <a:srgbClr val="00A89B"/>
+          </a:solidFill>
+          <a:ln>
+            <a:noFill/>
+          </a:ln>
+        </p:spPr>
+        <p:style>
+          <a:lnRef idx="1">
+            <a:schemeClr val="accent1"/>
+          </a:lnRef>
+          <a:fillRef idx="3">
+            <a:schemeClr val="accent1"/>
+          </a:fillRef>
+          <a:effectRef idx="2">
+            <a:schemeClr val="accent1"/>
+          </a:effectRef>
+          <a:fontRef idx="minor">
+            <a:schemeClr val="lt1"/>
+          </a:fontRef>
+        </p:style>
+        <p:txBody>
+          <a:bodyPr rtlCol="0" anchor="ctr"/>
+          <a:lstStyle/>
+          <a:p>
+            <a:pPr algn="ctr"/>
+          </a:p>
+        </p:txBody>
+      </p:sp>
+      <p:sp>
+        <p:nvSpPr>
+          <p:cNvPr id="4" name="TextBox 3"/>
+          <p:cNvSpPr txBox="1"/>
+          <p:nvPr/>
+        </p:nvSpPr>
+        <p:spPr>
+          <a:xfrm>
+            <a:off x="640080" y="1371600"/>
+            <a:ext cx="10881360" cy="5029200"/>
+          </a:xfrm>
+          <a:prstGeom prst="rect">
+            <a:avLst/>
+          </a:prstGeom>
+          <a:noFill/>
+        </p:spPr>
+        <p:txBody>
+          <a:bodyPr wrap="square">
+            <a:spAutoFit/>
+          </a:bodyPr>
+          <a:lstStyle/>
+          <a:p>
+            <a:pPr>
+              <a:spcAft>
+                <a:spcPts val="800"/>
+              </a:spcAft>
+              <a:defRPr sz="1400" i="1">
+                <a:solidFill>
+                  <a:srgbClr val="888888"/>
+                </a:solidFill>
+              </a:defRPr>
+            </a:pPr>
+            <a:r>
+              <a:t>❝ enableAddingNewRows() tells the GuiTable to render an “Add” button that creates empty editable rows. The FORM_INPUT_NAME determines how the data is submitted as form fields.</a:t>
+            </a:r>
+          </a:p>
+          <a:p>
+            <a:pPr>
+              <a:spcAft>
+                <a:spcPts val="800"/>
+              </a:spcAft>
+              <a:defRPr sz="1400" i="1">
+                <a:solidFill>
+                  <a:srgbClr val="888888"/>
+                </a:solidFill>
+              </a:defRPr>
+            </a:pPr>
+            <a:r>
+              <a:t>❝ addEditableColumnInput() vs addColumnText() : Editable columns render as form inputs (text, checkbox, select) instead of plain text.</a:t>
+            </a:r>
+          </a:p>
+        </p:txBody>
+      </p:sp>
+    </p:spTree>
+  </p:cSld>
+  <p:clrMapOvr>
+    <a:masterClrMapping/>
+  </p:clrMapOvr>
+</p:sld>
+</file>
+
+<file path=ppt/slides/slide242.xml><?xml version="1.0" encoding="utf-8"?>
+<p:sld xmlns:a="http://schemas.openxmlformats.org/drawingml/2006/main" xmlns:p="http://schemas.openxmlformats.org/presentationml/2006/main" xmlns:r="http://schemas.openxmlformats.org/officeDocument/2006/relationships">
+  <p:cSld>
+    <p:spTree>
+      <p:nvGrpSpPr>
+        <p:cNvPr id="1" name=""/>
+        <p:cNvGrpSpPr/>
+        <p:nvPr/>
+      </p:nvGrpSpPr>
+      <p:grpSpPr/>
+      <p:sp>
+        <p:nvSpPr>
+          <p:cNvPr id="2" name="TextBox 1"/>
+          <p:cNvSpPr txBox="1"/>
+          <p:nvPr/>
+        </p:nvSpPr>
+        <p:spPr>
+          <a:xfrm>
+            <a:off x="640080" y="365760"/>
+            <a:ext cx="10881360" cy="731520"/>
+          </a:xfrm>
+          <a:prstGeom prst="rect">
+            <a:avLst/>
+          </a:prstGeom>
+          <a:noFill/>
+        </p:spPr>
+        <p:txBody>
+          <a:bodyPr wrap="square">
+            <a:spAutoFit/>
+          </a:bodyPr>
+          <a:lstStyle/>
+          <a:p>
+            <a:pPr>
+              <a:defRPr sz="2800" b="1">
+                <a:solidFill>
+                  <a:srgbClr val="00A89B"/>
+                </a:solidFill>
+              </a:defRPr>
+            </a:pPr>
+            <a:r>
+              <a:t>Part 2: Location Data Provider</a:t>
+            </a:r>
+          </a:p>
+        </p:txBody>
+      </p:sp>
+      <p:sp>
+        <p:nvSpPr>
+          <p:cNvPr id="3" name="Rectangle 2"/>
+          <p:cNvSpPr/>
+          <p:nvPr/>
+        </p:nvSpPr>
+        <p:spPr>
+          <a:xfrm>
+            <a:off x="640080" y="1051560"/>
+            <a:ext cx="1828800" cy="25400"/>
+          </a:xfrm>
+          <a:prstGeom prst="rect">
+            <a:avLst/>
+          </a:prstGeom>
+          <a:solidFill>
+            <a:srgbClr val="00A89B"/>
+          </a:solidFill>
+          <a:ln>
+            <a:noFill/>
+          </a:ln>
+        </p:spPr>
+        <p:style>
+          <a:lnRef idx="1">
+            <a:schemeClr val="accent1"/>
+          </a:lnRef>
+          <a:fillRef idx="3">
+            <a:schemeClr val="accent1"/>
+          </a:fillRef>
+          <a:effectRef idx="2">
+            <a:schemeClr val="accent1"/>
+          </a:effectRef>
+          <a:fontRef idx="minor">
+            <a:schemeClr val="lt1"/>
+          </a:fontRef>
+        </p:style>
+        <p:txBody>
+          <a:bodyPr rtlCol="0" anchor="ctr"/>
+          <a:lstStyle/>
+          <a:p>
+            <a:pPr algn="ctr"/>
+          </a:p>
+        </p:txBody>
+      </p:sp>
+      <p:sp>
+        <p:nvSpPr>
+          <p:cNvPr id="4" name="TextBox 3"/>
+          <p:cNvSpPr txBox="1"/>
+          <p:nvPr/>
+        </p:nvSpPr>
+        <p:spPr>
+          <a:xfrm>
+            <a:off x="640080" y="1371600"/>
+            <a:ext cx="10881360" cy="5029200"/>
+          </a:xfrm>
+          <a:prstGeom prst="rect">
+            <a:avLst/>
+          </a:prstGeom>
+          <a:noFill/>
+        </p:spPr>
+        <p:txBody>
+          <a:bodyPr wrap="square">
+            <a:spAutoFit/>
+          </a:bodyPr>
+          <a:lstStyle/>
+          <a:p>
+            <a:pPr>
+              <a:spcAft>
+                <a:spcPts val="800"/>
+              </a:spcAft>
+              <a:defRPr sz="1600">
+                <a:solidFill>
+                  <a:srgbClr val="1A1A1A"/>
+                </a:solidFill>
+              </a:defRPr>
+            </a:pPr>
+            <a:r>
+              <a:t>Coding time:</a:t>
+            </a:r>
+          </a:p>
+          <a:p>
+            <a:pPr>
+              <a:spcAft>
+                <a:spcPts val="800"/>
+              </a:spcAft>
+              <a:defRPr sz="1600">
+                <a:solidFill>
+                  <a:srgbClr val="1A1A1A"/>
+                </a:solidFill>
+              </a:defRPr>
+            </a:pPr>
+            <a:r>
+              <a:t>Open src/SprykerAcademy/Zed/SupplierMerchantPortalGui/Communication/DataProvider/SupplierLocationGuiTableDataProvider.php :</a:t>
+            </a:r>
+          </a:p>
+          <a:p>
+            <a:pPr>
+              <a:spcAft>
+                <a:spcPts val="800"/>
+              </a:spcAft>
+              <a:defRPr sz="1600">
+                <a:solidFill>
+                  <a:srgbClr val="1A1A1A"/>
+                </a:solidFill>
+              </a:defRPr>
+            </a:pPr>
+            <a:r>
+              <a:t>In getData($idSupplier) : 1. Query PyzSupplierLocationQuery filtered by fkSupplier 2. Map each location entity to a GuiTableRowDataResponseTransfer with: idSupplierLocation , city , country , address , zipCode , isDefault</a:t>
+            </a:r>
+          </a:p>
+        </p:txBody>
+      </p:sp>
+    </p:spTree>
+  </p:cSld>
+  <p:clrMapOvr>
+    <a:masterClrMapping/>
+  </p:clrMapOvr>
+</p:sld>
+</file>
+
+<file path=ppt/slides/slide243.xml><?xml version="1.0" encoding="utf-8"?>
+<p:sld xmlns:a="http://schemas.openxmlformats.org/drawingml/2006/main" xmlns:p="http://schemas.openxmlformats.org/presentationml/2006/main" xmlns:r="http://schemas.openxmlformats.org/officeDocument/2006/relationships">
+  <p:cSld>
+    <p:spTree>
+      <p:nvGrpSpPr>
+        <p:cNvPr id="1" name=""/>
+        <p:cNvGrpSpPr/>
+        <p:nvPr/>
+      </p:nvGrpSpPr>
+      <p:grpSpPr/>
+      <p:sp>
+        <p:nvSpPr>
+          <p:cNvPr id="2" name="TextBox 1"/>
+          <p:cNvSpPr txBox="1"/>
+          <p:nvPr/>
+        </p:nvSpPr>
+        <p:spPr>
+          <a:xfrm>
+            <a:off x="640080" y="365760"/>
+            <a:ext cx="10881360" cy="731520"/>
+          </a:xfrm>
+          <a:prstGeom prst="rect">
+            <a:avLst/>
+          </a:prstGeom>
+          <a:noFill/>
+        </p:spPr>
+        <p:txBody>
+          <a:bodyPr wrap="square">
+            <a:spAutoFit/>
+          </a:bodyPr>
+          <a:lstStyle/>
+          <a:p>
+            <a:pPr>
+              <a:defRPr sz="2800" b="1">
+                <a:solidFill>
+                  <a:srgbClr val="00A89B"/>
+                </a:solidFill>
+              </a:defRPr>
+            </a:pPr>
+            <a:r>
+              <a:t>Part 3: Location Form Transformer</a:t>
+            </a:r>
+          </a:p>
+        </p:txBody>
+      </p:sp>
+      <p:sp>
+        <p:nvSpPr>
+          <p:cNvPr id="3" name="Rectangle 2"/>
+          <p:cNvSpPr/>
+          <p:nvPr/>
+        </p:nvSpPr>
+        <p:spPr>
+          <a:xfrm>
+            <a:off x="640080" y="1051560"/>
+            <a:ext cx="1828800" cy="25400"/>
+          </a:xfrm>
+          <a:prstGeom prst="rect">
+            <a:avLst/>
+          </a:prstGeom>
+          <a:solidFill>
+            <a:srgbClr val="00A89B"/>
+          </a:solidFill>
+          <a:ln>
+            <a:noFill/>
+          </a:ln>
+        </p:spPr>
+        <p:style>
+          <a:lnRef idx="1">
+            <a:schemeClr val="accent1"/>
+          </a:lnRef>
+          <a:fillRef idx="3">
+            <a:schemeClr val="accent1"/>
+          </a:fillRef>
+          <a:effectRef idx="2">
+            <a:schemeClr val="accent1"/>
+          </a:effectRef>
+          <a:fontRef idx="minor">
+            <a:schemeClr val="lt1"/>
+          </a:fontRef>
+        </p:style>
+        <p:txBody>
+          <a:bodyPr rtlCol="0" anchor="ctr"/>
+          <a:lstStyle/>
+          <a:p>
+            <a:pPr algn="ctr"/>
+          </a:p>
+        </p:txBody>
+      </p:sp>
+      <p:sp>
+        <p:nvSpPr>
+          <p:cNvPr id="4" name="TextBox 3"/>
+          <p:cNvSpPr txBox="1"/>
+          <p:nvPr/>
+        </p:nvSpPr>
+        <p:spPr>
+          <a:xfrm>
+            <a:off x="640080" y="1371600"/>
+            <a:ext cx="10881360" cy="5029200"/>
+          </a:xfrm>
+          <a:prstGeom prst="rect">
+            <a:avLst/>
+          </a:prstGeom>
+          <a:noFill/>
+        </p:spPr>
+        <p:txBody>
+          <a:bodyPr wrap="square">
+            <a:spAutoFit/>
+          </a:bodyPr>
+          <a:lstStyle/>
+          <a:p>
+            <a:pPr>
+              <a:spcAft>
+                <a:spcPts val="800"/>
+              </a:spcAft>
+              <a:defRPr sz="1600">
+                <a:solidFill>
+                  <a:srgbClr val="1A1A1A"/>
+                </a:solidFill>
+              </a:defRPr>
+            </a:pPr>
+            <a:r>
+              <a:t>The transformer converts between SupplierLocationTransfer[] (PHP) and the array format (editable table rows).</a:t>
+            </a:r>
+          </a:p>
+          <a:p>
+            <a:pPr>
+              <a:spcAft>
+                <a:spcPts val="800"/>
+              </a:spcAft>
+              <a:defRPr sz="1600">
+                <a:solidFill>
+                  <a:srgbClr val="1A1A1A"/>
+                </a:solidFill>
+              </a:defRPr>
+            </a:pPr>
+            <a:r>
+              <a:t>Coding time:</a:t>
+            </a:r>
+          </a:p>
+          <a:p>
+            <a:pPr>
+              <a:spcAft>
+                <a:spcPts val="800"/>
+              </a:spcAft>
+              <a:defRPr sz="1600">
+                <a:solidFill>
+                  <a:srgbClr val="1A1A1A"/>
+                </a:solidFill>
+              </a:defRPr>
+            </a:pPr>
+            <a:r>
+              <a:t>Open src/SprykerAcademy/Zed/SupplierMerchantPortalGui/Communication/Form/Transformer/SupplierLocationTransformer.php :</a:t>
+            </a:r>
+          </a:p>
+          <a:p>
+            <a:pPr>
+              <a:spcAft>
+                <a:spcPts val="400"/>
+              </a:spcAft>
+              <a:defRPr sz="1500">
+                <a:solidFill>
+                  <a:srgbClr val="1A1A1A"/>
+                </a:solidFill>
+              </a:defRPr>
+            </a:pPr>
+            <a:r>
+              <a:t>• transform() — convert ArrayObject&lt;SupplierLocationTransfer&gt; to array of arrays. Each array has: idSupplierLocation , city , country , address , zipCode , isDefault .</a:t>
+            </a:r>
+          </a:p>
+          <a:p>
+            <a:pPr>
+              <a:spcAft>
+                <a:spcPts val="400"/>
+              </a:spcAft>
+              <a:defRPr sz="1500">
+                <a:solidFill>
+                  <a:srgbClr val="1A1A1A"/>
+                </a:solidFill>
+              </a:defRPr>
+            </a:pPr>
+            <a:r>
+              <a:t>• reverseTransform() — convert submitted array data back to ArrayObject&lt;SupplierLocationTransfer&gt; . Create a SupplierLocationTransfer for each row.</a:t>
+            </a:r>
+          </a:p>
+        </p:txBody>
+      </p:sp>
+    </p:spTree>
+  </p:cSld>
+  <p:clrMapOvr>
+    <a:masterClrMapping/>
+  </p:clrMapOvr>
+</p:sld>
+</file>
+
+<file path=ppt/slides/slide244.xml><?xml version="1.0" encoding="utf-8"?>
+<p:sld xmlns:a="http://schemas.openxmlformats.org/drawingml/2006/main" xmlns:p="http://schemas.openxmlformats.org/presentationml/2006/main" xmlns:r="http://schemas.openxmlformats.org/officeDocument/2006/relationships">
+  <p:cSld>
+    <p:spTree>
+      <p:nvGrpSpPr>
+        <p:cNvPr id="1" name=""/>
+        <p:cNvGrpSpPr/>
+        <p:nvPr/>
+      </p:nvGrpSpPr>
+      <p:grpSpPr/>
+      <p:sp>
+        <p:nvSpPr>
+          <p:cNvPr id="2" name="TextBox 1"/>
+          <p:cNvSpPr txBox="1"/>
+          <p:nvPr/>
+        </p:nvSpPr>
+        <p:spPr>
+          <a:xfrm>
+            <a:off x="640080" y="365760"/>
+            <a:ext cx="10881360" cy="731520"/>
+          </a:xfrm>
+          <a:prstGeom prst="rect">
+            <a:avLst/>
+          </a:prstGeom>
+          <a:noFill/>
+        </p:spPr>
+        <p:txBody>
+          <a:bodyPr wrap="square">
+            <a:spAutoFit/>
+          </a:bodyPr>
+          <a:lstStyle/>
+          <a:p>
+            <a:pPr>
+              <a:defRPr sz="2800" b="1">
+                <a:solidFill>
+                  <a:srgbClr val="00A89B"/>
+                </a:solidFill>
+              </a:defRPr>
+            </a:pPr>
+            <a:r>
+              <a:t>Part 3: Location Form Transformer (cont.)</a:t>
+            </a:r>
+          </a:p>
+        </p:txBody>
+      </p:sp>
+      <p:sp>
+        <p:nvSpPr>
+          <p:cNvPr id="3" name="Rectangle 2"/>
+          <p:cNvSpPr/>
+          <p:nvPr/>
+        </p:nvSpPr>
+        <p:spPr>
+          <a:xfrm>
+            <a:off x="640080" y="1051560"/>
+            <a:ext cx="1828800" cy="25400"/>
+          </a:xfrm>
+          <a:prstGeom prst="rect">
+            <a:avLst/>
+          </a:prstGeom>
+          <a:solidFill>
+            <a:srgbClr val="00A89B"/>
+          </a:solidFill>
+          <a:ln>
+            <a:noFill/>
+          </a:ln>
+        </p:spPr>
+        <p:style>
+          <a:lnRef idx="1">
+            <a:schemeClr val="accent1"/>
+          </a:lnRef>
+          <a:fillRef idx="3">
+            <a:schemeClr val="accent1"/>
+          </a:fillRef>
+          <a:effectRef idx="2">
+            <a:schemeClr val="accent1"/>
+          </a:effectRef>
+          <a:fontRef idx="minor">
+            <a:schemeClr val="lt1"/>
+          </a:fontRef>
+        </p:style>
+        <p:txBody>
+          <a:bodyPr rtlCol="0" anchor="ctr"/>
+          <a:lstStyle/>
+          <a:p>
+            <a:pPr algn="ctr"/>
+          </a:p>
+        </p:txBody>
+      </p:sp>
+      <p:sp>
+        <p:nvSpPr>
+          <p:cNvPr id="4" name="TextBox 3"/>
+          <p:cNvSpPr txBox="1"/>
+          <p:nvPr/>
+        </p:nvSpPr>
+        <p:spPr>
+          <a:xfrm>
+            <a:off x="640080" y="1371600"/>
+            <a:ext cx="10881360" cy="5029200"/>
+          </a:xfrm>
+          <a:prstGeom prst="rect">
+            <a:avLst/>
+          </a:prstGeom>
+          <a:noFill/>
+        </p:spPr>
+        <p:txBody>
+          <a:bodyPr wrap="square">
+            <a:spAutoFit/>
+          </a:bodyPr>
+          <a:lstStyle/>
+          <a:p>
+            <a:pPr>
+              <a:spcAft>
+                <a:spcPts val="800"/>
+              </a:spcAft>
+              <a:defRPr sz="1400" i="1">
+                <a:solidFill>
+                  <a:srgbClr val="888888"/>
+                </a:solidFill>
+              </a:defRPr>
+            </a:pPr>
+            <a:r>
+              <a:t>❝ DataTransformerInterface: Symfony’s form component calls transform() when rendering the form (PHP → view) and reverseTransform() when handling submission (view → PHP).</a:t>
+            </a:r>
+          </a:p>
+        </p:txBody>
+      </p:sp>
+    </p:spTree>
+  </p:cSld>
+  <p:clrMapOvr>
+    <a:masterClrMapping/>
+  </p:clrMapOvr>
+</p:sld>
+</file>
+
+<file path=ppt/slides/slide245.xml><?xml version="1.0" encoding="utf-8"?>
+<p:sld xmlns:a="http://schemas.openxmlformats.org/drawingml/2006/main" xmlns:p="http://schemas.openxmlformats.org/presentationml/2006/main" xmlns:r="http://schemas.openxmlformats.org/officeDocument/2006/relationships">
+  <p:cSld>
+    <p:spTree>
+      <p:nvGrpSpPr>
+        <p:cNvPr id="1" name=""/>
+        <p:cNvGrpSpPr/>
+        <p:nvPr/>
+      </p:nvGrpSpPr>
+      <p:grpSpPr/>
+      <p:sp>
+        <p:nvSpPr>
+          <p:cNvPr id="2" name="TextBox 1"/>
+          <p:cNvSpPr txBox="1"/>
+          <p:nvPr/>
+        </p:nvSpPr>
+        <p:spPr>
+          <a:xfrm>
+            <a:off x="640080" y="365760"/>
+            <a:ext cx="10881360" cy="731520"/>
+          </a:xfrm>
+          <a:prstGeom prst="rect">
+            <a:avLst/>
+          </a:prstGeom>
+          <a:noFill/>
+        </p:spPr>
+        <p:txBody>
+          <a:bodyPr wrap="square">
+            <a:spAutoFit/>
+          </a:bodyPr>
+          <a:lstStyle/>
+          <a:p>
+            <a:pPr>
+              <a:defRPr sz="2800" b="1">
+                <a:solidFill>
+                  <a:srgbClr val="00A89B"/>
+                </a:solidFill>
+              </a:defRPr>
+            </a:pPr>
+            <a:r>
+              <a:t>Part 4: Angular Component Wiring</a:t>
+            </a:r>
+          </a:p>
+        </p:txBody>
+      </p:sp>
+      <p:sp>
+        <p:nvSpPr>
+          <p:cNvPr id="3" name="Rectangle 2"/>
+          <p:cNvSpPr/>
+          <p:nvPr/>
+        </p:nvSpPr>
+        <p:spPr>
+          <a:xfrm>
+            <a:off x="640080" y="1051560"/>
+            <a:ext cx="1828800" cy="25400"/>
+          </a:xfrm>
+          <a:prstGeom prst="rect">
+            <a:avLst/>
+          </a:prstGeom>
+          <a:solidFill>
+            <a:srgbClr val="00A89B"/>
+          </a:solidFill>
+          <a:ln>
+            <a:noFill/>
+          </a:ln>
+        </p:spPr>
+        <p:style>
+          <a:lnRef idx="1">
+            <a:schemeClr val="accent1"/>
+          </a:lnRef>
+          <a:fillRef idx="3">
+            <a:schemeClr val="accent1"/>
+          </a:fillRef>
+          <a:effectRef idx="2">
+            <a:schemeClr val="accent1"/>
+          </a:effectRef>
+          <a:fontRef idx="minor">
+            <a:schemeClr val="lt1"/>
+          </a:fontRef>
+        </p:style>
+        <p:txBody>
+          <a:bodyPr rtlCol="0" anchor="ctr"/>
+          <a:lstStyle/>
+          <a:p>
+            <a:pPr algn="ctr"/>
+          </a:p>
+        </p:txBody>
+      </p:sp>
+      <p:sp>
+        <p:nvSpPr>
+          <p:cNvPr id="4" name="TextBox 3"/>
+          <p:cNvSpPr txBox="1"/>
+          <p:nvPr/>
+        </p:nvSpPr>
+        <p:spPr>
+          <a:xfrm>
+            <a:off x="640080" y="1371600"/>
+            <a:ext cx="10881360" cy="5029200"/>
+          </a:xfrm>
+          <a:prstGeom prst="rect">
+            <a:avLst/>
+          </a:prstGeom>
+          <a:noFill/>
+        </p:spPr>
+        <p:txBody>
+          <a:bodyPr wrap="square">
+            <a:spAutoFit/>
+          </a:bodyPr>
+          <a:lstStyle/>
+          <a:p>
+            <a:pPr>
+              <a:spcAft>
+                <a:spcPts val="800"/>
+              </a:spcAft>
+              <a:defRPr sz="1600">
+                <a:solidFill>
+                  <a:srgbClr val="1A1A1A"/>
+                </a:solidFill>
+              </a:defRPr>
+            </a:pPr>
+            <a:r>
+              <a:t>Coding time:</a:t>
+            </a:r>
+          </a:p>
+          <a:p>
+            <a:pPr>
+              <a:spcAft>
+                <a:spcPts val="800"/>
+              </a:spcAft>
+              <a:defRPr sz="1600">
+                <a:solidFill>
+                  <a:srgbClr val="1A1A1A"/>
+                </a:solidFill>
+              </a:defRPr>
+            </a:pPr>
+            <a:r>
+              <a:t>Open components.module.ts and add SupplierLocationsTableComponent to WebComponentsModule.withComponents([...]) .</a:t>
+            </a:r>
+          </a:p>
+          <a:p>
+            <a:pPr>
+              <a:spcAft>
+                <a:spcPts val="800"/>
+              </a:spcAft>
+              <a:defRPr sz="1600">
+                <a:solidFill>
+                  <a:srgbClr val="1A1A1A"/>
+                </a:solidFill>
+              </a:defRPr>
+            </a:pPr>
+            <a:r>
+              <a:t>The template already includes the locations card with &lt;web-mp-supplier-locations-table&gt; — it renders conditionally when supplierLocationTableConfiguration is present (only in the edit drawer, not create).</a:t>
+            </a:r>
+          </a:p>
+        </p:txBody>
+      </p:sp>
+    </p:spTree>
+  </p:cSld>
+  <p:clrMapOvr>
+    <a:masterClrMapping/>
+  </p:clrMapOvr>
+</p:sld>
+</file>
+
+<file path=ppt/slides/slide246.xml><?xml version="1.0" encoding="utf-8"?>
+<p:sld xmlns:a="http://schemas.openxmlformats.org/drawingml/2006/main" xmlns:p="http://schemas.openxmlformats.org/presentationml/2006/main" xmlns:r="http://schemas.openxmlformats.org/officeDocument/2006/relationships">
+  <p:cSld>
+    <p:spTree>
+      <p:nvGrpSpPr>
+        <p:cNvPr id="1" name=""/>
+        <p:cNvGrpSpPr/>
+        <p:nvPr/>
+      </p:nvGrpSpPr>
+      <p:grpSpPr/>
+      <p:sp>
+        <p:nvSpPr>
+          <p:cNvPr id="2" name="TextBox 1"/>
+          <p:cNvSpPr txBox="1"/>
+          <p:nvPr/>
+        </p:nvSpPr>
+        <p:spPr>
+          <a:xfrm>
+            <a:off x="640080" y="365760"/>
+            <a:ext cx="10881360" cy="731520"/>
+          </a:xfrm>
+          <a:prstGeom prst="rect">
+            <a:avLst/>
+          </a:prstGeom>
+          <a:noFill/>
+        </p:spPr>
+        <p:txBody>
+          <a:bodyPr wrap="square">
+            <a:spAutoFit/>
+          </a:bodyPr>
+          <a:lstStyle/>
+          <a:p>
+            <a:pPr>
+              <a:defRPr sz="2800" b="1">
+                <a:solidFill>
+                  <a:srgbClr val="00A89B"/>
+                </a:solidFill>
+              </a:defRPr>
+            </a:pPr>
+            <a:r>
+              <a:t>Testing</a:t>
+            </a:r>
+          </a:p>
+        </p:txBody>
+      </p:sp>
+      <p:sp>
+        <p:nvSpPr>
+          <p:cNvPr id="3" name="Rectangle 2"/>
+          <p:cNvSpPr/>
+          <p:nvPr/>
+        </p:nvSpPr>
+        <p:spPr>
+          <a:xfrm>
+            <a:off x="640080" y="1051560"/>
+            <a:ext cx="1828800" cy="25400"/>
+          </a:xfrm>
+          <a:prstGeom prst="rect">
+            <a:avLst/>
+          </a:prstGeom>
+          <a:solidFill>
+            <a:srgbClr val="00A89B"/>
+          </a:solidFill>
+          <a:ln>
+            <a:noFill/>
+          </a:ln>
+        </p:spPr>
+        <p:style>
+          <a:lnRef idx="1">
+            <a:schemeClr val="accent1"/>
+          </a:lnRef>
+          <a:fillRef idx="3">
+            <a:schemeClr val="accent1"/>
+          </a:fillRef>
+          <a:effectRef idx="2">
+            <a:schemeClr val="accent1"/>
+          </a:effectRef>
+          <a:fontRef idx="minor">
+            <a:schemeClr val="lt1"/>
+          </a:fontRef>
+        </p:style>
+        <p:txBody>
+          <a:bodyPr rtlCol="0" anchor="ctr"/>
+          <a:lstStyle/>
+          <a:p>
+            <a:pPr algn="ctr"/>
+          </a:p>
+        </p:txBody>
+      </p:sp>
+      <p:sp>
+        <p:nvSpPr>
+          <p:cNvPr id="4" name="TextBox 3"/>
+          <p:cNvSpPr txBox="1"/>
+          <p:nvPr/>
+        </p:nvSpPr>
+        <p:spPr>
+          <a:xfrm>
+            <a:off x="640080" y="1371600"/>
+            <a:ext cx="10881360" cy="5029200"/>
+          </a:xfrm>
+          <a:prstGeom prst="rect">
+            <a:avLst/>
+          </a:prstGeom>
+          <a:noFill/>
+        </p:spPr>
+        <p:txBody>
+          <a:bodyPr wrap="square">
+            <a:spAutoFit/>
+          </a:bodyPr>
+          <a:lstStyle/>
+          <a:p>
+            <a:pPr>
+              <a:spcBef>
+                <a:spcPts val="0"/>
+              </a:spcBef>
+              <a:spcAft>
+                <a:spcPts val="0"/>
+              </a:spcAft>
+            </a:pPr>
+            <a:r>
+              <a:rPr sz="900">
+                <a:solidFill>
+                  <a:srgbClr val="2D2D2D"/>
+                </a:solidFill>
+                <a:latin typeface="Consolas"/>
+              </a:rPr>
+              <a:t>docker/sdk</a:t>
+            </a:r>
+            <a:r>
+              <a:rPr sz="900">
+                <a:solidFill>
+                  <a:srgbClr val="2D2D2D"/>
+                </a:solidFill>
+                <a:latin typeface="Consolas"/>
+              </a:rPr>
+              <a:t> console cache:empty-all</a:t>
+            </a:r>
+          </a:p>
+          <a:p>
+            <a:pPr>
+              <a:spcAft>
+                <a:spcPts val="400"/>
+              </a:spcAft>
+              <a:defRPr sz="1500">
+                <a:solidFill>
+                  <a:srgbClr val="1A1A1A"/>
+                </a:solidFill>
+              </a:defRPr>
+            </a:pPr>
+            <a:r>
+              <a:t>• Edit an existing supplier in the Merchant Portal</a:t>
+            </a:r>
+          </a:p>
+          <a:p>
+            <a:pPr>
+              <a:spcAft>
+                <a:spcPts val="400"/>
+              </a:spcAft>
+              <a:defRPr sz="1500">
+                <a:solidFill>
+                  <a:srgbClr val="1A1A1A"/>
+                </a:solidFill>
+              </a:defRPr>
+            </a:pPr>
+            <a:r>
+              <a:t>• The “Locations” card should appear with existing locations</a:t>
+            </a:r>
+          </a:p>
+          <a:p>
+            <a:pPr>
+              <a:spcAft>
+                <a:spcPts val="400"/>
+              </a:spcAft>
+              <a:defRPr sz="1500">
+                <a:solidFill>
+                  <a:srgbClr val="1A1A1A"/>
+                </a:solidFill>
+              </a:defRPr>
+            </a:pPr>
+            <a:r>
+              <a:t>• Click “Add Location” → a new editable row should appear</a:t>
+            </a:r>
+          </a:p>
+          <a:p>
+            <a:pPr>
+              <a:spcAft>
+                <a:spcPts val="400"/>
+              </a:spcAft>
+              <a:defRPr sz="1500">
+                <a:solidFill>
+                  <a:srgbClr val="1A1A1A"/>
+                </a:solidFill>
+              </a:defRPr>
+            </a:pPr>
+            <a:r>
+              <a:t>• Fill in the location fields and save</a:t>
+            </a:r>
+          </a:p>
+          <a:p>
+            <a:pPr>
+              <a:spcAft>
+                <a:spcPts val="400"/>
+              </a:spcAft>
+              <a:defRPr sz="1500">
+                <a:solidFill>
+                  <a:srgbClr val="1A1A1A"/>
+                </a:solidFill>
+              </a:defRPr>
+            </a:pPr>
+            <a:r>
+              <a:t>• Re-open the edit drawer → the new location should be listed</a:t>
+            </a:r>
+          </a:p>
+        </p:txBody>
+      </p:sp>
+    </p:spTree>
+  </p:cSld>
+  <p:clrMapOvr>
+    <a:masterClrMapping/>
+  </p:clrMapOvr>
+</p:sld>
+</file>
+
+<file path=ppt/slides/slide247.xml><?xml version="1.0" encoding="utf-8"?>
+<p:sld xmlns:a="http://schemas.openxmlformats.org/drawingml/2006/main" xmlns:p="http://schemas.openxmlformats.org/presentationml/2006/main" xmlns:r="http://schemas.openxmlformats.org/officeDocument/2006/relationships">
+  <p:cSld>
+    <p:spTree>
+      <p:nvGrpSpPr>
+        <p:cNvPr id="1" name=""/>
+        <p:cNvGrpSpPr/>
+        <p:nvPr/>
+      </p:nvGrpSpPr>
+      <p:grpSpPr/>
+      <p:sp>
+        <p:nvSpPr>
+          <p:cNvPr id="2" name="TextBox 1"/>
+          <p:cNvSpPr txBox="1"/>
+          <p:nvPr/>
+        </p:nvSpPr>
+        <p:spPr>
+          <a:xfrm>
+            <a:off x="640080" y="365760"/>
+            <a:ext cx="10881360" cy="731520"/>
+          </a:xfrm>
+          <a:prstGeom prst="rect">
+            <a:avLst/>
+          </a:prstGeom>
+          <a:noFill/>
+        </p:spPr>
+        <p:txBody>
+          <a:bodyPr wrap="square">
+            <a:spAutoFit/>
+          </a:bodyPr>
+          <a:lstStyle/>
+          <a:p>
+            <a:pPr>
+              <a:defRPr sz="2800" b="1">
+                <a:solidFill>
+                  <a:srgbClr val="00A89B"/>
+                </a:solidFill>
+              </a:defRPr>
+            </a:pPr>
+            <a:r>
+              <a:t>Solution</a:t>
+            </a:r>
+          </a:p>
+        </p:txBody>
+      </p:sp>
+      <p:sp>
+        <p:nvSpPr>
+          <p:cNvPr id="3" name="Rectangle 2"/>
+          <p:cNvSpPr/>
+          <p:nvPr/>
+        </p:nvSpPr>
+        <p:spPr>
+          <a:xfrm>
+            <a:off x="640080" y="1051560"/>
+            <a:ext cx="1828800" cy="25400"/>
+          </a:xfrm>
+          <a:prstGeom prst="rect">
+            <a:avLst/>
+          </a:prstGeom>
+          <a:solidFill>
+            <a:srgbClr val="00A89B"/>
+          </a:solidFill>
+          <a:ln>
+            <a:noFill/>
+          </a:ln>
+        </p:spPr>
+        <p:style>
+          <a:lnRef idx="1">
+            <a:schemeClr val="accent1"/>
+          </a:lnRef>
+          <a:fillRef idx="3">
+            <a:schemeClr val="accent1"/>
+          </a:fillRef>
+          <a:effectRef idx="2">
+            <a:schemeClr val="accent1"/>
+          </a:effectRef>
+          <a:fontRef idx="minor">
+            <a:schemeClr val="lt1"/>
+          </a:fontRef>
+        </p:style>
+        <p:txBody>
+          <a:bodyPr rtlCol="0" anchor="ctr"/>
+          <a:lstStyle/>
+          <a:p>
+            <a:pPr algn="ctr"/>
+          </a:p>
+        </p:txBody>
+      </p:sp>
+      <p:sp>
+        <p:nvSpPr>
+          <p:cNvPr id="4" name="TextBox 3"/>
+          <p:cNvSpPr txBox="1"/>
+          <p:nvPr/>
+        </p:nvSpPr>
+        <p:spPr>
+          <a:xfrm>
+            <a:off x="640080" y="1371600"/>
+            <a:ext cx="10881360" cy="5029200"/>
+          </a:xfrm>
+          <a:prstGeom prst="rect">
+            <a:avLst/>
+          </a:prstGeom>
+          <a:noFill/>
+        </p:spPr>
+        <p:txBody>
+          <a:bodyPr wrap="square">
+            <a:spAutoFit/>
+          </a:bodyPr>
+          <a:lstStyle/>
+          <a:p>
+            <a:pPr>
+              <a:spcBef>
+                <a:spcPts val="0"/>
+              </a:spcBef>
+              <a:spcAft>
+                <a:spcPts val="0"/>
+              </a:spcAft>
+            </a:pPr>
+            <a:r>
+              <a:rPr sz="900">
+                <a:solidFill>
+                  <a:srgbClr val="2D2D2D"/>
+                </a:solidFill>
+                <a:latin typeface="Consolas"/>
+              </a:rPr>
+              <a:t>./exercises/load.sh</a:t>
+            </a:r>
+            <a:r>
+              <a:rPr sz="900">
+                <a:solidFill>
+                  <a:srgbClr val="2D2D2D"/>
+                </a:solidFill>
+                <a:latin typeface="Consolas"/>
+              </a:rPr>
+              <a:t> supplier intermediate/merchant-portal-locations/complete</a:t>
             </a:r>
           </a:p>
         </p:txBody>

--- a/guides-pptx/spryker-academy-professional.pptx
+++ b/guides-pptx/spryker-academy-professional.pptx
@@ -13633,7 +13633,7 @@
               </a:defRPr>
             </a:pPr>
             <a:r>
-              <a:t>Command                                                        Purpose                                                                                                           </a:t>
+              <a:t>Command                                                                       Purpose                                                                                                           </a:t>
             </a:r>
           </a:p>
           <a:p>
@@ -13649,7 +13649,7 @@
               </a:defRPr>
             </a:pPr>
             <a:r>
-              <a:t>-------------------------------------------------------------  ------------------------------------------------------------------------------------------------------------------</a:t>
+              <a:t>----------------------------------------------------------------------------  ------------------------------------------------------------------------------------------------------------------</a:t>
             </a:r>
           </a:p>
           <a:p>
@@ -13665,7 +13665,7 @@
               </a:defRPr>
             </a:pPr>
             <a:r>
-              <a:t>GLUE_APPLICATION=GLUE glue api:generate storefront             Generate Storefront API resources                                                                                 </a:t>
+              <a:t>docker/sdk cli GLUE_APPLICATION=GLUE glue api:generate storefront             Generate Storefront API resources                                                                                 </a:t>
             </a:r>
           </a:p>
           <a:p>
@@ -13681,7 +13681,7 @@
               </a:defRPr>
             </a:pPr>
             <a:r>
-              <a:t>GLUE_APPLICATION=GLUE_BACKEND glue api:generate backend        Generate Backend API resources                                                                                    </a:t>
+              <a:t>docker/sdk cli GLUE_APPLICATION=GLUE_BACKEND glue api:generate backend        Generate Backend API resources                                                                                    </a:t>
             </a:r>
           </a:p>
           <a:p>
@@ -13697,7 +13697,7 @@
               </a:defRPr>
             </a:pPr>
             <a:r>
-              <a:t>GLUE_APPLICATION=GLUE glue cache:clear                         Delete the compiled Glue container and its metadata cache, so the next request reads the generated resources again</a:t>
+              <a:t>docker/sdk cli GLUE_APPLICATION=GLUE glue cache:clear                         Delete the compiled Glue container and its metadata cache, so the next request reads the generated resources again</a:t>
             </a:r>
           </a:p>
           <a:p>
@@ -13713,7 +13713,7 @@
               </a:defRPr>
             </a:pPr>
             <a:r>
-              <a:t>GLUE_APPLICATION=GLUE glue api:generate --dry-run              Preview what would be generated without writing                                                                   </a:t>
+              <a:t>docker/sdk cli GLUE_APPLICATION=GLUE glue api:generate --dry-run              Preview what would be generated without writing                                                                   </a:t>
             </a:r>
           </a:p>
           <a:p>
@@ -13729,7 +13729,7 @@
               </a:defRPr>
             </a:pPr>
             <a:r>
-              <a:t>GLUE_APPLICATION=GLUE glue api:generate --validate-only        Validate schemas without generating                                                                               </a:t>
+              <a:t>docker/sdk cli GLUE_APPLICATION=GLUE glue api:generate --validate-only        Validate schemas without generating                                                                               </a:t>
             </a:r>
           </a:p>
           <a:p>
@@ -13745,7 +13745,7 @@
               </a:defRPr>
             </a:pPr>
             <a:r>
-              <a:t>GLUE_APPLICATION=GLUE glue api:generate -r suppliers           Generate only the suppliers resource                                                                              </a:t>
+              <a:t>docker/sdk cli GLUE_APPLICATION=GLUE glue api:generate -r suppliers           Generate only the suppliers resource                                                                              </a:t>
             </a:r>
           </a:p>
           <a:p>
@@ -13761,7 +13761,7 @@
               </a:defRPr>
             </a:pPr>
             <a:r>
-              <a:t>GLUE_APPLICATION=GLUE glue api:debug --list                    List all registered resources                                                                                     </a:t>
+              <a:t>docker/sdk cli GLUE_APPLICATION=GLUE glue api:debug --list                    List all registered resources                                                                                     </a:t>
             </a:r>
           </a:p>
           <a:p>
@@ -13777,7 +13777,7 @@
               </a:defRPr>
             </a:pPr>
             <a:r>
-              <a:t>GLUE_APPLICATION=GLUE glue api:debug suppliers                 Inspect a specific resource’s merged schema                                                                       </a:t>
+              <a:t>docker/sdk cli GLUE_APPLICATION=GLUE glue api:debug suppliers                 Inspect a specific resource’s merged schema                                                                       </a:t>
             </a:r>
           </a:p>
           <a:p>
@@ -13793,7 +13793,7 @@
               </a:defRPr>
             </a:pPr>
             <a:r>
-              <a:t>GLUE_APPLICATION=GLUE glue api:debug suppliers --show-sources  Show all source files with priority                                                                               </a:t>
+              <a:t>docker/sdk cli GLUE_APPLICATION=GLUE glue api:debug suppliers --show-sources  Show all source files with priority                                                                               </a:t>
             </a:r>
           </a:p>
           <a:p>
@@ -13809,7 +13809,7 @@
               </a:defRPr>
             </a:pPr>
             <a:r>
-              <a:t>GLUE_APPLICATION=GLUE glue api:debug suppliers --show-merged   Display the final merged YAML schema</a:t>
+              <a:t>docker/sdk cli GLUE_APPLICATION=GLUE glue api:debug suppliers --show-merged   Display the final merged YAML schema</a:t>
             </a:r>
           </a:p>
           <a:p>
@@ -13824,7 +13824,7 @@
               </a:defRPr>
             </a:pPr>
             <a:r>
-              <a:t>❝ Tip: All glue CLI commands require the GLUE_APPLICATION env var. Prefix every command with GLUE_APPLICATION=GLUE (the storefront API of this shop) or GLUE_APPLICATION=GLUE_BACKEND as needed.</a:t>
+              <a:t>❝ Tip: All glue CLI commands require the GLUE_APPLICATION env var. Run them inside the CLI container with docker/sdk cli and prefix every command with GLUE_APPLICATION=GLUE (the storefront API of this shop) or GLUE_APPLICATION=GLUE_BACKEND as needed.</a:t>
             </a:r>
           </a:p>
         </p:txBody>
